--- a/Seperated/Presentations/L6-Detail-Suni-intellektle-proseslerin-avtomatlasdirilmasi-RPA-AI.pptx
+++ b/Seperated/Presentations/L6-Detail-Suni-intellektle-proseslerin-avtomatlasdirilmasi-RPA-AI.pptx
@@ -30,6 +30,7 @@
     <p:sldId id="264" r:id="rId23"/>
     <p:sldId id="265" r:id="rId24"/>
     <p:sldId id="266" r:id="rId25"/>
+    <p:sldId id="267" r:id="rId26"/>
   </p:sldIdLst>
   <p:sldSz cx="14630400" cy="8229600"/>
   <p:notesSz cx="8229600" cy="14630400"/>
@@ -85,17 +86,17 @@
             <a:r>
               <a:rPr b="0" lang="en-US" sz="4400" spc="-1" strike="noStrike">
                 <a:solidFill>
-                  <a:schemeClr val="dk1"/>
-                </a:solidFill>
-                <a:latin typeface="Calibri Light"/>
+                  <a:srgbClr val="000000"/>
+                </a:solidFill>
+                <a:latin typeface="Arial"/>
               </a:rPr>
               <a:t>Click to move the slide</a:t>
             </a:r>
             <a:endParaRPr b="0" lang="en-US" sz="4400" spc="-1" strike="noStrike">
               <a:solidFill>
-                <a:schemeClr val="dk1"/>
-              </a:solidFill>
-              <a:latin typeface="Calibri Light"/>
+                <a:srgbClr val="000000"/>
+              </a:solidFill>
+              <a:latin typeface="Arial"/>
             </a:endParaRPr>
           </a:p>
         </p:txBody>
@@ -360,7 +361,7 @@
             <a:pPr indent="0" algn="r">
               <a:buNone/>
             </a:pPr>
-            <a:fld id="{EE450955-5945-4B48-BE4A-21CB4F78792B}" type="slidenum">
+            <a:fld id="{7EFA4AD5-FE00-49D2-9877-58999C9C9DEE}" type="slidenum">
               <a:rPr b="0" lang="en-US" sz="1400" spc="-1" strike="noStrike">
                 <a:solidFill>
                   <a:srgbClr val="000000"/>
@@ -403,7 +404,7 @@
       </p:grpSpPr>
       <p:sp>
         <p:nvSpPr>
-          <p:cNvPr id="185" name="PlaceHolder 1"/>
+          <p:cNvPr id="187" name="PlaceHolder 1"/>
           <p:cNvSpPr>
             <a:spLocks noGrp="1"/>
           </p:cNvSpPr>
@@ -414,19 +415,19 @@
         <p:spPr>
           <a:xfrm>
             <a:off x="685800" y="1143000"/>
-            <a:ext cx="5486040" cy="3085920"/>
-          </a:xfrm>
-          <a:prstGeom prst="rect">
-            <a:avLst/>
-          </a:prstGeom>
-          <a:ln w="0">
-            <a:noFill/>
-          </a:ln>
-        </p:spPr>
-      </p:sp>
-      <p:sp>
-        <p:nvSpPr>
-          <p:cNvPr id="186" name="PlaceHolder 2"/>
+            <a:ext cx="5485680" cy="3085560"/>
+          </a:xfrm>
+          <a:prstGeom prst="rect">
+            <a:avLst/>
+          </a:prstGeom>
+          <a:ln w="0">
+            <a:noFill/>
+          </a:ln>
+        </p:spPr>
+      </p:sp>
+      <p:sp>
+        <p:nvSpPr>
+          <p:cNvPr id="188" name="PlaceHolder 2"/>
           <p:cNvSpPr>
             <a:spLocks noGrp="1"/>
           </p:cNvSpPr>
@@ -437,7 +438,7 @@
         <p:spPr>
           <a:xfrm>
             <a:off x="685800" y="4400640"/>
-            <a:ext cx="5486040" cy="3600000"/>
+            <a:ext cx="5485680" cy="3599640"/>
           </a:xfrm>
           <a:prstGeom prst="rect">
             <a:avLst/>
@@ -466,7 +467,7 @@
       </p:sp>
       <p:sp>
         <p:nvSpPr>
-          <p:cNvPr id="187" name="PlaceHolder 3"/>
+          <p:cNvPr id="189" name="PlaceHolder 3"/>
           <p:cNvSpPr>
             <a:spLocks noGrp="1"/>
           </p:cNvSpPr>
@@ -477,7 +478,7 @@
         <p:spPr>
           <a:xfrm>
             <a:off x="3884760" y="8685360"/>
-            <a:ext cx="2971440" cy="458280"/>
+            <a:ext cx="2971080" cy="457920"/>
           </a:xfrm>
           <a:prstGeom prst="rect">
             <a:avLst/>
@@ -497,6 +498,9 @@
                 <a:spcPct val="100000"/>
               </a:lnSpc>
               <a:buNone/>
+              <a:tabLst>
+                <a:tab algn="l" pos="0"/>
+              </a:tabLst>
               <a:defRPr b="0" lang="en-US" sz="1200" spc="-1" strike="noStrike">
                 <a:solidFill>
                   <a:srgbClr val="000000"/>
@@ -511,8 +515,11 @@
                 <a:spcPct val="100000"/>
               </a:lnSpc>
               <a:buNone/>
-            </a:pPr>
-            <a:fld id="{F9FE8D9C-D152-426B-8599-798638BBBA4D}" type="slidenum">
+              <a:tabLst>
+                <a:tab algn="l" pos="0"/>
+              </a:tabLst>
+            </a:pPr>
+            <a:fld id="{ADB147B4-1BEA-425E-8EEA-C18772F82B09}" type="slidenum">
               <a:rPr b="0" lang="en-US" sz="1200" spc="-1" strike="noStrike">
                 <a:solidFill>
                   <a:srgbClr val="000000"/>
@@ -554,7 +561,7 @@
       </p:grpSpPr>
       <p:sp>
         <p:nvSpPr>
-          <p:cNvPr id="212" name="PlaceHolder 1"/>
+          <p:cNvPr id="214" name="PlaceHolder 1"/>
           <p:cNvSpPr>
             <a:spLocks noGrp="1"/>
           </p:cNvSpPr>
@@ -565,19 +572,19 @@
         <p:spPr>
           <a:xfrm>
             <a:off x="685800" y="1143000"/>
-            <a:ext cx="5486040" cy="3085920"/>
-          </a:xfrm>
-          <a:prstGeom prst="rect">
-            <a:avLst/>
-          </a:prstGeom>
-          <a:ln w="0">
-            <a:noFill/>
-          </a:ln>
-        </p:spPr>
-      </p:sp>
-      <p:sp>
-        <p:nvSpPr>
-          <p:cNvPr id="213" name="PlaceHolder 2"/>
+            <a:ext cx="5485680" cy="3085560"/>
+          </a:xfrm>
+          <a:prstGeom prst="rect">
+            <a:avLst/>
+          </a:prstGeom>
+          <a:ln w="0">
+            <a:noFill/>
+          </a:ln>
+        </p:spPr>
+      </p:sp>
+      <p:sp>
+        <p:nvSpPr>
+          <p:cNvPr id="215" name="PlaceHolder 2"/>
           <p:cNvSpPr>
             <a:spLocks noGrp="1"/>
           </p:cNvSpPr>
@@ -588,7 +595,7 @@
         <p:spPr>
           <a:xfrm>
             <a:off x="685800" y="4400640"/>
-            <a:ext cx="5486040" cy="3600000"/>
+            <a:ext cx="5485680" cy="3599640"/>
           </a:xfrm>
           <a:prstGeom prst="rect">
             <a:avLst/>
@@ -617,7 +624,7 @@
       </p:sp>
       <p:sp>
         <p:nvSpPr>
-          <p:cNvPr id="214" name="PlaceHolder 3"/>
+          <p:cNvPr id="216" name="PlaceHolder 3"/>
           <p:cNvSpPr>
             <a:spLocks noGrp="1"/>
           </p:cNvSpPr>
@@ -628,7 +635,7 @@
         <p:spPr>
           <a:xfrm>
             <a:off x="3884760" y="8685360"/>
-            <a:ext cx="2971440" cy="458280"/>
+            <a:ext cx="2971080" cy="457920"/>
           </a:xfrm>
           <a:prstGeom prst="rect">
             <a:avLst/>
@@ -648,6 +655,9 @@
                 <a:spcPct val="100000"/>
               </a:lnSpc>
               <a:buNone/>
+              <a:tabLst>
+                <a:tab algn="l" pos="0"/>
+              </a:tabLst>
               <a:defRPr b="0" lang="en-US" sz="1200" spc="-1" strike="noStrike">
                 <a:solidFill>
                   <a:srgbClr val="000000"/>
@@ -662,8 +672,11 @@
                 <a:spcPct val="100000"/>
               </a:lnSpc>
               <a:buNone/>
-            </a:pPr>
-            <a:fld id="{46EB4918-B75E-4616-B38B-FAB7EA2C7BB2}" type="slidenum">
+              <a:tabLst>
+                <a:tab algn="l" pos="0"/>
+              </a:tabLst>
+            </a:pPr>
+            <a:fld id="{4CD146D2-76A3-4AD9-934B-5D81F82A30E0}" type="slidenum">
               <a:rPr b="0" lang="en-US" sz="1200" spc="-1" strike="noStrike">
                 <a:solidFill>
                   <a:srgbClr val="000000"/>
@@ -705,7 +718,7 @@
       </p:grpSpPr>
       <p:sp>
         <p:nvSpPr>
-          <p:cNvPr id="215" name="PlaceHolder 1"/>
+          <p:cNvPr id="217" name="PlaceHolder 1"/>
           <p:cNvSpPr>
             <a:spLocks noGrp="1"/>
           </p:cNvSpPr>
@@ -716,19 +729,19 @@
         <p:spPr>
           <a:xfrm>
             <a:off x="685800" y="1143000"/>
-            <a:ext cx="5486040" cy="3085920"/>
-          </a:xfrm>
-          <a:prstGeom prst="rect">
-            <a:avLst/>
-          </a:prstGeom>
-          <a:ln w="0">
-            <a:noFill/>
-          </a:ln>
-        </p:spPr>
-      </p:sp>
-      <p:sp>
-        <p:nvSpPr>
-          <p:cNvPr id="216" name="PlaceHolder 2"/>
+            <a:ext cx="5485680" cy="3085560"/>
+          </a:xfrm>
+          <a:prstGeom prst="rect">
+            <a:avLst/>
+          </a:prstGeom>
+          <a:ln w="0">
+            <a:noFill/>
+          </a:ln>
+        </p:spPr>
+      </p:sp>
+      <p:sp>
+        <p:nvSpPr>
+          <p:cNvPr id="218" name="PlaceHolder 2"/>
           <p:cNvSpPr>
             <a:spLocks noGrp="1"/>
           </p:cNvSpPr>
@@ -739,7 +752,7 @@
         <p:spPr>
           <a:xfrm>
             <a:off x="685800" y="4400640"/>
-            <a:ext cx="5486040" cy="3600000"/>
+            <a:ext cx="5485680" cy="3599640"/>
           </a:xfrm>
           <a:prstGeom prst="rect">
             <a:avLst/>
@@ -768,7 +781,7 @@
       </p:sp>
       <p:sp>
         <p:nvSpPr>
-          <p:cNvPr id="217" name="PlaceHolder 3"/>
+          <p:cNvPr id="219" name="PlaceHolder 3"/>
           <p:cNvSpPr>
             <a:spLocks noGrp="1"/>
           </p:cNvSpPr>
@@ -779,7 +792,7 @@
         <p:spPr>
           <a:xfrm>
             <a:off x="3884760" y="8685360"/>
-            <a:ext cx="2971440" cy="458280"/>
+            <a:ext cx="2971080" cy="457920"/>
           </a:xfrm>
           <a:prstGeom prst="rect">
             <a:avLst/>
@@ -799,6 +812,9 @@
                 <a:spcPct val="100000"/>
               </a:lnSpc>
               <a:buNone/>
+              <a:tabLst>
+                <a:tab algn="l" pos="0"/>
+              </a:tabLst>
               <a:defRPr b="0" lang="en-US" sz="1200" spc="-1" strike="noStrike">
                 <a:solidFill>
                   <a:srgbClr val="000000"/>
@@ -813,8 +829,11 @@
                 <a:spcPct val="100000"/>
               </a:lnSpc>
               <a:buNone/>
-            </a:pPr>
-            <a:fld id="{B9C35FE2-460F-42D5-9B0E-15C88425F63F}" type="slidenum">
+              <a:tabLst>
+                <a:tab algn="l" pos="0"/>
+              </a:tabLst>
+            </a:pPr>
+            <a:fld id="{C34C7B50-DDB1-4C11-9537-DE72BFC2B3ED}" type="slidenum">
               <a:rPr b="0" lang="en-US" sz="1200" spc="-1" strike="noStrike">
                 <a:solidFill>
                   <a:srgbClr val="000000"/>
@@ -856,7 +875,7 @@
       </p:grpSpPr>
       <p:sp>
         <p:nvSpPr>
-          <p:cNvPr id="188" name="PlaceHolder 1"/>
+          <p:cNvPr id="190" name="PlaceHolder 1"/>
           <p:cNvSpPr>
             <a:spLocks noGrp="1"/>
           </p:cNvSpPr>
@@ -867,19 +886,19 @@
         <p:spPr>
           <a:xfrm>
             <a:off x="685800" y="1143000"/>
-            <a:ext cx="5486040" cy="3085920"/>
-          </a:xfrm>
-          <a:prstGeom prst="rect">
-            <a:avLst/>
-          </a:prstGeom>
-          <a:ln w="0">
-            <a:noFill/>
-          </a:ln>
-        </p:spPr>
-      </p:sp>
-      <p:sp>
-        <p:nvSpPr>
-          <p:cNvPr id="189" name="PlaceHolder 2"/>
+            <a:ext cx="5485680" cy="3085560"/>
+          </a:xfrm>
+          <a:prstGeom prst="rect">
+            <a:avLst/>
+          </a:prstGeom>
+          <a:ln w="0">
+            <a:noFill/>
+          </a:ln>
+        </p:spPr>
+      </p:sp>
+      <p:sp>
+        <p:nvSpPr>
+          <p:cNvPr id="191" name="PlaceHolder 2"/>
           <p:cNvSpPr>
             <a:spLocks noGrp="1"/>
           </p:cNvSpPr>
@@ -890,7 +909,7 @@
         <p:spPr>
           <a:xfrm>
             <a:off x="685800" y="4400640"/>
-            <a:ext cx="5486040" cy="3600000"/>
+            <a:ext cx="5485680" cy="3599640"/>
           </a:xfrm>
           <a:prstGeom prst="rect">
             <a:avLst/>
@@ -919,7 +938,7 @@
       </p:sp>
       <p:sp>
         <p:nvSpPr>
-          <p:cNvPr id="190" name="PlaceHolder 3"/>
+          <p:cNvPr id="192" name="PlaceHolder 3"/>
           <p:cNvSpPr>
             <a:spLocks noGrp="1"/>
           </p:cNvSpPr>
@@ -930,7 +949,7 @@
         <p:spPr>
           <a:xfrm>
             <a:off x="3884760" y="8685360"/>
-            <a:ext cx="2971440" cy="458280"/>
+            <a:ext cx="2971080" cy="457920"/>
           </a:xfrm>
           <a:prstGeom prst="rect">
             <a:avLst/>
@@ -950,6 +969,9 @@
                 <a:spcPct val="100000"/>
               </a:lnSpc>
               <a:buNone/>
+              <a:tabLst>
+                <a:tab algn="l" pos="0"/>
+              </a:tabLst>
               <a:defRPr b="0" lang="en-US" sz="1200" spc="-1" strike="noStrike">
                 <a:solidFill>
                   <a:srgbClr val="000000"/>
@@ -964,8 +986,11 @@
                 <a:spcPct val="100000"/>
               </a:lnSpc>
               <a:buNone/>
-            </a:pPr>
-            <a:fld id="{28F93F24-3058-4FF4-A478-79B76471E5C1}" type="slidenum">
+              <a:tabLst>
+                <a:tab algn="l" pos="0"/>
+              </a:tabLst>
+            </a:pPr>
+            <a:fld id="{6A3A89CB-024E-43DE-95E4-C3992F9814D8}" type="slidenum">
               <a:rPr b="0" lang="en-US" sz="1200" spc="-1" strike="noStrike">
                 <a:solidFill>
                   <a:srgbClr val="000000"/>
@@ -1007,7 +1032,7 @@
       </p:grpSpPr>
       <p:sp>
         <p:nvSpPr>
-          <p:cNvPr id="191" name="PlaceHolder 1"/>
+          <p:cNvPr id="193" name="PlaceHolder 1"/>
           <p:cNvSpPr>
             <a:spLocks noGrp="1"/>
           </p:cNvSpPr>
@@ -1018,19 +1043,19 @@
         <p:spPr>
           <a:xfrm>
             <a:off x="685800" y="1143000"/>
-            <a:ext cx="5486040" cy="3085920"/>
-          </a:xfrm>
-          <a:prstGeom prst="rect">
-            <a:avLst/>
-          </a:prstGeom>
-          <a:ln w="0">
-            <a:noFill/>
-          </a:ln>
-        </p:spPr>
-      </p:sp>
-      <p:sp>
-        <p:nvSpPr>
-          <p:cNvPr id="192" name="PlaceHolder 2"/>
+            <a:ext cx="5485680" cy="3085560"/>
+          </a:xfrm>
+          <a:prstGeom prst="rect">
+            <a:avLst/>
+          </a:prstGeom>
+          <a:ln w="0">
+            <a:noFill/>
+          </a:ln>
+        </p:spPr>
+      </p:sp>
+      <p:sp>
+        <p:nvSpPr>
+          <p:cNvPr id="194" name="PlaceHolder 2"/>
           <p:cNvSpPr>
             <a:spLocks noGrp="1"/>
           </p:cNvSpPr>
@@ -1041,7 +1066,7 @@
         <p:spPr>
           <a:xfrm>
             <a:off x="685800" y="4400640"/>
-            <a:ext cx="5486040" cy="3600000"/>
+            <a:ext cx="5485680" cy="3599640"/>
           </a:xfrm>
           <a:prstGeom prst="rect">
             <a:avLst/>
@@ -1070,7 +1095,7 @@
       </p:sp>
       <p:sp>
         <p:nvSpPr>
-          <p:cNvPr id="193" name="PlaceHolder 3"/>
+          <p:cNvPr id="195" name="PlaceHolder 3"/>
           <p:cNvSpPr>
             <a:spLocks noGrp="1"/>
           </p:cNvSpPr>
@@ -1081,7 +1106,7 @@
         <p:spPr>
           <a:xfrm>
             <a:off x="3884760" y="8685360"/>
-            <a:ext cx="2971440" cy="458280"/>
+            <a:ext cx="2971080" cy="457920"/>
           </a:xfrm>
           <a:prstGeom prst="rect">
             <a:avLst/>
@@ -1101,6 +1126,9 @@
                 <a:spcPct val="100000"/>
               </a:lnSpc>
               <a:buNone/>
+              <a:tabLst>
+                <a:tab algn="l" pos="0"/>
+              </a:tabLst>
               <a:defRPr b="0" lang="en-US" sz="1200" spc="-1" strike="noStrike">
                 <a:solidFill>
                   <a:srgbClr val="000000"/>
@@ -1115,8 +1143,11 @@
                 <a:spcPct val="100000"/>
               </a:lnSpc>
               <a:buNone/>
-            </a:pPr>
-            <a:fld id="{2E76DB68-40E3-41BD-A13D-6458FEA55FD8}" type="slidenum">
+              <a:tabLst>
+                <a:tab algn="l" pos="0"/>
+              </a:tabLst>
+            </a:pPr>
+            <a:fld id="{36471B94-E6B1-4682-A704-2AD0826C67ED}" type="slidenum">
               <a:rPr b="0" lang="en-US" sz="1200" spc="-1" strike="noStrike">
                 <a:solidFill>
                   <a:srgbClr val="000000"/>
@@ -1158,7 +1189,7 @@
       </p:grpSpPr>
       <p:sp>
         <p:nvSpPr>
-          <p:cNvPr id="194" name="PlaceHolder 1"/>
+          <p:cNvPr id="196" name="PlaceHolder 1"/>
           <p:cNvSpPr>
             <a:spLocks noGrp="1"/>
           </p:cNvSpPr>
@@ -1169,19 +1200,19 @@
         <p:spPr>
           <a:xfrm>
             <a:off x="685800" y="1143000"/>
-            <a:ext cx="5486040" cy="3085920"/>
-          </a:xfrm>
-          <a:prstGeom prst="rect">
-            <a:avLst/>
-          </a:prstGeom>
-          <a:ln w="0">
-            <a:noFill/>
-          </a:ln>
-        </p:spPr>
-      </p:sp>
-      <p:sp>
-        <p:nvSpPr>
-          <p:cNvPr id="195" name="PlaceHolder 2"/>
+            <a:ext cx="5485680" cy="3085560"/>
+          </a:xfrm>
+          <a:prstGeom prst="rect">
+            <a:avLst/>
+          </a:prstGeom>
+          <a:ln w="0">
+            <a:noFill/>
+          </a:ln>
+        </p:spPr>
+      </p:sp>
+      <p:sp>
+        <p:nvSpPr>
+          <p:cNvPr id="197" name="PlaceHolder 2"/>
           <p:cNvSpPr>
             <a:spLocks noGrp="1"/>
           </p:cNvSpPr>
@@ -1192,7 +1223,7 @@
         <p:spPr>
           <a:xfrm>
             <a:off x="685800" y="4400640"/>
-            <a:ext cx="5486040" cy="3600000"/>
+            <a:ext cx="5485680" cy="3599640"/>
           </a:xfrm>
           <a:prstGeom prst="rect">
             <a:avLst/>
@@ -1221,7 +1252,7 @@
       </p:sp>
       <p:sp>
         <p:nvSpPr>
-          <p:cNvPr id="196" name="PlaceHolder 3"/>
+          <p:cNvPr id="198" name="PlaceHolder 3"/>
           <p:cNvSpPr>
             <a:spLocks noGrp="1"/>
           </p:cNvSpPr>
@@ -1232,7 +1263,7 @@
         <p:spPr>
           <a:xfrm>
             <a:off x="3884760" y="8685360"/>
-            <a:ext cx="2971440" cy="458280"/>
+            <a:ext cx="2971080" cy="457920"/>
           </a:xfrm>
           <a:prstGeom prst="rect">
             <a:avLst/>
@@ -1252,6 +1283,9 @@
                 <a:spcPct val="100000"/>
               </a:lnSpc>
               <a:buNone/>
+              <a:tabLst>
+                <a:tab algn="l" pos="0"/>
+              </a:tabLst>
               <a:defRPr b="0" lang="en-US" sz="1200" spc="-1" strike="noStrike">
                 <a:solidFill>
                   <a:srgbClr val="000000"/>
@@ -1266,8 +1300,11 @@
                 <a:spcPct val="100000"/>
               </a:lnSpc>
               <a:buNone/>
-            </a:pPr>
-            <a:fld id="{B2DA598E-472C-4369-85B7-30CB64873D77}" type="slidenum">
+              <a:tabLst>
+                <a:tab algn="l" pos="0"/>
+              </a:tabLst>
+            </a:pPr>
+            <a:fld id="{8B50B0DD-BA6D-498B-830D-FDEB75F2EAE2}" type="slidenum">
               <a:rPr b="0" lang="en-US" sz="1200" spc="-1" strike="noStrike">
                 <a:solidFill>
                   <a:srgbClr val="000000"/>
@@ -1309,7 +1346,7 @@
       </p:grpSpPr>
       <p:sp>
         <p:nvSpPr>
-          <p:cNvPr id="197" name="PlaceHolder 1"/>
+          <p:cNvPr id="199" name="PlaceHolder 1"/>
           <p:cNvSpPr>
             <a:spLocks noGrp="1"/>
           </p:cNvSpPr>
@@ -1320,19 +1357,19 @@
         <p:spPr>
           <a:xfrm>
             <a:off x="685800" y="1143000"/>
-            <a:ext cx="5486040" cy="3085920"/>
-          </a:xfrm>
-          <a:prstGeom prst="rect">
-            <a:avLst/>
-          </a:prstGeom>
-          <a:ln w="0">
-            <a:noFill/>
-          </a:ln>
-        </p:spPr>
-      </p:sp>
-      <p:sp>
-        <p:nvSpPr>
-          <p:cNvPr id="198" name="PlaceHolder 2"/>
+            <a:ext cx="5485680" cy="3085560"/>
+          </a:xfrm>
+          <a:prstGeom prst="rect">
+            <a:avLst/>
+          </a:prstGeom>
+          <a:ln w="0">
+            <a:noFill/>
+          </a:ln>
+        </p:spPr>
+      </p:sp>
+      <p:sp>
+        <p:nvSpPr>
+          <p:cNvPr id="200" name="PlaceHolder 2"/>
           <p:cNvSpPr>
             <a:spLocks noGrp="1"/>
           </p:cNvSpPr>
@@ -1343,7 +1380,7 @@
         <p:spPr>
           <a:xfrm>
             <a:off x="685800" y="4400640"/>
-            <a:ext cx="5486040" cy="3600000"/>
+            <a:ext cx="5485680" cy="3599640"/>
           </a:xfrm>
           <a:prstGeom prst="rect">
             <a:avLst/>
@@ -1372,7 +1409,7 @@
       </p:sp>
       <p:sp>
         <p:nvSpPr>
-          <p:cNvPr id="199" name="PlaceHolder 3"/>
+          <p:cNvPr id="201" name="PlaceHolder 3"/>
           <p:cNvSpPr>
             <a:spLocks noGrp="1"/>
           </p:cNvSpPr>
@@ -1383,7 +1420,7 @@
         <p:spPr>
           <a:xfrm>
             <a:off x="3884760" y="8685360"/>
-            <a:ext cx="2971440" cy="458280"/>
+            <a:ext cx="2971080" cy="457920"/>
           </a:xfrm>
           <a:prstGeom prst="rect">
             <a:avLst/>
@@ -1403,6 +1440,9 @@
                 <a:spcPct val="100000"/>
               </a:lnSpc>
               <a:buNone/>
+              <a:tabLst>
+                <a:tab algn="l" pos="0"/>
+              </a:tabLst>
               <a:defRPr b="0" lang="en-US" sz="1200" spc="-1" strike="noStrike">
                 <a:solidFill>
                   <a:srgbClr val="000000"/>
@@ -1417,8 +1457,11 @@
                 <a:spcPct val="100000"/>
               </a:lnSpc>
               <a:buNone/>
-            </a:pPr>
-            <a:fld id="{968AC0C2-B83E-44D4-B376-9D203721ADE1}" type="slidenum">
+              <a:tabLst>
+                <a:tab algn="l" pos="0"/>
+              </a:tabLst>
+            </a:pPr>
+            <a:fld id="{D481B310-2083-4BF7-9412-AF39E0E97B3F}" type="slidenum">
               <a:rPr b="0" lang="en-US" sz="1200" spc="-1" strike="noStrike">
                 <a:solidFill>
                   <a:srgbClr val="000000"/>
@@ -1460,7 +1503,7 @@
       </p:grpSpPr>
       <p:sp>
         <p:nvSpPr>
-          <p:cNvPr id="200" name="PlaceHolder 1"/>
+          <p:cNvPr id="202" name="PlaceHolder 1"/>
           <p:cNvSpPr>
             <a:spLocks noGrp="1"/>
           </p:cNvSpPr>
@@ -1471,19 +1514,19 @@
         <p:spPr>
           <a:xfrm>
             <a:off x="685800" y="1143000"/>
-            <a:ext cx="5486040" cy="3085920"/>
-          </a:xfrm>
-          <a:prstGeom prst="rect">
-            <a:avLst/>
-          </a:prstGeom>
-          <a:ln w="0">
-            <a:noFill/>
-          </a:ln>
-        </p:spPr>
-      </p:sp>
-      <p:sp>
-        <p:nvSpPr>
-          <p:cNvPr id="201" name="PlaceHolder 2"/>
+            <a:ext cx="5485680" cy="3085560"/>
+          </a:xfrm>
+          <a:prstGeom prst="rect">
+            <a:avLst/>
+          </a:prstGeom>
+          <a:ln w="0">
+            <a:noFill/>
+          </a:ln>
+        </p:spPr>
+      </p:sp>
+      <p:sp>
+        <p:nvSpPr>
+          <p:cNvPr id="203" name="PlaceHolder 2"/>
           <p:cNvSpPr>
             <a:spLocks noGrp="1"/>
           </p:cNvSpPr>
@@ -1494,7 +1537,7 @@
         <p:spPr>
           <a:xfrm>
             <a:off x="685800" y="4400640"/>
-            <a:ext cx="5486040" cy="3600000"/>
+            <a:ext cx="5485680" cy="3599640"/>
           </a:xfrm>
           <a:prstGeom prst="rect">
             <a:avLst/>
@@ -1523,7 +1566,7 @@
       </p:sp>
       <p:sp>
         <p:nvSpPr>
-          <p:cNvPr id="202" name="PlaceHolder 3"/>
+          <p:cNvPr id="204" name="PlaceHolder 3"/>
           <p:cNvSpPr>
             <a:spLocks noGrp="1"/>
           </p:cNvSpPr>
@@ -1534,7 +1577,7 @@
         <p:spPr>
           <a:xfrm>
             <a:off x="3884760" y="8685360"/>
-            <a:ext cx="2971440" cy="458280"/>
+            <a:ext cx="2971080" cy="457920"/>
           </a:xfrm>
           <a:prstGeom prst="rect">
             <a:avLst/>
@@ -1554,6 +1597,9 @@
                 <a:spcPct val="100000"/>
               </a:lnSpc>
               <a:buNone/>
+              <a:tabLst>
+                <a:tab algn="l" pos="0"/>
+              </a:tabLst>
               <a:defRPr b="0" lang="en-US" sz="1200" spc="-1" strike="noStrike">
                 <a:solidFill>
                   <a:srgbClr val="000000"/>
@@ -1568,8 +1614,11 @@
                 <a:spcPct val="100000"/>
               </a:lnSpc>
               <a:buNone/>
-            </a:pPr>
-            <a:fld id="{F7F4FB8C-6EE2-4BB3-8D2D-FAF90035C281}" type="slidenum">
+              <a:tabLst>
+                <a:tab algn="l" pos="0"/>
+              </a:tabLst>
+            </a:pPr>
+            <a:fld id="{5E180952-B40C-4D74-BF9A-56534FAF2335}" type="slidenum">
               <a:rPr b="0" lang="en-US" sz="1200" spc="-1" strike="noStrike">
                 <a:solidFill>
                   <a:srgbClr val="000000"/>
@@ -1611,7 +1660,7 @@
       </p:grpSpPr>
       <p:sp>
         <p:nvSpPr>
-          <p:cNvPr id="203" name="PlaceHolder 1"/>
+          <p:cNvPr id="205" name="PlaceHolder 1"/>
           <p:cNvSpPr>
             <a:spLocks noGrp="1"/>
           </p:cNvSpPr>
@@ -1622,19 +1671,19 @@
         <p:spPr>
           <a:xfrm>
             <a:off x="685800" y="1143000"/>
-            <a:ext cx="5486040" cy="3085920"/>
-          </a:xfrm>
-          <a:prstGeom prst="rect">
-            <a:avLst/>
-          </a:prstGeom>
-          <a:ln w="0">
-            <a:noFill/>
-          </a:ln>
-        </p:spPr>
-      </p:sp>
-      <p:sp>
-        <p:nvSpPr>
-          <p:cNvPr id="204" name="PlaceHolder 2"/>
+            <a:ext cx="5485680" cy="3085560"/>
+          </a:xfrm>
+          <a:prstGeom prst="rect">
+            <a:avLst/>
+          </a:prstGeom>
+          <a:ln w="0">
+            <a:noFill/>
+          </a:ln>
+        </p:spPr>
+      </p:sp>
+      <p:sp>
+        <p:nvSpPr>
+          <p:cNvPr id="206" name="PlaceHolder 2"/>
           <p:cNvSpPr>
             <a:spLocks noGrp="1"/>
           </p:cNvSpPr>
@@ -1645,7 +1694,7 @@
         <p:spPr>
           <a:xfrm>
             <a:off x="685800" y="4400640"/>
-            <a:ext cx="5486040" cy="3600000"/>
+            <a:ext cx="5485680" cy="3599640"/>
           </a:xfrm>
           <a:prstGeom prst="rect">
             <a:avLst/>
@@ -1674,7 +1723,7 @@
       </p:sp>
       <p:sp>
         <p:nvSpPr>
-          <p:cNvPr id="205" name="PlaceHolder 3"/>
+          <p:cNvPr id="207" name="PlaceHolder 3"/>
           <p:cNvSpPr>
             <a:spLocks noGrp="1"/>
           </p:cNvSpPr>
@@ -1685,7 +1734,7 @@
         <p:spPr>
           <a:xfrm>
             <a:off x="3884760" y="8685360"/>
-            <a:ext cx="2971440" cy="458280"/>
+            <a:ext cx="2971080" cy="457920"/>
           </a:xfrm>
           <a:prstGeom prst="rect">
             <a:avLst/>
@@ -1705,6 +1754,9 @@
                 <a:spcPct val="100000"/>
               </a:lnSpc>
               <a:buNone/>
+              <a:tabLst>
+                <a:tab algn="l" pos="0"/>
+              </a:tabLst>
               <a:defRPr b="0" lang="en-US" sz="1200" spc="-1" strike="noStrike">
                 <a:solidFill>
                   <a:srgbClr val="000000"/>
@@ -1719,8 +1771,11 @@
                 <a:spcPct val="100000"/>
               </a:lnSpc>
               <a:buNone/>
-            </a:pPr>
-            <a:fld id="{796E8525-7501-4408-879F-D783A0D06B59}" type="slidenum">
+              <a:tabLst>
+                <a:tab algn="l" pos="0"/>
+              </a:tabLst>
+            </a:pPr>
+            <a:fld id="{7B476EED-2F15-49E4-8499-EFE46402D588}" type="slidenum">
               <a:rPr b="0" lang="en-US" sz="1200" spc="-1" strike="noStrike">
                 <a:solidFill>
                   <a:srgbClr val="000000"/>
@@ -1762,7 +1817,7 @@
       </p:grpSpPr>
       <p:sp>
         <p:nvSpPr>
-          <p:cNvPr id="206" name="PlaceHolder 1"/>
+          <p:cNvPr id="208" name="PlaceHolder 1"/>
           <p:cNvSpPr>
             <a:spLocks noGrp="1"/>
           </p:cNvSpPr>
@@ -1773,19 +1828,19 @@
         <p:spPr>
           <a:xfrm>
             <a:off x="685800" y="1143000"/>
-            <a:ext cx="5486040" cy="3085920"/>
-          </a:xfrm>
-          <a:prstGeom prst="rect">
-            <a:avLst/>
-          </a:prstGeom>
-          <a:ln w="0">
-            <a:noFill/>
-          </a:ln>
-        </p:spPr>
-      </p:sp>
-      <p:sp>
-        <p:nvSpPr>
-          <p:cNvPr id="207" name="PlaceHolder 2"/>
+            <a:ext cx="5485680" cy="3085560"/>
+          </a:xfrm>
+          <a:prstGeom prst="rect">
+            <a:avLst/>
+          </a:prstGeom>
+          <a:ln w="0">
+            <a:noFill/>
+          </a:ln>
+        </p:spPr>
+      </p:sp>
+      <p:sp>
+        <p:nvSpPr>
+          <p:cNvPr id="209" name="PlaceHolder 2"/>
           <p:cNvSpPr>
             <a:spLocks noGrp="1"/>
           </p:cNvSpPr>
@@ -1796,7 +1851,7 @@
         <p:spPr>
           <a:xfrm>
             <a:off x="685800" y="4400640"/>
-            <a:ext cx="5486040" cy="3600000"/>
+            <a:ext cx="5485680" cy="3599640"/>
           </a:xfrm>
           <a:prstGeom prst="rect">
             <a:avLst/>
@@ -1825,7 +1880,7 @@
       </p:sp>
       <p:sp>
         <p:nvSpPr>
-          <p:cNvPr id="208" name="PlaceHolder 3"/>
+          <p:cNvPr id="210" name="PlaceHolder 3"/>
           <p:cNvSpPr>
             <a:spLocks noGrp="1"/>
           </p:cNvSpPr>
@@ -1836,7 +1891,7 @@
         <p:spPr>
           <a:xfrm>
             <a:off x="3884760" y="8685360"/>
-            <a:ext cx="2971440" cy="458280"/>
+            <a:ext cx="2971080" cy="457920"/>
           </a:xfrm>
           <a:prstGeom prst="rect">
             <a:avLst/>
@@ -1856,6 +1911,9 @@
                 <a:spcPct val="100000"/>
               </a:lnSpc>
               <a:buNone/>
+              <a:tabLst>
+                <a:tab algn="l" pos="0"/>
+              </a:tabLst>
               <a:defRPr b="0" lang="en-US" sz="1200" spc="-1" strike="noStrike">
                 <a:solidFill>
                   <a:srgbClr val="000000"/>
@@ -1870,8 +1928,11 @@
                 <a:spcPct val="100000"/>
               </a:lnSpc>
               <a:buNone/>
-            </a:pPr>
-            <a:fld id="{67144B24-F545-4BAC-B228-3199FB60D6F2}" type="slidenum">
+              <a:tabLst>
+                <a:tab algn="l" pos="0"/>
+              </a:tabLst>
+            </a:pPr>
+            <a:fld id="{E9D82FE9-00E1-4703-A6D1-E76E04D46C52}" type="slidenum">
               <a:rPr b="0" lang="en-US" sz="1200" spc="-1" strike="noStrike">
                 <a:solidFill>
                   <a:srgbClr val="000000"/>
@@ -1913,7 +1974,7 @@
       </p:grpSpPr>
       <p:sp>
         <p:nvSpPr>
-          <p:cNvPr id="209" name="PlaceHolder 1"/>
+          <p:cNvPr id="211" name="PlaceHolder 1"/>
           <p:cNvSpPr>
             <a:spLocks noGrp="1"/>
           </p:cNvSpPr>
@@ -1924,19 +1985,19 @@
         <p:spPr>
           <a:xfrm>
             <a:off x="685800" y="1143000"/>
-            <a:ext cx="5486040" cy="3085920"/>
-          </a:xfrm>
-          <a:prstGeom prst="rect">
-            <a:avLst/>
-          </a:prstGeom>
-          <a:ln w="0">
-            <a:noFill/>
-          </a:ln>
-        </p:spPr>
-      </p:sp>
-      <p:sp>
-        <p:nvSpPr>
-          <p:cNvPr id="210" name="PlaceHolder 2"/>
+            <a:ext cx="5485680" cy="3085560"/>
+          </a:xfrm>
+          <a:prstGeom prst="rect">
+            <a:avLst/>
+          </a:prstGeom>
+          <a:ln w="0">
+            <a:noFill/>
+          </a:ln>
+        </p:spPr>
+      </p:sp>
+      <p:sp>
+        <p:nvSpPr>
+          <p:cNvPr id="212" name="PlaceHolder 2"/>
           <p:cNvSpPr>
             <a:spLocks noGrp="1"/>
           </p:cNvSpPr>
@@ -1947,7 +2008,7 @@
         <p:spPr>
           <a:xfrm>
             <a:off x="685800" y="4400640"/>
-            <a:ext cx="5486040" cy="3600000"/>
+            <a:ext cx="5485680" cy="3599640"/>
           </a:xfrm>
           <a:prstGeom prst="rect">
             <a:avLst/>
@@ -1976,7 +2037,7 @@
       </p:sp>
       <p:sp>
         <p:nvSpPr>
-          <p:cNvPr id="211" name="PlaceHolder 3"/>
+          <p:cNvPr id="213" name="PlaceHolder 3"/>
           <p:cNvSpPr>
             <a:spLocks noGrp="1"/>
           </p:cNvSpPr>
@@ -1987,7 +2048,7 @@
         <p:spPr>
           <a:xfrm>
             <a:off x="3884760" y="8685360"/>
-            <a:ext cx="2971440" cy="458280"/>
+            <a:ext cx="2971080" cy="457920"/>
           </a:xfrm>
           <a:prstGeom prst="rect">
             <a:avLst/>
@@ -2007,6 +2068,9 @@
                 <a:spcPct val="100000"/>
               </a:lnSpc>
               <a:buNone/>
+              <a:tabLst>
+                <a:tab algn="l" pos="0"/>
+              </a:tabLst>
               <a:defRPr b="0" lang="en-US" sz="1200" spc="-1" strike="noStrike">
                 <a:solidFill>
                   <a:srgbClr val="000000"/>
@@ -2021,8 +2085,11 @@
                 <a:spcPct val="100000"/>
               </a:lnSpc>
               <a:buNone/>
-            </a:pPr>
-            <a:fld id="{53D271A1-2B9B-4490-B4BF-2F983939B26B}" type="slidenum">
+              <a:tabLst>
+                <a:tab algn="l" pos="0"/>
+              </a:tabLst>
+            </a:pPr>
+            <a:fld id="{3C799DE9-2051-4CF4-BCFF-A160DAFD3DB7}" type="slidenum">
               <a:rPr b="0" lang="en-US" sz="1200" spc="-1" strike="noStrike">
                 <a:solidFill>
                   <a:srgbClr val="000000"/>
@@ -2368,7 +2435,7 @@
         <p:spPr>
           <a:xfrm>
             <a:off x="0" y="0"/>
-            <a:ext cx="14630040" cy="8229240"/>
+            <a:ext cx="14629680" cy="8228880"/>
           </a:xfrm>
           <a:prstGeom prst="rect">
             <a:avLst/>
@@ -2391,6 +2458,11 @@
             <a:noAutofit/>
           </a:bodyPr>
           <a:p>
+            <a:pPr>
+              <a:lnSpc>
+                <a:spcPct val="100000"/>
+              </a:lnSpc>
+            </a:pPr>
             <a:endParaRPr b="0" lang="en-US" sz="1800" spc="-1" strike="noStrike">
               <a:solidFill>
                 <a:srgbClr val="ffffff"/>
@@ -2409,7 +2481,7 @@
         <p:spPr>
           <a:xfrm>
             <a:off x="0" y="0"/>
-            <a:ext cx="14630040" cy="8229240"/>
+            <a:ext cx="14629680" cy="8228880"/>
           </a:xfrm>
           <a:prstGeom prst="rect">
             <a:avLst/>
@@ -2432,6 +2504,11 @@
             <a:noAutofit/>
           </a:bodyPr>
           <a:p>
+            <a:pPr>
+              <a:lnSpc>
+                <a:spcPct val="100000"/>
+              </a:lnSpc>
+            </a:pPr>
             <a:endParaRPr b="0" lang="en-US" sz="1800" spc="-1" strike="noStrike">
               <a:solidFill>
                 <a:srgbClr val="ffffff"/>
@@ -2475,17 +2552,17 @@
             <a:r>
               <a:rPr b="0" lang="en-US" sz="4400" spc="-1" strike="noStrike">
                 <a:solidFill>
-                  <a:schemeClr val="dk1"/>
-                </a:solidFill>
-                <a:latin typeface="Calibri Light"/>
+                  <a:srgbClr val="000000"/>
+                </a:solidFill>
+                <a:latin typeface="Arial"/>
               </a:rPr>
               <a:t>Click to edit the title text format</a:t>
             </a:r>
             <a:endParaRPr b="0" lang="en-US" sz="4400" spc="-1" strike="noStrike">
               <a:solidFill>
-                <a:schemeClr val="dk1"/>
-              </a:solidFill>
-              <a:latin typeface="Calibri Light"/>
+                <a:srgbClr val="000000"/>
+              </a:solidFill>
+              <a:latin typeface="Arial"/>
             </a:endParaRPr>
           </a:p>
         </p:txBody>
@@ -2532,17 +2609,17 @@
             <a:r>
               <a:rPr b="0" lang="en-US" sz="3200" spc="-1" strike="noStrike">
                 <a:solidFill>
-                  <a:schemeClr val="dk1"/>
-                </a:solidFill>
-                <a:latin typeface="Calibri"/>
+                  <a:srgbClr val="000000"/>
+                </a:solidFill>
+                <a:latin typeface="Arial"/>
               </a:rPr>
               <a:t>Click to edit the outline text format</a:t>
             </a:r>
             <a:endParaRPr b="0" lang="en-US" sz="3200" spc="-1" strike="noStrike">
               <a:solidFill>
-                <a:schemeClr val="dk1"/>
-              </a:solidFill>
-              <a:latin typeface="Calibri"/>
+                <a:srgbClr val="000000"/>
+              </a:solidFill>
+              <a:latin typeface="Arial"/>
             </a:endParaRPr>
           </a:p>
           <a:p>
@@ -2558,19 +2635,19 @@
               <a:buChar char=""/>
             </a:pPr>
             <a:r>
-              <a:rPr b="0" lang="en-US" sz="2400" spc="-1" strike="noStrike">
-                <a:solidFill>
-                  <a:schemeClr val="dk1"/>
-                </a:solidFill>
-                <a:latin typeface="Calibri"/>
+              <a:rPr b="0" lang="en-US" sz="2800" spc="-1" strike="noStrike">
+                <a:solidFill>
+                  <a:srgbClr val="000000"/>
+                </a:solidFill>
+                <a:latin typeface="Arial"/>
               </a:rPr>
               <a:t>Second Outline Level</a:t>
             </a:r>
-            <a:endParaRPr b="0" lang="en-US" sz="2400" spc="-1" strike="noStrike">
-              <a:solidFill>
-                <a:schemeClr val="dk1"/>
-              </a:solidFill>
-              <a:latin typeface="Calibri"/>
+            <a:endParaRPr b="0" lang="en-US" sz="2800" spc="-1" strike="noStrike">
+              <a:solidFill>
+                <a:srgbClr val="000000"/>
+              </a:solidFill>
+              <a:latin typeface="Arial"/>
             </a:endParaRPr>
           </a:p>
           <a:p>
@@ -2586,19 +2663,19 @@
               <a:buChar char=""/>
             </a:pPr>
             <a:r>
-              <a:rPr b="0" lang="en-US" sz="2000" spc="-1" strike="noStrike">
-                <a:solidFill>
-                  <a:schemeClr val="dk1"/>
-                </a:solidFill>
-                <a:latin typeface="Calibri"/>
+              <a:rPr b="0" lang="en-US" sz="2400" spc="-1" strike="noStrike">
+                <a:solidFill>
+                  <a:srgbClr val="000000"/>
+                </a:solidFill>
+                <a:latin typeface="Arial"/>
               </a:rPr>
               <a:t>Third Outline Level</a:t>
             </a:r>
-            <a:endParaRPr b="0" lang="en-US" sz="2000" spc="-1" strike="noStrike">
-              <a:solidFill>
-                <a:schemeClr val="dk1"/>
-              </a:solidFill>
-              <a:latin typeface="Calibri"/>
+            <a:endParaRPr b="0" lang="en-US" sz="2400" spc="-1" strike="noStrike">
+              <a:solidFill>
+                <a:srgbClr val="000000"/>
+              </a:solidFill>
+              <a:latin typeface="Arial"/>
             </a:endParaRPr>
           </a:p>
           <a:p>
@@ -2616,17 +2693,17 @@
             <a:r>
               <a:rPr b="0" lang="en-US" sz="2000" spc="-1" strike="noStrike">
                 <a:solidFill>
-                  <a:schemeClr val="dk1"/>
-                </a:solidFill>
-                <a:latin typeface="Calibri"/>
+                  <a:srgbClr val="000000"/>
+                </a:solidFill>
+                <a:latin typeface="Arial"/>
               </a:rPr>
               <a:t>Fourth Outline Level</a:t>
             </a:r>
             <a:endParaRPr b="0" lang="en-US" sz="2000" spc="-1" strike="noStrike">
               <a:solidFill>
-                <a:schemeClr val="dk1"/>
-              </a:solidFill>
-              <a:latin typeface="Calibri"/>
+                <a:srgbClr val="000000"/>
+              </a:solidFill>
+              <a:latin typeface="Arial"/>
             </a:endParaRPr>
           </a:p>
           <a:p>
@@ -2644,17 +2721,17 @@
             <a:r>
               <a:rPr b="0" lang="en-US" sz="2000" spc="-1" strike="noStrike">
                 <a:solidFill>
-                  <a:schemeClr val="dk1"/>
-                </a:solidFill>
-                <a:latin typeface="Calibri"/>
+                  <a:srgbClr val="000000"/>
+                </a:solidFill>
+                <a:latin typeface="Arial"/>
               </a:rPr>
               <a:t>Fifth Outline Level</a:t>
             </a:r>
             <a:endParaRPr b="0" lang="en-US" sz="2000" spc="-1" strike="noStrike">
               <a:solidFill>
-                <a:schemeClr val="dk1"/>
-              </a:solidFill>
-              <a:latin typeface="Calibri"/>
+                <a:srgbClr val="000000"/>
+              </a:solidFill>
+              <a:latin typeface="Arial"/>
             </a:endParaRPr>
           </a:p>
           <a:p>
@@ -2672,17 +2749,17 @@
             <a:r>
               <a:rPr b="0" lang="en-US" sz="2000" spc="-1" strike="noStrike">
                 <a:solidFill>
-                  <a:schemeClr val="dk1"/>
-                </a:solidFill>
-                <a:latin typeface="Calibri"/>
+                  <a:srgbClr val="000000"/>
+                </a:solidFill>
+                <a:latin typeface="Arial"/>
               </a:rPr>
               <a:t>Sixth Outline Level</a:t>
             </a:r>
             <a:endParaRPr b="0" lang="en-US" sz="2000" spc="-1" strike="noStrike">
               <a:solidFill>
-                <a:schemeClr val="dk1"/>
-              </a:solidFill>
-              <a:latin typeface="Calibri"/>
+                <a:srgbClr val="000000"/>
+              </a:solidFill>
+              <a:latin typeface="Arial"/>
             </a:endParaRPr>
           </a:p>
           <a:p>
@@ -2700,17 +2777,17 @@
             <a:r>
               <a:rPr b="0" lang="en-US" sz="2000" spc="-1" strike="noStrike">
                 <a:solidFill>
-                  <a:schemeClr val="dk1"/>
-                </a:solidFill>
-                <a:latin typeface="Calibri"/>
+                  <a:srgbClr val="000000"/>
+                </a:solidFill>
+                <a:latin typeface="Arial"/>
               </a:rPr>
               <a:t>Seventh Outline Level</a:t>
             </a:r>
             <a:endParaRPr b="0" lang="en-US" sz="2000" spc="-1" strike="noStrike">
               <a:solidFill>
-                <a:schemeClr val="dk1"/>
-              </a:solidFill>
-              <a:latin typeface="Calibri"/>
+                <a:srgbClr val="000000"/>
+              </a:solidFill>
+              <a:latin typeface="Arial"/>
             </a:endParaRPr>
           </a:p>
         </p:txBody>
@@ -2750,7 +2827,7 @@
         <p:spPr>
           <a:xfrm>
             <a:off x="0" y="0"/>
-            <a:ext cx="14630040" cy="8229240"/>
+            <a:ext cx="14629680" cy="8228880"/>
           </a:xfrm>
           <a:prstGeom prst="rect">
             <a:avLst/>
@@ -2773,6 +2850,11 @@
             <a:noAutofit/>
           </a:bodyPr>
           <a:p>
+            <a:pPr>
+              <a:lnSpc>
+                <a:spcPct val="100000"/>
+              </a:lnSpc>
+            </a:pPr>
             <a:endParaRPr b="0" lang="en-US" sz="1800" spc="-1" strike="noStrike">
               <a:solidFill>
                 <a:srgbClr val="ffffff"/>
@@ -2791,7 +2873,7 @@
         <p:spPr>
           <a:xfrm>
             <a:off x="0" y="0"/>
-            <a:ext cx="14630040" cy="8229240"/>
+            <a:ext cx="14629680" cy="8228880"/>
           </a:xfrm>
           <a:prstGeom prst="rect">
             <a:avLst/>
@@ -2814,6 +2896,11 @@
             <a:noAutofit/>
           </a:bodyPr>
           <a:p>
+            <a:pPr>
+              <a:lnSpc>
+                <a:spcPct val="100000"/>
+              </a:lnSpc>
+            </a:pPr>
             <a:endParaRPr b="0" lang="en-US" sz="1800" spc="-1" strike="noStrike">
               <a:solidFill>
                 <a:srgbClr val="ffffff"/>
@@ -2857,17 +2944,17 @@
             <a:r>
               <a:rPr b="0" lang="en-US" sz="4400" spc="-1" strike="noStrike">
                 <a:solidFill>
-                  <a:schemeClr val="dk1"/>
-                </a:solidFill>
-                <a:latin typeface="Calibri Light"/>
+                  <a:srgbClr val="000000"/>
+                </a:solidFill>
+                <a:latin typeface="Arial"/>
               </a:rPr>
               <a:t>Click to edit the title text format</a:t>
             </a:r>
             <a:endParaRPr b="0" lang="en-US" sz="4400" spc="-1" strike="noStrike">
               <a:solidFill>
-                <a:schemeClr val="dk1"/>
-              </a:solidFill>
-              <a:latin typeface="Calibri Light"/>
+                <a:srgbClr val="000000"/>
+              </a:solidFill>
+              <a:latin typeface="Arial"/>
             </a:endParaRPr>
           </a:p>
         </p:txBody>
@@ -2914,17 +3001,17 @@
             <a:r>
               <a:rPr b="0" lang="en-US" sz="3200" spc="-1" strike="noStrike">
                 <a:solidFill>
-                  <a:schemeClr val="dk1"/>
-                </a:solidFill>
-                <a:latin typeface="Calibri"/>
+                  <a:srgbClr val="000000"/>
+                </a:solidFill>
+                <a:latin typeface="Arial"/>
               </a:rPr>
               <a:t>Click to edit the outline text format</a:t>
             </a:r>
             <a:endParaRPr b="0" lang="en-US" sz="3200" spc="-1" strike="noStrike">
               <a:solidFill>
-                <a:schemeClr val="dk1"/>
-              </a:solidFill>
-              <a:latin typeface="Calibri"/>
+                <a:srgbClr val="000000"/>
+              </a:solidFill>
+              <a:latin typeface="Arial"/>
             </a:endParaRPr>
           </a:p>
           <a:p>
@@ -2940,19 +3027,19 @@
               <a:buChar char=""/>
             </a:pPr>
             <a:r>
-              <a:rPr b="0" lang="en-US" sz="2400" spc="-1" strike="noStrike">
-                <a:solidFill>
-                  <a:schemeClr val="dk1"/>
-                </a:solidFill>
-                <a:latin typeface="Calibri"/>
+              <a:rPr b="0" lang="en-US" sz="2800" spc="-1" strike="noStrike">
+                <a:solidFill>
+                  <a:srgbClr val="000000"/>
+                </a:solidFill>
+                <a:latin typeface="Arial"/>
               </a:rPr>
               <a:t>Second Outline Level</a:t>
             </a:r>
-            <a:endParaRPr b="0" lang="en-US" sz="2400" spc="-1" strike="noStrike">
-              <a:solidFill>
-                <a:schemeClr val="dk1"/>
-              </a:solidFill>
-              <a:latin typeface="Calibri"/>
+            <a:endParaRPr b="0" lang="en-US" sz="2800" spc="-1" strike="noStrike">
+              <a:solidFill>
+                <a:srgbClr val="000000"/>
+              </a:solidFill>
+              <a:latin typeface="Arial"/>
             </a:endParaRPr>
           </a:p>
           <a:p>
@@ -2968,19 +3055,19 @@
               <a:buChar char=""/>
             </a:pPr>
             <a:r>
-              <a:rPr b="0" lang="en-US" sz="2000" spc="-1" strike="noStrike">
-                <a:solidFill>
-                  <a:schemeClr val="dk1"/>
-                </a:solidFill>
-                <a:latin typeface="Calibri"/>
+              <a:rPr b="0" lang="en-US" sz="2400" spc="-1" strike="noStrike">
+                <a:solidFill>
+                  <a:srgbClr val="000000"/>
+                </a:solidFill>
+                <a:latin typeface="Arial"/>
               </a:rPr>
               <a:t>Third Outline Level</a:t>
             </a:r>
-            <a:endParaRPr b="0" lang="en-US" sz="2000" spc="-1" strike="noStrike">
-              <a:solidFill>
-                <a:schemeClr val="dk1"/>
-              </a:solidFill>
-              <a:latin typeface="Calibri"/>
+            <a:endParaRPr b="0" lang="en-US" sz="2400" spc="-1" strike="noStrike">
+              <a:solidFill>
+                <a:srgbClr val="000000"/>
+              </a:solidFill>
+              <a:latin typeface="Arial"/>
             </a:endParaRPr>
           </a:p>
           <a:p>
@@ -2998,17 +3085,17 @@
             <a:r>
               <a:rPr b="0" lang="en-US" sz="2000" spc="-1" strike="noStrike">
                 <a:solidFill>
-                  <a:schemeClr val="dk1"/>
-                </a:solidFill>
-                <a:latin typeface="Calibri"/>
+                  <a:srgbClr val="000000"/>
+                </a:solidFill>
+                <a:latin typeface="Arial"/>
               </a:rPr>
               <a:t>Fourth Outline Level</a:t>
             </a:r>
             <a:endParaRPr b="0" lang="en-US" sz="2000" spc="-1" strike="noStrike">
               <a:solidFill>
-                <a:schemeClr val="dk1"/>
-              </a:solidFill>
-              <a:latin typeface="Calibri"/>
+                <a:srgbClr val="000000"/>
+              </a:solidFill>
+              <a:latin typeface="Arial"/>
             </a:endParaRPr>
           </a:p>
           <a:p>
@@ -3026,17 +3113,17 @@
             <a:r>
               <a:rPr b="0" lang="en-US" sz="2000" spc="-1" strike="noStrike">
                 <a:solidFill>
-                  <a:schemeClr val="dk1"/>
-                </a:solidFill>
-                <a:latin typeface="Calibri"/>
+                  <a:srgbClr val="000000"/>
+                </a:solidFill>
+                <a:latin typeface="Arial"/>
               </a:rPr>
               <a:t>Fifth Outline Level</a:t>
             </a:r>
             <a:endParaRPr b="0" lang="en-US" sz="2000" spc="-1" strike="noStrike">
               <a:solidFill>
-                <a:schemeClr val="dk1"/>
-              </a:solidFill>
-              <a:latin typeface="Calibri"/>
+                <a:srgbClr val="000000"/>
+              </a:solidFill>
+              <a:latin typeface="Arial"/>
             </a:endParaRPr>
           </a:p>
           <a:p>
@@ -3054,17 +3141,17 @@
             <a:r>
               <a:rPr b="0" lang="en-US" sz="2000" spc="-1" strike="noStrike">
                 <a:solidFill>
-                  <a:schemeClr val="dk1"/>
-                </a:solidFill>
-                <a:latin typeface="Calibri"/>
+                  <a:srgbClr val="000000"/>
+                </a:solidFill>
+                <a:latin typeface="Arial"/>
               </a:rPr>
               <a:t>Sixth Outline Level</a:t>
             </a:r>
             <a:endParaRPr b="0" lang="en-US" sz="2000" spc="-1" strike="noStrike">
               <a:solidFill>
-                <a:schemeClr val="dk1"/>
-              </a:solidFill>
-              <a:latin typeface="Calibri"/>
+                <a:srgbClr val="000000"/>
+              </a:solidFill>
+              <a:latin typeface="Arial"/>
             </a:endParaRPr>
           </a:p>
           <a:p>
@@ -3082,17 +3169,17 @@
             <a:r>
               <a:rPr b="0" lang="en-US" sz="2000" spc="-1" strike="noStrike">
                 <a:solidFill>
-                  <a:schemeClr val="dk1"/>
-                </a:solidFill>
-                <a:latin typeface="Calibri"/>
+                  <a:srgbClr val="000000"/>
+                </a:solidFill>
+                <a:latin typeface="Arial"/>
               </a:rPr>
               <a:t>Seventh Outline Level</a:t>
             </a:r>
             <a:endParaRPr b="0" lang="en-US" sz="2000" spc="-1" strike="noStrike">
               <a:solidFill>
-                <a:schemeClr val="dk1"/>
-              </a:solidFill>
-              <a:latin typeface="Calibri"/>
+                <a:srgbClr val="000000"/>
+              </a:solidFill>
+              <a:latin typeface="Arial"/>
             </a:endParaRPr>
           </a:p>
         </p:txBody>
@@ -3132,7 +3219,7 @@
         <p:spPr>
           <a:xfrm>
             <a:off x="0" y="0"/>
-            <a:ext cx="14630040" cy="8229240"/>
+            <a:ext cx="14629680" cy="8228880"/>
           </a:xfrm>
           <a:prstGeom prst="rect">
             <a:avLst/>
@@ -3155,6 +3242,11 @@
             <a:noAutofit/>
           </a:bodyPr>
           <a:p>
+            <a:pPr>
+              <a:lnSpc>
+                <a:spcPct val="100000"/>
+              </a:lnSpc>
+            </a:pPr>
             <a:endParaRPr b="0" lang="en-US" sz="1800" spc="-1" strike="noStrike">
               <a:solidFill>
                 <a:srgbClr val="ffffff"/>
@@ -3173,7 +3265,7 @@
         <p:spPr>
           <a:xfrm>
             <a:off x="0" y="0"/>
-            <a:ext cx="14630040" cy="8229240"/>
+            <a:ext cx="14629680" cy="8228880"/>
           </a:xfrm>
           <a:prstGeom prst="rect">
             <a:avLst/>
@@ -3196,6 +3288,11 @@
             <a:noAutofit/>
           </a:bodyPr>
           <a:p>
+            <a:pPr>
+              <a:lnSpc>
+                <a:spcPct val="100000"/>
+              </a:lnSpc>
+            </a:pPr>
             <a:endParaRPr b="0" lang="en-US" sz="1800" spc="-1" strike="noStrike">
               <a:solidFill>
                 <a:srgbClr val="ffffff"/>
@@ -3239,17 +3336,17 @@
             <a:r>
               <a:rPr b="0" lang="en-US" sz="4400" spc="-1" strike="noStrike">
                 <a:solidFill>
-                  <a:schemeClr val="dk1"/>
-                </a:solidFill>
-                <a:latin typeface="Calibri Light"/>
+                  <a:srgbClr val="000000"/>
+                </a:solidFill>
+                <a:latin typeface="Arial"/>
               </a:rPr>
               <a:t>Click to edit the title text format</a:t>
             </a:r>
             <a:endParaRPr b="0" lang="en-US" sz="4400" spc="-1" strike="noStrike">
               <a:solidFill>
-                <a:schemeClr val="dk1"/>
-              </a:solidFill>
-              <a:latin typeface="Calibri Light"/>
+                <a:srgbClr val="000000"/>
+              </a:solidFill>
+              <a:latin typeface="Arial"/>
             </a:endParaRPr>
           </a:p>
         </p:txBody>
@@ -3296,17 +3393,17 @@
             <a:r>
               <a:rPr b="0" lang="en-US" sz="3200" spc="-1" strike="noStrike">
                 <a:solidFill>
-                  <a:schemeClr val="dk1"/>
-                </a:solidFill>
-                <a:latin typeface="Calibri"/>
+                  <a:srgbClr val="000000"/>
+                </a:solidFill>
+                <a:latin typeface="Arial"/>
               </a:rPr>
               <a:t>Click to edit the outline text format</a:t>
             </a:r>
             <a:endParaRPr b="0" lang="en-US" sz="3200" spc="-1" strike="noStrike">
               <a:solidFill>
-                <a:schemeClr val="dk1"/>
-              </a:solidFill>
-              <a:latin typeface="Calibri"/>
+                <a:srgbClr val="000000"/>
+              </a:solidFill>
+              <a:latin typeface="Arial"/>
             </a:endParaRPr>
           </a:p>
           <a:p>
@@ -3322,19 +3419,19 @@
               <a:buChar char=""/>
             </a:pPr>
             <a:r>
-              <a:rPr b="0" lang="en-US" sz="2400" spc="-1" strike="noStrike">
-                <a:solidFill>
-                  <a:schemeClr val="dk1"/>
-                </a:solidFill>
-                <a:latin typeface="Calibri"/>
+              <a:rPr b="0" lang="en-US" sz="2800" spc="-1" strike="noStrike">
+                <a:solidFill>
+                  <a:srgbClr val="000000"/>
+                </a:solidFill>
+                <a:latin typeface="Arial"/>
               </a:rPr>
               <a:t>Second Outline Level</a:t>
             </a:r>
-            <a:endParaRPr b="0" lang="en-US" sz="2400" spc="-1" strike="noStrike">
-              <a:solidFill>
-                <a:schemeClr val="dk1"/>
-              </a:solidFill>
-              <a:latin typeface="Calibri"/>
+            <a:endParaRPr b="0" lang="en-US" sz="2800" spc="-1" strike="noStrike">
+              <a:solidFill>
+                <a:srgbClr val="000000"/>
+              </a:solidFill>
+              <a:latin typeface="Arial"/>
             </a:endParaRPr>
           </a:p>
           <a:p>
@@ -3350,19 +3447,19 @@
               <a:buChar char=""/>
             </a:pPr>
             <a:r>
-              <a:rPr b="0" lang="en-US" sz="2000" spc="-1" strike="noStrike">
-                <a:solidFill>
-                  <a:schemeClr val="dk1"/>
-                </a:solidFill>
-                <a:latin typeface="Calibri"/>
+              <a:rPr b="0" lang="en-US" sz="2400" spc="-1" strike="noStrike">
+                <a:solidFill>
+                  <a:srgbClr val="000000"/>
+                </a:solidFill>
+                <a:latin typeface="Arial"/>
               </a:rPr>
               <a:t>Third Outline Level</a:t>
             </a:r>
-            <a:endParaRPr b="0" lang="en-US" sz="2000" spc="-1" strike="noStrike">
-              <a:solidFill>
-                <a:schemeClr val="dk1"/>
-              </a:solidFill>
-              <a:latin typeface="Calibri"/>
+            <a:endParaRPr b="0" lang="en-US" sz="2400" spc="-1" strike="noStrike">
+              <a:solidFill>
+                <a:srgbClr val="000000"/>
+              </a:solidFill>
+              <a:latin typeface="Arial"/>
             </a:endParaRPr>
           </a:p>
           <a:p>
@@ -3380,17 +3477,17 @@
             <a:r>
               <a:rPr b="0" lang="en-US" sz="2000" spc="-1" strike="noStrike">
                 <a:solidFill>
-                  <a:schemeClr val="dk1"/>
-                </a:solidFill>
-                <a:latin typeface="Calibri"/>
+                  <a:srgbClr val="000000"/>
+                </a:solidFill>
+                <a:latin typeface="Arial"/>
               </a:rPr>
               <a:t>Fourth Outline Level</a:t>
             </a:r>
             <a:endParaRPr b="0" lang="en-US" sz="2000" spc="-1" strike="noStrike">
               <a:solidFill>
-                <a:schemeClr val="dk1"/>
-              </a:solidFill>
-              <a:latin typeface="Calibri"/>
+                <a:srgbClr val="000000"/>
+              </a:solidFill>
+              <a:latin typeface="Arial"/>
             </a:endParaRPr>
           </a:p>
           <a:p>
@@ -3408,17 +3505,17 @@
             <a:r>
               <a:rPr b="0" lang="en-US" sz="2000" spc="-1" strike="noStrike">
                 <a:solidFill>
-                  <a:schemeClr val="dk1"/>
-                </a:solidFill>
-                <a:latin typeface="Calibri"/>
+                  <a:srgbClr val="000000"/>
+                </a:solidFill>
+                <a:latin typeface="Arial"/>
               </a:rPr>
               <a:t>Fifth Outline Level</a:t>
             </a:r>
             <a:endParaRPr b="0" lang="en-US" sz="2000" spc="-1" strike="noStrike">
               <a:solidFill>
-                <a:schemeClr val="dk1"/>
-              </a:solidFill>
-              <a:latin typeface="Calibri"/>
+                <a:srgbClr val="000000"/>
+              </a:solidFill>
+              <a:latin typeface="Arial"/>
             </a:endParaRPr>
           </a:p>
           <a:p>
@@ -3436,17 +3533,17 @@
             <a:r>
               <a:rPr b="0" lang="en-US" sz="2000" spc="-1" strike="noStrike">
                 <a:solidFill>
-                  <a:schemeClr val="dk1"/>
-                </a:solidFill>
-                <a:latin typeface="Calibri"/>
+                  <a:srgbClr val="000000"/>
+                </a:solidFill>
+                <a:latin typeface="Arial"/>
               </a:rPr>
               <a:t>Sixth Outline Level</a:t>
             </a:r>
             <a:endParaRPr b="0" lang="en-US" sz="2000" spc="-1" strike="noStrike">
               <a:solidFill>
-                <a:schemeClr val="dk1"/>
-              </a:solidFill>
-              <a:latin typeface="Calibri"/>
+                <a:srgbClr val="000000"/>
+              </a:solidFill>
+              <a:latin typeface="Arial"/>
             </a:endParaRPr>
           </a:p>
           <a:p>
@@ -3464,17 +3561,17 @@
             <a:r>
               <a:rPr b="0" lang="en-US" sz="2000" spc="-1" strike="noStrike">
                 <a:solidFill>
-                  <a:schemeClr val="dk1"/>
-                </a:solidFill>
-                <a:latin typeface="Calibri"/>
+                  <a:srgbClr val="000000"/>
+                </a:solidFill>
+                <a:latin typeface="Arial"/>
               </a:rPr>
               <a:t>Seventh Outline Level</a:t>
             </a:r>
             <a:endParaRPr b="0" lang="en-US" sz="2000" spc="-1" strike="noStrike">
               <a:solidFill>
-                <a:schemeClr val="dk1"/>
-              </a:solidFill>
-              <a:latin typeface="Calibri"/>
+                <a:srgbClr val="000000"/>
+              </a:solidFill>
+              <a:latin typeface="Arial"/>
             </a:endParaRPr>
           </a:p>
         </p:txBody>
@@ -3514,7 +3611,7 @@
         <p:spPr>
           <a:xfrm>
             <a:off x="0" y="0"/>
-            <a:ext cx="14630040" cy="8229240"/>
+            <a:ext cx="14629680" cy="8228880"/>
           </a:xfrm>
           <a:prstGeom prst="rect">
             <a:avLst/>
@@ -3537,6 +3634,11 @@
             <a:noAutofit/>
           </a:bodyPr>
           <a:p>
+            <a:pPr>
+              <a:lnSpc>
+                <a:spcPct val="100000"/>
+              </a:lnSpc>
+            </a:pPr>
             <a:endParaRPr b="0" lang="en-US" sz="1800" spc="-1" strike="noStrike">
               <a:solidFill>
                 <a:srgbClr val="ffffff"/>
@@ -3555,7 +3657,7 @@
         <p:spPr>
           <a:xfrm>
             <a:off x="0" y="0"/>
-            <a:ext cx="14630040" cy="8229240"/>
+            <a:ext cx="14629680" cy="8228880"/>
           </a:xfrm>
           <a:prstGeom prst="rect">
             <a:avLst/>
@@ -3578,6 +3680,11 @@
             <a:noAutofit/>
           </a:bodyPr>
           <a:p>
+            <a:pPr>
+              <a:lnSpc>
+                <a:spcPct val="100000"/>
+              </a:lnSpc>
+            </a:pPr>
             <a:endParaRPr b="0" lang="en-US" sz="1800" spc="-1" strike="noStrike">
               <a:solidFill>
                 <a:srgbClr val="ffffff"/>
@@ -3621,26 +3728,35 @@
             <a:r>
               <a:rPr b="0" lang="en-US" sz="4400" spc="-1" strike="noStrike">
                 <a:solidFill>
-                  <a:schemeClr val="dk1"/>
-                </a:solidFill>
-                <a:latin typeface="Calibri Light"/>
-              </a:rPr>
-              <a:t>Click to edit the title text </a:t>
+                  <a:srgbClr val="000000"/>
+                </a:solidFill>
+                <a:latin typeface="Arial"/>
+              </a:rPr>
+              <a:t>Click to edit </a:t>
             </a:r>
             <a:r>
               <a:rPr b="0" lang="en-US" sz="4400" spc="-1" strike="noStrike">
                 <a:solidFill>
-                  <a:schemeClr val="dk1"/>
-                </a:solidFill>
-                <a:latin typeface="Calibri Light"/>
+                  <a:srgbClr val="000000"/>
+                </a:solidFill>
+                <a:latin typeface="Arial"/>
+              </a:rPr>
+              <a:t>the title text </a:t>
+            </a:r>
+            <a:r>
+              <a:rPr b="0" lang="en-US" sz="4400" spc="-1" strike="noStrike">
+                <a:solidFill>
+                  <a:srgbClr val="000000"/>
+                </a:solidFill>
+                <a:latin typeface="Arial"/>
               </a:rPr>
               <a:t>format</a:t>
             </a:r>
             <a:endParaRPr b="0" lang="en-US" sz="4400" spc="-1" strike="noStrike">
               <a:solidFill>
-                <a:schemeClr val="dk1"/>
-              </a:solidFill>
-              <a:latin typeface="Calibri Light"/>
+                <a:srgbClr val="000000"/>
+              </a:solidFill>
+              <a:latin typeface="Arial"/>
             </a:endParaRPr>
           </a:p>
         </p:txBody>
@@ -3687,17 +3803,17 @@
             <a:r>
               <a:rPr b="0" lang="en-US" sz="3200" spc="-1" strike="noStrike">
                 <a:solidFill>
-                  <a:schemeClr val="dk1"/>
-                </a:solidFill>
-                <a:latin typeface="Calibri"/>
+                  <a:srgbClr val="000000"/>
+                </a:solidFill>
+                <a:latin typeface="Arial"/>
               </a:rPr>
               <a:t>Click to edit the outline text format</a:t>
             </a:r>
             <a:endParaRPr b="0" lang="en-US" sz="3200" spc="-1" strike="noStrike">
               <a:solidFill>
-                <a:schemeClr val="dk1"/>
-              </a:solidFill>
-              <a:latin typeface="Calibri"/>
+                <a:srgbClr val="000000"/>
+              </a:solidFill>
+              <a:latin typeface="Arial"/>
             </a:endParaRPr>
           </a:p>
           <a:p>
@@ -3713,19 +3829,19 @@
               <a:buChar char=""/>
             </a:pPr>
             <a:r>
-              <a:rPr b="0" lang="en-US" sz="2400" spc="-1" strike="noStrike">
-                <a:solidFill>
-                  <a:schemeClr val="dk1"/>
-                </a:solidFill>
-                <a:latin typeface="Calibri"/>
+              <a:rPr b="0" lang="en-US" sz="2800" spc="-1" strike="noStrike">
+                <a:solidFill>
+                  <a:srgbClr val="000000"/>
+                </a:solidFill>
+                <a:latin typeface="Arial"/>
               </a:rPr>
               <a:t>Second Outline Level</a:t>
             </a:r>
-            <a:endParaRPr b="0" lang="en-US" sz="2400" spc="-1" strike="noStrike">
-              <a:solidFill>
-                <a:schemeClr val="dk1"/>
-              </a:solidFill>
-              <a:latin typeface="Calibri"/>
+            <a:endParaRPr b="0" lang="en-US" sz="2800" spc="-1" strike="noStrike">
+              <a:solidFill>
+                <a:srgbClr val="000000"/>
+              </a:solidFill>
+              <a:latin typeface="Arial"/>
             </a:endParaRPr>
           </a:p>
           <a:p>
@@ -3741,19 +3857,19 @@
               <a:buChar char=""/>
             </a:pPr>
             <a:r>
-              <a:rPr b="0" lang="en-US" sz="2000" spc="-1" strike="noStrike">
-                <a:solidFill>
-                  <a:schemeClr val="dk1"/>
-                </a:solidFill>
-                <a:latin typeface="Calibri"/>
+              <a:rPr b="0" lang="en-US" sz="2400" spc="-1" strike="noStrike">
+                <a:solidFill>
+                  <a:srgbClr val="000000"/>
+                </a:solidFill>
+                <a:latin typeface="Arial"/>
               </a:rPr>
               <a:t>Third Outline Level</a:t>
             </a:r>
-            <a:endParaRPr b="0" lang="en-US" sz="2000" spc="-1" strike="noStrike">
-              <a:solidFill>
-                <a:schemeClr val="dk1"/>
-              </a:solidFill>
-              <a:latin typeface="Calibri"/>
+            <a:endParaRPr b="0" lang="en-US" sz="2400" spc="-1" strike="noStrike">
+              <a:solidFill>
+                <a:srgbClr val="000000"/>
+              </a:solidFill>
+              <a:latin typeface="Arial"/>
             </a:endParaRPr>
           </a:p>
           <a:p>
@@ -3771,17 +3887,17 @@
             <a:r>
               <a:rPr b="0" lang="en-US" sz="2000" spc="-1" strike="noStrike">
                 <a:solidFill>
-                  <a:schemeClr val="dk1"/>
-                </a:solidFill>
-                <a:latin typeface="Calibri"/>
+                  <a:srgbClr val="000000"/>
+                </a:solidFill>
+                <a:latin typeface="Arial"/>
               </a:rPr>
               <a:t>Fourth Outline Level</a:t>
             </a:r>
             <a:endParaRPr b="0" lang="en-US" sz="2000" spc="-1" strike="noStrike">
               <a:solidFill>
-                <a:schemeClr val="dk1"/>
-              </a:solidFill>
-              <a:latin typeface="Calibri"/>
+                <a:srgbClr val="000000"/>
+              </a:solidFill>
+              <a:latin typeface="Arial"/>
             </a:endParaRPr>
           </a:p>
           <a:p>
@@ -3799,17 +3915,17 @@
             <a:r>
               <a:rPr b="0" lang="en-US" sz="2000" spc="-1" strike="noStrike">
                 <a:solidFill>
-                  <a:schemeClr val="dk1"/>
-                </a:solidFill>
-                <a:latin typeface="Calibri"/>
+                  <a:srgbClr val="000000"/>
+                </a:solidFill>
+                <a:latin typeface="Arial"/>
               </a:rPr>
               <a:t>Fifth Outline Level</a:t>
             </a:r>
             <a:endParaRPr b="0" lang="en-US" sz="2000" spc="-1" strike="noStrike">
               <a:solidFill>
-                <a:schemeClr val="dk1"/>
-              </a:solidFill>
-              <a:latin typeface="Calibri"/>
+                <a:srgbClr val="000000"/>
+              </a:solidFill>
+              <a:latin typeface="Arial"/>
             </a:endParaRPr>
           </a:p>
           <a:p>
@@ -3827,17 +3943,17 @@
             <a:r>
               <a:rPr b="0" lang="en-US" sz="2000" spc="-1" strike="noStrike">
                 <a:solidFill>
-                  <a:schemeClr val="dk1"/>
-                </a:solidFill>
-                <a:latin typeface="Calibri"/>
+                  <a:srgbClr val="000000"/>
+                </a:solidFill>
+                <a:latin typeface="Arial"/>
               </a:rPr>
               <a:t>Sixth Outline Level</a:t>
             </a:r>
             <a:endParaRPr b="0" lang="en-US" sz="2000" spc="-1" strike="noStrike">
               <a:solidFill>
-                <a:schemeClr val="dk1"/>
-              </a:solidFill>
-              <a:latin typeface="Calibri"/>
+                <a:srgbClr val="000000"/>
+              </a:solidFill>
+              <a:latin typeface="Arial"/>
             </a:endParaRPr>
           </a:p>
           <a:p>
@@ -3855,17 +3971,17 @@
             <a:r>
               <a:rPr b="0" lang="en-US" sz="2000" spc="-1" strike="noStrike">
                 <a:solidFill>
-                  <a:schemeClr val="dk1"/>
-                </a:solidFill>
-                <a:latin typeface="Calibri"/>
+                  <a:srgbClr val="000000"/>
+                </a:solidFill>
+                <a:latin typeface="Arial"/>
               </a:rPr>
               <a:t>Seventh Outline Level</a:t>
             </a:r>
             <a:endParaRPr b="0" lang="en-US" sz="2000" spc="-1" strike="noStrike">
               <a:solidFill>
-                <a:schemeClr val="dk1"/>
-              </a:solidFill>
-              <a:latin typeface="Calibri"/>
+                <a:srgbClr val="000000"/>
+              </a:solidFill>
+              <a:latin typeface="Arial"/>
             </a:endParaRPr>
           </a:p>
         </p:txBody>
@@ -3905,7 +4021,7 @@
         <p:spPr>
           <a:xfrm>
             <a:off x="0" y="0"/>
-            <a:ext cx="14630040" cy="8229240"/>
+            <a:ext cx="14629680" cy="8228880"/>
           </a:xfrm>
           <a:prstGeom prst="rect">
             <a:avLst/>
@@ -3928,6 +4044,11 @@
             <a:noAutofit/>
           </a:bodyPr>
           <a:p>
+            <a:pPr>
+              <a:lnSpc>
+                <a:spcPct val="100000"/>
+              </a:lnSpc>
+            </a:pPr>
             <a:endParaRPr b="0" lang="en-US" sz="1800" spc="-1" strike="noStrike">
               <a:solidFill>
                 <a:srgbClr val="ffffff"/>
@@ -3946,7 +4067,7 @@
         <p:spPr>
           <a:xfrm>
             <a:off x="0" y="0"/>
-            <a:ext cx="14630040" cy="8229240"/>
+            <a:ext cx="14629680" cy="8228880"/>
           </a:xfrm>
           <a:prstGeom prst="rect">
             <a:avLst/>
@@ -3969,6 +4090,11 @@
             <a:noAutofit/>
           </a:bodyPr>
           <a:p>
+            <a:pPr>
+              <a:lnSpc>
+                <a:spcPct val="100000"/>
+              </a:lnSpc>
+            </a:pPr>
             <a:endParaRPr b="0" lang="en-US" sz="1800" spc="-1" strike="noStrike">
               <a:solidFill>
                 <a:srgbClr val="ffffff"/>
@@ -4012,17 +4138,26 @@
             <a:r>
               <a:rPr b="0" lang="en-US" sz="4400" spc="-1" strike="noStrike">
                 <a:solidFill>
-                  <a:schemeClr val="dk1"/>
-                </a:solidFill>
-                <a:latin typeface="Calibri Light"/>
-              </a:rPr>
-              <a:t>Click to edit the title text format</a:t>
+                  <a:srgbClr val="000000"/>
+                </a:solidFill>
+                <a:latin typeface="Arial"/>
+              </a:rPr>
+              <a:t>Click to edit the </a:t>
+            </a:r>
+            <a:r>
+              <a:rPr b="0" lang="en-US" sz="4400" spc="-1" strike="noStrike">
+                <a:solidFill>
+                  <a:srgbClr val="000000"/>
+                </a:solidFill>
+                <a:latin typeface="Arial"/>
+              </a:rPr>
+              <a:t>title text format</a:t>
             </a:r>
             <a:endParaRPr b="0" lang="en-US" sz="4400" spc="-1" strike="noStrike">
               <a:solidFill>
-                <a:schemeClr val="dk1"/>
-              </a:solidFill>
-              <a:latin typeface="Calibri Light"/>
+                <a:srgbClr val="000000"/>
+              </a:solidFill>
+              <a:latin typeface="Arial"/>
             </a:endParaRPr>
           </a:p>
         </p:txBody>
@@ -4069,17 +4204,17 @@
             <a:r>
               <a:rPr b="0" lang="en-US" sz="3200" spc="-1" strike="noStrike">
                 <a:solidFill>
-                  <a:schemeClr val="dk1"/>
-                </a:solidFill>
-                <a:latin typeface="Calibri"/>
+                  <a:srgbClr val="000000"/>
+                </a:solidFill>
+                <a:latin typeface="Arial"/>
               </a:rPr>
               <a:t>Click to edit the outline text format</a:t>
             </a:r>
             <a:endParaRPr b="0" lang="en-US" sz="3200" spc="-1" strike="noStrike">
               <a:solidFill>
-                <a:schemeClr val="dk1"/>
-              </a:solidFill>
-              <a:latin typeface="Calibri"/>
+                <a:srgbClr val="000000"/>
+              </a:solidFill>
+              <a:latin typeface="Arial"/>
             </a:endParaRPr>
           </a:p>
           <a:p>
@@ -4095,19 +4230,19 @@
               <a:buChar char=""/>
             </a:pPr>
             <a:r>
-              <a:rPr b="0" lang="en-US" sz="2400" spc="-1" strike="noStrike">
-                <a:solidFill>
-                  <a:schemeClr val="dk1"/>
-                </a:solidFill>
-                <a:latin typeface="Calibri"/>
+              <a:rPr b="0" lang="en-US" sz="2800" spc="-1" strike="noStrike">
+                <a:solidFill>
+                  <a:srgbClr val="000000"/>
+                </a:solidFill>
+                <a:latin typeface="Arial"/>
               </a:rPr>
               <a:t>Second Outline Level</a:t>
             </a:r>
-            <a:endParaRPr b="0" lang="en-US" sz="2400" spc="-1" strike="noStrike">
-              <a:solidFill>
-                <a:schemeClr val="dk1"/>
-              </a:solidFill>
-              <a:latin typeface="Calibri"/>
+            <a:endParaRPr b="0" lang="en-US" sz="2800" spc="-1" strike="noStrike">
+              <a:solidFill>
+                <a:srgbClr val="000000"/>
+              </a:solidFill>
+              <a:latin typeface="Arial"/>
             </a:endParaRPr>
           </a:p>
           <a:p>
@@ -4123,19 +4258,19 @@
               <a:buChar char=""/>
             </a:pPr>
             <a:r>
-              <a:rPr b="0" lang="en-US" sz="2000" spc="-1" strike="noStrike">
-                <a:solidFill>
-                  <a:schemeClr val="dk1"/>
-                </a:solidFill>
-                <a:latin typeface="Calibri"/>
+              <a:rPr b="0" lang="en-US" sz="2400" spc="-1" strike="noStrike">
+                <a:solidFill>
+                  <a:srgbClr val="000000"/>
+                </a:solidFill>
+                <a:latin typeface="Arial"/>
               </a:rPr>
               <a:t>Third Outline Level</a:t>
             </a:r>
-            <a:endParaRPr b="0" lang="en-US" sz="2000" spc="-1" strike="noStrike">
-              <a:solidFill>
-                <a:schemeClr val="dk1"/>
-              </a:solidFill>
-              <a:latin typeface="Calibri"/>
+            <a:endParaRPr b="0" lang="en-US" sz="2400" spc="-1" strike="noStrike">
+              <a:solidFill>
+                <a:srgbClr val="000000"/>
+              </a:solidFill>
+              <a:latin typeface="Arial"/>
             </a:endParaRPr>
           </a:p>
           <a:p>
@@ -4153,17 +4288,17 @@
             <a:r>
               <a:rPr b="0" lang="en-US" sz="2000" spc="-1" strike="noStrike">
                 <a:solidFill>
-                  <a:schemeClr val="dk1"/>
-                </a:solidFill>
-                <a:latin typeface="Calibri"/>
+                  <a:srgbClr val="000000"/>
+                </a:solidFill>
+                <a:latin typeface="Arial"/>
               </a:rPr>
               <a:t>Fourth Outline Level</a:t>
             </a:r>
             <a:endParaRPr b="0" lang="en-US" sz="2000" spc="-1" strike="noStrike">
               <a:solidFill>
-                <a:schemeClr val="dk1"/>
-              </a:solidFill>
-              <a:latin typeface="Calibri"/>
+                <a:srgbClr val="000000"/>
+              </a:solidFill>
+              <a:latin typeface="Arial"/>
             </a:endParaRPr>
           </a:p>
           <a:p>
@@ -4181,17 +4316,17 @@
             <a:r>
               <a:rPr b="0" lang="en-US" sz="2000" spc="-1" strike="noStrike">
                 <a:solidFill>
-                  <a:schemeClr val="dk1"/>
-                </a:solidFill>
-                <a:latin typeface="Calibri"/>
+                  <a:srgbClr val="000000"/>
+                </a:solidFill>
+                <a:latin typeface="Arial"/>
               </a:rPr>
               <a:t>Fifth Outline Level</a:t>
             </a:r>
             <a:endParaRPr b="0" lang="en-US" sz="2000" spc="-1" strike="noStrike">
               <a:solidFill>
-                <a:schemeClr val="dk1"/>
-              </a:solidFill>
-              <a:latin typeface="Calibri"/>
+                <a:srgbClr val="000000"/>
+              </a:solidFill>
+              <a:latin typeface="Arial"/>
             </a:endParaRPr>
           </a:p>
           <a:p>
@@ -4209,17 +4344,17 @@
             <a:r>
               <a:rPr b="0" lang="en-US" sz="2000" spc="-1" strike="noStrike">
                 <a:solidFill>
-                  <a:schemeClr val="dk1"/>
-                </a:solidFill>
-                <a:latin typeface="Calibri"/>
+                  <a:srgbClr val="000000"/>
+                </a:solidFill>
+                <a:latin typeface="Arial"/>
               </a:rPr>
               <a:t>Sixth Outline Level</a:t>
             </a:r>
             <a:endParaRPr b="0" lang="en-US" sz="2000" spc="-1" strike="noStrike">
               <a:solidFill>
-                <a:schemeClr val="dk1"/>
-              </a:solidFill>
-              <a:latin typeface="Calibri"/>
+                <a:srgbClr val="000000"/>
+              </a:solidFill>
+              <a:latin typeface="Arial"/>
             </a:endParaRPr>
           </a:p>
           <a:p>
@@ -4237,17 +4372,17 @@
             <a:r>
               <a:rPr b="0" lang="en-US" sz="2000" spc="-1" strike="noStrike">
                 <a:solidFill>
-                  <a:schemeClr val="dk1"/>
-                </a:solidFill>
-                <a:latin typeface="Calibri"/>
+                  <a:srgbClr val="000000"/>
+                </a:solidFill>
+                <a:latin typeface="Arial"/>
               </a:rPr>
               <a:t>Seventh Outline Level</a:t>
             </a:r>
             <a:endParaRPr b="0" lang="en-US" sz="2000" spc="-1" strike="noStrike">
               <a:solidFill>
-                <a:schemeClr val="dk1"/>
-              </a:solidFill>
-              <a:latin typeface="Calibri"/>
+                <a:srgbClr val="000000"/>
+              </a:solidFill>
+              <a:latin typeface="Arial"/>
             </a:endParaRPr>
           </a:p>
         </p:txBody>
@@ -4287,7 +4422,7 @@
         <p:spPr>
           <a:xfrm>
             <a:off x="0" y="0"/>
-            <a:ext cx="14630040" cy="8229240"/>
+            <a:ext cx="14629680" cy="8228880"/>
           </a:xfrm>
           <a:prstGeom prst="rect">
             <a:avLst/>
@@ -4310,6 +4445,11 @@
             <a:noAutofit/>
           </a:bodyPr>
           <a:p>
+            <a:pPr>
+              <a:lnSpc>
+                <a:spcPct val="100000"/>
+              </a:lnSpc>
+            </a:pPr>
             <a:endParaRPr b="0" lang="en-US" sz="1800" spc="-1" strike="noStrike">
               <a:solidFill>
                 <a:srgbClr val="ffffff"/>
@@ -4328,7 +4468,7 @@
         <p:spPr>
           <a:xfrm>
             <a:off x="0" y="0"/>
-            <a:ext cx="14630040" cy="8229240"/>
+            <a:ext cx="14629680" cy="8228880"/>
           </a:xfrm>
           <a:prstGeom prst="rect">
             <a:avLst/>
@@ -4351,6 +4491,11 @@
             <a:noAutofit/>
           </a:bodyPr>
           <a:p>
+            <a:pPr>
+              <a:lnSpc>
+                <a:spcPct val="100000"/>
+              </a:lnSpc>
+            </a:pPr>
             <a:endParaRPr b="0" lang="en-US" sz="1800" spc="-1" strike="noStrike">
               <a:solidFill>
                 <a:srgbClr val="ffffff"/>
@@ -4394,305 +4539,35 @@
             <a:r>
               <a:rPr b="0" lang="en-US" sz="4400" spc="-1" strike="noStrike">
                 <a:solidFill>
-                  <a:schemeClr val="dk1"/>
-                </a:solidFill>
-                <a:latin typeface="Calibri Light"/>
-              </a:rPr>
-              <a:t>C</a:t>
+                  <a:srgbClr val="000000"/>
+                </a:solidFill>
+                <a:latin typeface="Arial"/>
+              </a:rPr>
+              <a:t>Click to edit </a:t>
             </a:r>
             <a:r>
               <a:rPr b="0" lang="en-US" sz="4400" spc="-1" strike="noStrike">
                 <a:solidFill>
-                  <a:schemeClr val="dk1"/>
-                </a:solidFill>
-                <a:latin typeface="Calibri Light"/>
-              </a:rPr>
-              <a:t>l</a:t>
+                  <a:srgbClr val="000000"/>
+                </a:solidFill>
+                <a:latin typeface="Arial"/>
+              </a:rPr>
+              <a:t>the title text </a:t>
             </a:r>
             <a:r>
               <a:rPr b="0" lang="en-US" sz="4400" spc="-1" strike="noStrike">
                 <a:solidFill>
-                  <a:schemeClr val="dk1"/>
-                </a:solidFill>
-                <a:latin typeface="Calibri Light"/>
-              </a:rPr>
-              <a:t>i</a:t>
-            </a:r>
-            <a:r>
-              <a:rPr b="0" lang="en-US" sz="4400" spc="-1" strike="noStrike">
-                <a:solidFill>
-                  <a:schemeClr val="dk1"/>
-                </a:solidFill>
-                <a:latin typeface="Calibri Light"/>
-              </a:rPr>
-              <a:t>c</a:t>
-            </a:r>
-            <a:r>
-              <a:rPr b="0" lang="en-US" sz="4400" spc="-1" strike="noStrike">
-                <a:solidFill>
-                  <a:schemeClr val="dk1"/>
-                </a:solidFill>
-                <a:latin typeface="Calibri Light"/>
-              </a:rPr>
-              <a:t>k</a:t>
-            </a:r>
-            <a:r>
-              <a:rPr b="0" lang="en-US" sz="4400" spc="-1" strike="noStrike">
-                <a:solidFill>
-                  <a:schemeClr val="dk1"/>
-                </a:solidFill>
-                <a:latin typeface="Calibri Light"/>
-              </a:rPr>
-              <a:t> </a:t>
-            </a:r>
-            <a:r>
-              <a:rPr b="0" lang="en-US" sz="4400" spc="-1" strike="noStrike">
-                <a:solidFill>
-                  <a:schemeClr val="dk1"/>
-                </a:solidFill>
-                <a:latin typeface="Calibri Light"/>
-              </a:rPr>
-              <a:t>t</a:t>
-            </a:r>
-            <a:r>
-              <a:rPr b="0" lang="en-US" sz="4400" spc="-1" strike="noStrike">
-                <a:solidFill>
-                  <a:schemeClr val="dk1"/>
-                </a:solidFill>
-                <a:latin typeface="Calibri Light"/>
-              </a:rPr>
-              <a:t>o</a:t>
-            </a:r>
-            <a:r>
-              <a:rPr b="0" lang="en-US" sz="4400" spc="-1" strike="noStrike">
-                <a:solidFill>
-                  <a:schemeClr val="dk1"/>
-                </a:solidFill>
-                <a:latin typeface="Calibri Light"/>
-              </a:rPr>
-              <a:t> </a:t>
-            </a:r>
-            <a:r>
-              <a:rPr b="0" lang="en-US" sz="4400" spc="-1" strike="noStrike">
-                <a:solidFill>
-                  <a:schemeClr val="dk1"/>
-                </a:solidFill>
-                <a:latin typeface="Calibri Light"/>
-              </a:rPr>
-              <a:t>e</a:t>
-            </a:r>
-            <a:r>
-              <a:rPr b="0" lang="en-US" sz="4400" spc="-1" strike="noStrike">
-                <a:solidFill>
-                  <a:schemeClr val="dk1"/>
-                </a:solidFill>
-                <a:latin typeface="Calibri Light"/>
-              </a:rPr>
-              <a:t>d</a:t>
-            </a:r>
-            <a:r>
-              <a:rPr b="0" lang="en-US" sz="4400" spc="-1" strike="noStrike">
-                <a:solidFill>
-                  <a:schemeClr val="dk1"/>
-                </a:solidFill>
-                <a:latin typeface="Calibri Light"/>
-              </a:rPr>
-              <a:t>i</a:t>
-            </a:r>
-            <a:r>
-              <a:rPr b="0" lang="en-US" sz="4400" spc="-1" strike="noStrike">
-                <a:solidFill>
-                  <a:schemeClr val="dk1"/>
-                </a:solidFill>
-                <a:latin typeface="Calibri Light"/>
-              </a:rPr>
-              <a:t>t </a:t>
-            </a:r>
-            <a:r>
-              <a:rPr b="0" lang="en-US" sz="4400" spc="-1" strike="noStrike">
-                <a:solidFill>
-                  <a:schemeClr val="dk1"/>
-                </a:solidFill>
-                <a:latin typeface="Calibri Light"/>
-              </a:rPr>
-              <a:t>t</a:t>
-            </a:r>
-            <a:r>
-              <a:rPr b="0" lang="en-US" sz="4400" spc="-1" strike="noStrike">
-                <a:solidFill>
-                  <a:schemeClr val="dk1"/>
-                </a:solidFill>
-                <a:latin typeface="Calibri Light"/>
-              </a:rPr>
-              <a:t>h</a:t>
-            </a:r>
-            <a:r>
-              <a:rPr b="0" lang="en-US" sz="4400" spc="-1" strike="noStrike">
-                <a:solidFill>
-                  <a:schemeClr val="dk1"/>
-                </a:solidFill>
-                <a:latin typeface="Calibri Light"/>
-              </a:rPr>
-              <a:t>e</a:t>
-            </a:r>
-            <a:r>
-              <a:rPr b="0" lang="en-US" sz="4400" spc="-1" strike="noStrike">
-                <a:solidFill>
-                  <a:schemeClr val="dk1"/>
-                </a:solidFill>
-                <a:latin typeface="Calibri Light"/>
-              </a:rPr>
-              <a:t> </a:t>
-            </a:r>
-            <a:r>
-              <a:rPr b="0" lang="en-US" sz="4400" spc="-1" strike="noStrike">
-                <a:solidFill>
-                  <a:schemeClr val="dk1"/>
-                </a:solidFill>
-                <a:latin typeface="Calibri Light"/>
-              </a:rPr>
-              <a:t>t</a:t>
-            </a:r>
-            <a:r>
-              <a:rPr b="0" lang="en-US" sz="4400" spc="-1" strike="noStrike">
-                <a:solidFill>
-                  <a:schemeClr val="dk1"/>
-                </a:solidFill>
-                <a:latin typeface="Calibri Light"/>
-              </a:rPr>
-              <a:t>i</a:t>
-            </a:r>
-            <a:r>
-              <a:rPr b="0" lang="en-US" sz="4400" spc="-1" strike="noStrike">
-                <a:solidFill>
-                  <a:schemeClr val="dk1"/>
-                </a:solidFill>
-                <a:latin typeface="Calibri Light"/>
-              </a:rPr>
-              <a:t>t</a:t>
-            </a:r>
-            <a:r>
-              <a:rPr b="0" lang="en-US" sz="4400" spc="-1" strike="noStrike">
-                <a:solidFill>
-                  <a:schemeClr val="dk1"/>
-                </a:solidFill>
-                <a:latin typeface="Calibri Light"/>
-              </a:rPr>
-              <a:t>l</a:t>
-            </a:r>
-            <a:r>
-              <a:rPr b="0" lang="en-US" sz="4400" spc="-1" strike="noStrike">
-                <a:solidFill>
-                  <a:schemeClr val="dk1"/>
-                </a:solidFill>
-                <a:latin typeface="Calibri Light"/>
-              </a:rPr>
-              <a:t>e</a:t>
-            </a:r>
-            <a:r>
-              <a:rPr b="0" lang="en-US" sz="4400" spc="-1" strike="noStrike">
-                <a:solidFill>
-                  <a:schemeClr val="dk1"/>
-                </a:solidFill>
-                <a:latin typeface="Calibri Light"/>
-              </a:rPr>
-              <a:t> </a:t>
-            </a:r>
-            <a:r>
-              <a:rPr b="0" lang="en-US" sz="4400" spc="-1" strike="noStrike">
-                <a:solidFill>
-                  <a:schemeClr val="dk1"/>
-                </a:solidFill>
-                <a:latin typeface="Calibri Light"/>
-              </a:rPr>
-              <a:t>t</a:t>
-            </a:r>
-            <a:r>
-              <a:rPr b="0" lang="en-US" sz="4400" spc="-1" strike="noStrike">
-                <a:solidFill>
-                  <a:schemeClr val="dk1"/>
-                </a:solidFill>
-                <a:latin typeface="Calibri Light"/>
-              </a:rPr>
-              <a:t>e</a:t>
-            </a:r>
-            <a:r>
-              <a:rPr b="0" lang="en-US" sz="4400" spc="-1" strike="noStrike">
-                <a:solidFill>
-                  <a:schemeClr val="dk1"/>
-                </a:solidFill>
-                <a:latin typeface="Calibri Light"/>
-              </a:rPr>
-              <a:t>x</a:t>
-            </a:r>
-            <a:r>
-              <a:rPr b="0" lang="en-US" sz="4400" spc="-1" strike="noStrike">
-                <a:solidFill>
-                  <a:schemeClr val="dk1"/>
-                </a:solidFill>
-                <a:latin typeface="Calibri Light"/>
-              </a:rPr>
-              <a:t>t </a:t>
-            </a:r>
-            <a:r>
-              <a:rPr b="0" lang="en-US" sz="4400" spc="-1" strike="noStrike">
-                <a:solidFill>
-                  <a:schemeClr val="dk1"/>
-                </a:solidFill>
-                <a:latin typeface="Calibri Light"/>
-              </a:rPr>
-              <a:t>f</a:t>
-            </a:r>
-            <a:r>
-              <a:rPr b="0" lang="en-US" sz="4400" spc="-1" strike="noStrike">
-                <a:solidFill>
-                  <a:schemeClr val="dk1"/>
-                </a:solidFill>
-                <a:latin typeface="Calibri Light"/>
-              </a:rPr>
-              <a:t>o</a:t>
-            </a:r>
-            <a:r>
-              <a:rPr b="0" lang="en-US" sz="4400" spc="-1" strike="noStrike">
-                <a:solidFill>
-                  <a:schemeClr val="dk1"/>
-                </a:solidFill>
-                <a:latin typeface="Calibri Light"/>
-              </a:rPr>
-              <a:t>r</a:t>
-            </a:r>
-            <a:r>
-              <a:rPr b="0" lang="en-US" sz="4400" spc="-1" strike="noStrike">
-                <a:solidFill>
-                  <a:schemeClr val="dk1"/>
-                </a:solidFill>
-                <a:latin typeface="Calibri Light"/>
-              </a:rPr>
-              <a:t>m</a:t>
-            </a:r>
-            <a:r>
-              <a:rPr b="0" lang="en-US" sz="4400" spc="-1" strike="noStrike">
-                <a:solidFill>
-                  <a:schemeClr val="dk1"/>
-                </a:solidFill>
-                <a:latin typeface="Calibri Light"/>
-              </a:rPr>
-              <a:t>a</a:t>
-            </a:r>
-            <a:r>
-              <a:rPr b="0" lang="en-US" sz="4400" spc="-1" strike="noStrike">
-                <a:solidFill>
-                  <a:schemeClr val="dk1"/>
-                </a:solidFill>
-                <a:latin typeface="Calibri Light"/>
-              </a:rPr>
-              <a:t>t</a:t>
+                  <a:srgbClr val="000000"/>
+                </a:solidFill>
+                <a:latin typeface="Arial"/>
+              </a:rPr>
+              <a:t>format</a:t>
             </a:r>
             <a:endParaRPr b="0" lang="en-US" sz="4400" spc="-1" strike="noStrike">
               <a:solidFill>
-                <a:schemeClr val="dk1"/>
-              </a:solidFill>
-              <a:latin typeface="Calibri Light"/>
+                <a:srgbClr val="000000"/>
+              </a:solidFill>
+              <a:latin typeface="Arial"/>
             </a:endParaRPr>
           </a:p>
         </p:txBody>
@@ -4739,17 +4614,17 @@
             <a:r>
               <a:rPr b="0" lang="en-US" sz="3200" spc="-1" strike="noStrike">
                 <a:solidFill>
-                  <a:schemeClr val="dk1"/>
-                </a:solidFill>
-                <a:latin typeface="Calibri"/>
+                  <a:srgbClr val="000000"/>
+                </a:solidFill>
+                <a:latin typeface="Arial"/>
               </a:rPr>
               <a:t>Click to edit the outline text format</a:t>
             </a:r>
             <a:endParaRPr b="0" lang="en-US" sz="3200" spc="-1" strike="noStrike">
               <a:solidFill>
-                <a:schemeClr val="dk1"/>
-              </a:solidFill>
-              <a:latin typeface="Calibri"/>
+                <a:srgbClr val="000000"/>
+              </a:solidFill>
+              <a:latin typeface="Arial"/>
             </a:endParaRPr>
           </a:p>
           <a:p>
@@ -4765,19 +4640,19 @@
               <a:buChar char=""/>
             </a:pPr>
             <a:r>
-              <a:rPr b="0" lang="en-US" sz="2400" spc="-1" strike="noStrike">
-                <a:solidFill>
-                  <a:schemeClr val="dk1"/>
-                </a:solidFill>
-                <a:latin typeface="Calibri"/>
+              <a:rPr b="0" lang="en-US" sz="2800" spc="-1" strike="noStrike">
+                <a:solidFill>
+                  <a:srgbClr val="000000"/>
+                </a:solidFill>
+                <a:latin typeface="Arial"/>
               </a:rPr>
               <a:t>Second Outline Level</a:t>
             </a:r>
-            <a:endParaRPr b="0" lang="en-US" sz="2400" spc="-1" strike="noStrike">
-              <a:solidFill>
-                <a:schemeClr val="dk1"/>
-              </a:solidFill>
-              <a:latin typeface="Calibri"/>
+            <a:endParaRPr b="0" lang="en-US" sz="2800" spc="-1" strike="noStrike">
+              <a:solidFill>
+                <a:srgbClr val="000000"/>
+              </a:solidFill>
+              <a:latin typeface="Arial"/>
             </a:endParaRPr>
           </a:p>
           <a:p>
@@ -4793,19 +4668,19 @@
               <a:buChar char=""/>
             </a:pPr>
             <a:r>
-              <a:rPr b="0" lang="en-US" sz="2000" spc="-1" strike="noStrike">
-                <a:solidFill>
-                  <a:schemeClr val="dk1"/>
-                </a:solidFill>
-                <a:latin typeface="Calibri"/>
+              <a:rPr b="0" lang="en-US" sz="2400" spc="-1" strike="noStrike">
+                <a:solidFill>
+                  <a:srgbClr val="000000"/>
+                </a:solidFill>
+                <a:latin typeface="Arial"/>
               </a:rPr>
               <a:t>Third Outline Level</a:t>
             </a:r>
-            <a:endParaRPr b="0" lang="en-US" sz="2000" spc="-1" strike="noStrike">
-              <a:solidFill>
-                <a:schemeClr val="dk1"/>
-              </a:solidFill>
-              <a:latin typeface="Calibri"/>
+            <a:endParaRPr b="0" lang="en-US" sz="2400" spc="-1" strike="noStrike">
+              <a:solidFill>
+                <a:srgbClr val="000000"/>
+              </a:solidFill>
+              <a:latin typeface="Arial"/>
             </a:endParaRPr>
           </a:p>
           <a:p>
@@ -4823,17 +4698,17 @@
             <a:r>
               <a:rPr b="0" lang="en-US" sz="2000" spc="-1" strike="noStrike">
                 <a:solidFill>
-                  <a:schemeClr val="dk1"/>
-                </a:solidFill>
-                <a:latin typeface="Calibri"/>
+                  <a:srgbClr val="000000"/>
+                </a:solidFill>
+                <a:latin typeface="Arial"/>
               </a:rPr>
               <a:t>Fourth Outline Level</a:t>
             </a:r>
             <a:endParaRPr b="0" lang="en-US" sz="2000" spc="-1" strike="noStrike">
               <a:solidFill>
-                <a:schemeClr val="dk1"/>
-              </a:solidFill>
-              <a:latin typeface="Calibri"/>
+                <a:srgbClr val="000000"/>
+              </a:solidFill>
+              <a:latin typeface="Arial"/>
             </a:endParaRPr>
           </a:p>
           <a:p>
@@ -4851,17 +4726,17 @@
             <a:r>
               <a:rPr b="0" lang="en-US" sz="2000" spc="-1" strike="noStrike">
                 <a:solidFill>
-                  <a:schemeClr val="dk1"/>
-                </a:solidFill>
-                <a:latin typeface="Calibri"/>
+                  <a:srgbClr val="000000"/>
+                </a:solidFill>
+                <a:latin typeface="Arial"/>
               </a:rPr>
               <a:t>Fifth Outline Level</a:t>
             </a:r>
             <a:endParaRPr b="0" lang="en-US" sz="2000" spc="-1" strike="noStrike">
               <a:solidFill>
-                <a:schemeClr val="dk1"/>
-              </a:solidFill>
-              <a:latin typeface="Calibri"/>
+                <a:srgbClr val="000000"/>
+              </a:solidFill>
+              <a:latin typeface="Arial"/>
             </a:endParaRPr>
           </a:p>
           <a:p>
@@ -4879,17 +4754,17 @@
             <a:r>
               <a:rPr b="0" lang="en-US" sz="2000" spc="-1" strike="noStrike">
                 <a:solidFill>
-                  <a:schemeClr val="dk1"/>
-                </a:solidFill>
-                <a:latin typeface="Calibri"/>
+                  <a:srgbClr val="000000"/>
+                </a:solidFill>
+                <a:latin typeface="Arial"/>
               </a:rPr>
               <a:t>Sixth Outline Level</a:t>
             </a:r>
             <a:endParaRPr b="0" lang="en-US" sz="2000" spc="-1" strike="noStrike">
               <a:solidFill>
-                <a:schemeClr val="dk1"/>
-              </a:solidFill>
-              <a:latin typeface="Calibri"/>
+                <a:srgbClr val="000000"/>
+              </a:solidFill>
+              <a:latin typeface="Arial"/>
             </a:endParaRPr>
           </a:p>
           <a:p>
@@ -4907,17 +4782,17 @@
             <a:r>
               <a:rPr b="0" lang="en-US" sz="2000" spc="-1" strike="noStrike">
                 <a:solidFill>
-                  <a:schemeClr val="dk1"/>
-                </a:solidFill>
-                <a:latin typeface="Calibri"/>
+                  <a:srgbClr val="000000"/>
+                </a:solidFill>
+                <a:latin typeface="Arial"/>
               </a:rPr>
               <a:t>Seventh Outline Level</a:t>
             </a:r>
             <a:endParaRPr b="0" lang="en-US" sz="2000" spc="-1" strike="noStrike">
               <a:solidFill>
-                <a:schemeClr val="dk1"/>
-              </a:solidFill>
-              <a:latin typeface="Calibri"/>
+                <a:srgbClr val="000000"/>
+              </a:solidFill>
+              <a:latin typeface="Arial"/>
             </a:endParaRPr>
           </a:p>
         </p:txBody>
@@ -4957,7 +4832,7 @@
         <p:spPr>
           <a:xfrm>
             <a:off x="0" y="0"/>
-            <a:ext cx="14630040" cy="8229240"/>
+            <a:ext cx="14629680" cy="8228880"/>
           </a:xfrm>
           <a:prstGeom prst="rect">
             <a:avLst/>
@@ -4980,6 +4855,11 @@
             <a:noAutofit/>
           </a:bodyPr>
           <a:p>
+            <a:pPr>
+              <a:lnSpc>
+                <a:spcPct val="100000"/>
+              </a:lnSpc>
+            </a:pPr>
             <a:endParaRPr b="0" lang="en-US" sz="1800" spc="-1" strike="noStrike">
               <a:solidFill>
                 <a:srgbClr val="ffffff"/>
@@ -4998,7 +4878,7 @@
         <p:spPr>
           <a:xfrm>
             <a:off x="0" y="0"/>
-            <a:ext cx="14630040" cy="8229240"/>
+            <a:ext cx="14629680" cy="8228880"/>
           </a:xfrm>
           <a:prstGeom prst="rect">
             <a:avLst/>
@@ -5021,6 +4901,11 @@
             <a:noAutofit/>
           </a:bodyPr>
           <a:p>
+            <a:pPr>
+              <a:lnSpc>
+                <a:spcPct val="100000"/>
+              </a:lnSpc>
+            </a:pPr>
             <a:endParaRPr b="0" lang="en-US" sz="1800" spc="-1" strike="noStrike">
               <a:solidFill>
                 <a:srgbClr val="ffffff"/>
@@ -5064,26 +4949,26 @@
             <a:r>
               <a:rPr b="0" lang="en-US" sz="4400" spc="-1" strike="noStrike">
                 <a:solidFill>
-                  <a:schemeClr val="dk1"/>
-                </a:solidFill>
-                <a:latin typeface="Calibri Light"/>
-              </a:rPr>
-              <a:t>Click to edit the title </a:t>
+                  <a:srgbClr val="000000"/>
+                </a:solidFill>
+                <a:latin typeface="Arial"/>
+              </a:rPr>
+              <a:t>Click to edit the </a:t>
             </a:r>
             <a:r>
               <a:rPr b="0" lang="en-US" sz="4400" spc="-1" strike="noStrike">
                 <a:solidFill>
-                  <a:schemeClr val="dk1"/>
-                </a:solidFill>
-                <a:latin typeface="Calibri Light"/>
-              </a:rPr>
-              <a:t>text format</a:t>
+                  <a:srgbClr val="000000"/>
+                </a:solidFill>
+                <a:latin typeface="Arial"/>
+              </a:rPr>
+              <a:t>title text format</a:t>
             </a:r>
             <a:endParaRPr b="0" lang="en-US" sz="4400" spc="-1" strike="noStrike">
               <a:solidFill>
-                <a:schemeClr val="dk1"/>
-              </a:solidFill>
-              <a:latin typeface="Calibri Light"/>
+                <a:srgbClr val="000000"/>
+              </a:solidFill>
+              <a:latin typeface="Arial"/>
             </a:endParaRPr>
           </a:p>
         </p:txBody>
@@ -5130,17 +5015,17 @@
             <a:r>
               <a:rPr b="0" lang="en-US" sz="3200" spc="-1" strike="noStrike">
                 <a:solidFill>
-                  <a:schemeClr val="dk1"/>
-                </a:solidFill>
-                <a:latin typeface="Calibri"/>
+                  <a:srgbClr val="000000"/>
+                </a:solidFill>
+                <a:latin typeface="Arial"/>
               </a:rPr>
               <a:t>Click to edit the outline text format</a:t>
             </a:r>
             <a:endParaRPr b="0" lang="en-US" sz="3200" spc="-1" strike="noStrike">
               <a:solidFill>
-                <a:schemeClr val="dk1"/>
-              </a:solidFill>
-              <a:latin typeface="Calibri"/>
+                <a:srgbClr val="000000"/>
+              </a:solidFill>
+              <a:latin typeface="Arial"/>
             </a:endParaRPr>
           </a:p>
           <a:p>
@@ -5156,19 +5041,19 @@
               <a:buChar char=""/>
             </a:pPr>
             <a:r>
-              <a:rPr b="0" lang="en-US" sz="2400" spc="-1" strike="noStrike">
-                <a:solidFill>
-                  <a:schemeClr val="dk1"/>
-                </a:solidFill>
-                <a:latin typeface="Calibri"/>
+              <a:rPr b="0" lang="en-US" sz="2800" spc="-1" strike="noStrike">
+                <a:solidFill>
+                  <a:srgbClr val="000000"/>
+                </a:solidFill>
+                <a:latin typeface="Arial"/>
               </a:rPr>
               <a:t>Second Outline Level</a:t>
             </a:r>
-            <a:endParaRPr b="0" lang="en-US" sz="2400" spc="-1" strike="noStrike">
-              <a:solidFill>
-                <a:schemeClr val="dk1"/>
-              </a:solidFill>
-              <a:latin typeface="Calibri"/>
+            <a:endParaRPr b="0" lang="en-US" sz="2800" spc="-1" strike="noStrike">
+              <a:solidFill>
+                <a:srgbClr val="000000"/>
+              </a:solidFill>
+              <a:latin typeface="Arial"/>
             </a:endParaRPr>
           </a:p>
           <a:p>
@@ -5184,19 +5069,19 @@
               <a:buChar char=""/>
             </a:pPr>
             <a:r>
-              <a:rPr b="0" lang="en-US" sz="2000" spc="-1" strike="noStrike">
-                <a:solidFill>
-                  <a:schemeClr val="dk1"/>
-                </a:solidFill>
-                <a:latin typeface="Calibri"/>
+              <a:rPr b="0" lang="en-US" sz="2400" spc="-1" strike="noStrike">
+                <a:solidFill>
+                  <a:srgbClr val="000000"/>
+                </a:solidFill>
+                <a:latin typeface="Arial"/>
               </a:rPr>
               <a:t>Third Outline Level</a:t>
             </a:r>
-            <a:endParaRPr b="0" lang="en-US" sz="2000" spc="-1" strike="noStrike">
-              <a:solidFill>
-                <a:schemeClr val="dk1"/>
-              </a:solidFill>
-              <a:latin typeface="Calibri"/>
+            <a:endParaRPr b="0" lang="en-US" sz="2400" spc="-1" strike="noStrike">
+              <a:solidFill>
+                <a:srgbClr val="000000"/>
+              </a:solidFill>
+              <a:latin typeface="Arial"/>
             </a:endParaRPr>
           </a:p>
           <a:p>
@@ -5214,17 +5099,17 @@
             <a:r>
               <a:rPr b="0" lang="en-US" sz="2000" spc="-1" strike="noStrike">
                 <a:solidFill>
-                  <a:schemeClr val="dk1"/>
-                </a:solidFill>
-                <a:latin typeface="Calibri"/>
+                  <a:srgbClr val="000000"/>
+                </a:solidFill>
+                <a:latin typeface="Arial"/>
               </a:rPr>
               <a:t>Fourth Outline Level</a:t>
             </a:r>
             <a:endParaRPr b="0" lang="en-US" sz="2000" spc="-1" strike="noStrike">
               <a:solidFill>
-                <a:schemeClr val="dk1"/>
-              </a:solidFill>
-              <a:latin typeface="Calibri"/>
+                <a:srgbClr val="000000"/>
+              </a:solidFill>
+              <a:latin typeface="Arial"/>
             </a:endParaRPr>
           </a:p>
           <a:p>
@@ -5242,17 +5127,17 @@
             <a:r>
               <a:rPr b="0" lang="en-US" sz="2000" spc="-1" strike="noStrike">
                 <a:solidFill>
-                  <a:schemeClr val="dk1"/>
-                </a:solidFill>
-                <a:latin typeface="Calibri"/>
+                  <a:srgbClr val="000000"/>
+                </a:solidFill>
+                <a:latin typeface="Arial"/>
               </a:rPr>
               <a:t>Fifth Outline Level</a:t>
             </a:r>
             <a:endParaRPr b="0" lang="en-US" sz="2000" spc="-1" strike="noStrike">
               <a:solidFill>
-                <a:schemeClr val="dk1"/>
-              </a:solidFill>
-              <a:latin typeface="Calibri"/>
+                <a:srgbClr val="000000"/>
+              </a:solidFill>
+              <a:latin typeface="Arial"/>
             </a:endParaRPr>
           </a:p>
           <a:p>
@@ -5270,17 +5155,17 @@
             <a:r>
               <a:rPr b="0" lang="en-US" sz="2000" spc="-1" strike="noStrike">
                 <a:solidFill>
-                  <a:schemeClr val="dk1"/>
-                </a:solidFill>
-                <a:latin typeface="Calibri"/>
+                  <a:srgbClr val="000000"/>
+                </a:solidFill>
+                <a:latin typeface="Arial"/>
               </a:rPr>
               <a:t>Sixth Outline Level</a:t>
             </a:r>
             <a:endParaRPr b="0" lang="en-US" sz="2000" spc="-1" strike="noStrike">
               <a:solidFill>
-                <a:schemeClr val="dk1"/>
-              </a:solidFill>
-              <a:latin typeface="Calibri"/>
+                <a:srgbClr val="000000"/>
+              </a:solidFill>
+              <a:latin typeface="Arial"/>
             </a:endParaRPr>
           </a:p>
           <a:p>
@@ -5298,17 +5183,17 @@
             <a:r>
               <a:rPr b="0" lang="en-US" sz="2000" spc="-1" strike="noStrike">
                 <a:solidFill>
-                  <a:schemeClr val="dk1"/>
-                </a:solidFill>
-                <a:latin typeface="Calibri"/>
+                  <a:srgbClr val="000000"/>
+                </a:solidFill>
+                <a:latin typeface="Arial"/>
               </a:rPr>
               <a:t>Seventh Outline Level</a:t>
             </a:r>
             <a:endParaRPr b="0" lang="en-US" sz="2000" spc="-1" strike="noStrike">
               <a:solidFill>
-                <a:schemeClr val="dk1"/>
-              </a:solidFill>
-              <a:latin typeface="Calibri"/>
+                <a:srgbClr val="000000"/>
+              </a:solidFill>
+              <a:latin typeface="Arial"/>
             </a:endParaRPr>
           </a:p>
         </p:txBody>
@@ -5348,7 +5233,7 @@
         <p:spPr>
           <a:xfrm>
             <a:off x="0" y="0"/>
-            <a:ext cx="14630040" cy="8229240"/>
+            <a:ext cx="14629680" cy="8228880"/>
           </a:xfrm>
           <a:prstGeom prst="rect">
             <a:avLst/>
@@ -5371,6 +5256,11 @@
             <a:noAutofit/>
           </a:bodyPr>
           <a:p>
+            <a:pPr>
+              <a:lnSpc>
+                <a:spcPct val="100000"/>
+              </a:lnSpc>
+            </a:pPr>
             <a:endParaRPr b="0" lang="en-US" sz="1800" spc="-1" strike="noStrike">
               <a:solidFill>
                 <a:srgbClr val="ffffff"/>
@@ -5389,7 +5279,7 @@
         <p:spPr>
           <a:xfrm>
             <a:off x="0" y="0"/>
-            <a:ext cx="14630040" cy="8229240"/>
+            <a:ext cx="14629680" cy="8228880"/>
           </a:xfrm>
           <a:prstGeom prst="rect">
             <a:avLst/>
@@ -5412,6 +5302,11 @@
             <a:noAutofit/>
           </a:bodyPr>
           <a:p>
+            <a:pPr>
+              <a:lnSpc>
+                <a:spcPct val="100000"/>
+              </a:lnSpc>
+            </a:pPr>
             <a:endParaRPr b="0" lang="en-US" sz="1800" spc="-1" strike="noStrike">
               <a:solidFill>
                 <a:srgbClr val="ffffff"/>
@@ -5455,44 +5350,44 @@
             <a:r>
               <a:rPr b="0" lang="en-US" sz="4400" spc="-1" strike="noStrike">
                 <a:solidFill>
-                  <a:schemeClr val="dk1"/>
-                </a:solidFill>
-                <a:latin typeface="Calibri Light"/>
+                  <a:srgbClr val="000000"/>
+                </a:solidFill>
+                <a:latin typeface="Arial"/>
               </a:rPr>
               <a:t>Click to </a:t>
             </a:r>
             <a:r>
               <a:rPr b="0" lang="en-US" sz="4400" spc="-1" strike="noStrike">
                 <a:solidFill>
-                  <a:schemeClr val="dk1"/>
-                </a:solidFill>
-                <a:latin typeface="Calibri Light"/>
+                  <a:srgbClr val="000000"/>
+                </a:solidFill>
+                <a:latin typeface="Arial"/>
               </a:rPr>
               <a:t>edit the </a:t>
             </a:r>
             <a:r>
               <a:rPr b="0" lang="en-US" sz="4400" spc="-1" strike="noStrike">
                 <a:solidFill>
-                  <a:schemeClr val="dk1"/>
-                </a:solidFill>
-                <a:latin typeface="Calibri Light"/>
+                  <a:srgbClr val="000000"/>
+                </a:solidFill>
+                <a:latin typeface="Arial"/>
               </a:rPr>
               <a:t>title text </a:t>
             </a:r>
             <a:r>
               <a:rPr b="0" lang="en-US" sz="4400" spc="-1" strike="noStrike">
                 <a:solidFill>
-                  <a:schemeClr val="dk1"/>
-                </a:solidFill>
-                <a:latin typeface="Calibri Light"/>
+                  <a:srgbClr val="000000"/>
+                </a:solidFill>
+                <a:latin typeface="Arial"/>
               </a:rPr>
               <a:t>format</a:t>
             </a:r>
             <a:endParaRPr b="0" lang="en-US" sz="4400" spc="-1" strike="noStrike">
               <a:solidFill>
-                <a:schemeClr val="dk1"/>
-              </a:solidFill>
-              <a:latin typeface="Calibri Light"/>
+                <a:srgbClr val="000000"/>
+              </a:solidFill>
+              <a:latin typeface="Arial"/>
             </a:endParaRPr>
           </a:p>
         </p:txBody>
@@ -5539,17 +5434,17 @@
             <a:r>
               <a:rPr b="0" lang="en-US" sz="3200" spc="-1" strike="noStrike">
                 <a:solidFill>
-                  <a:schemeClr val="dk1"/>
-                </a:solidFill>
-                <a:latin typeface="Calibri"/>
+                  <a:srgbClr val="000000"/>
+                </a:solidFill>
+                <a:latin typeface="Arial"/>
               </a:rPr>
               <a:t>Click to edit the outline text format</a:t>
             </a:r>
             <a:endParaRPr b="0" lang="en-US" sz="3200" spc="-1" strike="noStrike">
               <a:solidFill>
-                <a:schemeClr val="dk1"/>
-              </a:solidFill>
-              <a:latin typeface="Calibri"/>
+                <a:srgbClr val="000000"/>
+              </a:solidFill>
+              <a:latin typeface="Arial"/>
             </a:endParaRPr>
           </a:p>
           <a:p>
@@ -5565,19 +5460,19 @@
               <a:buChar char=""/>
             </a:pPr>
             <a:r>
-              <a:rPr b="0" lang="en-US" sz="2400" spc="-1" strike="noStrike">
-                <a:solidFill>
-                  <a:schemeClr val="dk1"/>
-                </a:solidFill>
-                <a:latin typeface="Calibri"/>
+              <a:rPr b="0" lang="en-US" sz="2800" spc="-1" strike="noStrike">
+                <a:solidFill>
+                  <a:srgbClr val="000000"/>
+                </a:solidFill>
+                <a:latin typeface="Arial"/>
               </a:rPr>
               <a:t>Second Outline Level</a:t>
             </a:r>
-            <a:endParaRPr b="0" lang="en-US" sz="2400" spc="-1" strike="noStrike">
-              <a:solidFill>
-                <a:schemeClr val="dk1"/>
-              </a:solidFill>
-              <a:latin typeface="Calibri"/>
+            <a:endParaRPr b="0" lang="en-US" sz="2800" spc="-1" strike="noStrike">
+              <a:solidFill>
+                <a:srgbClr val="000000"/>
+              </a:solidFill>
+              <a:latin typeface="Arial"/>
             </a:endParaRPr>
           </a:p>
           <a:p>
@@ -5593,19 +5488,19 @@
               <a:buChar char=""/>
             </a:pPr>
             <a:r>
-              <a:rPr b="0" lang="en-US" sz="2000" spc="-1" strike="noStrike">
-                <a:solidFill>
-                  <a:schemeClr val="dk1"/>
-                </a:solidFill>
-                <a:latin typeface="Calibri"/>
+              <a:rPr b="0" lang="en-US" sz="2400" spc="-1" strike="noStrike">
+                <a:solidFill>
+                  <a:srgbClr val="000000"/>
+                </a:solidFill>
+                <a:latin typeface="Arial"/>
               </a:rPr>
               <a:t>Third Outline Level</a:t>
             </a:r>
-            <a:endParaRPr b="0" lang="en-US" sz="2000" spc="-1" strike="noStrike">
-              <a:solidFill>
-                <a:schemeClr val="dk1"/>
-              </a:solidFill>
-              <a:latin typeface="Calibri"/>
+            <a:endParaRPr b="0" lang="en-US" sz="2400" spc="-1" strike="noStrike">
+              <a:solidFill>
+                <a:srgbClr val="000000"/>
+              </a:solidFill>
+              <a:latin typeface="Arial"/>
             </a:endParaRPr>
           </a:p>
           <a:p>
@@ -5623,17 +5518,17 @@
             <a:r>
               <a:rPr b="0" lang="en-US" sz="2000" spc="-1" strike="noStrike">
                 <a:solidFill>
-                  <a:schemeClr val="dk1"/>
-                </a:solidFill>
-                <a:latin typeface="Calibri"/>
+                  <a:srgbClr val="000000"/>
+                </a:solidFill>
+                <a:latin typeface="Arial"/>
               </a:rPr>
               <a:t>Fourth Outline Level</a:t>
             </a:r>
             <a:endParaRPr b="0" lang="en-US" sz="2000" spc="-1" strike="noStrike">
               <a:solidFill>
-                <a:schemeClr val="dk1"/>
-              </a:solidFill>
-              <a:latin typeface="Calibri"/>
+                <a:srgbClr val="000000"/>
+              </a:solidFill>
+              <a:latin typeface="Arial"/>
             </a:endParaRPr>
           </a:p>
           <a:p>
@@ -5651,17 +5546,17 @@
             <a:r>
               <a:rPr b="0" lang="en-US" sz="2000" spc="-1" strike="noStrike">
                 <a:solidFill>
-                  <a:schemeClr val="dk1"/>
-                </a:solidFill>
-                <a:latin typeface="Calibri"/>
+                  <a:srgbClr val="000000"/>
+                </a:solidFill>
+                <a:latin typeface="Arial"/>
               </a:rPr>
               <a:t>Fifth Outline Level</a:t>
             </a:r>
             <a:endParaRPr b="0" lang="en-US" sz="2000" spc="-1" strike="noStrike">
               <a:solidFill>
-                <a:schemeClr val="dk1"/>
-              </a:solidFill>
-              <a:latin typeface="Calibri"/>
+                <a:srgbClr val="000000"/>
+              </a:solidFill>
+              <a:latin typeface="Arial"/>
             </a:endParaRPr>
           </a:p>
           <a:p>
@@ -5679,17 +5574,17 @@
             <a:r>
               <a:rPr b="0" lang="en-US" sz="2000" spc="-1" strike="noStrike">
                 <a:solidFill>
-                  <a:schemeClr val="dk1"/>
-                </a:solidFill>
-                <a:latin typeface="Calibri"/>
+                  <a:srgbClr val="000000"/>
+                </a:solidFill>
+                <a:latin typeface="Arial"/>
               </a:rPr>
               <a:t>Sixth Outline Level</a:t>
             </a:r>
             <a:endParaRPr b="0" lang="en-US" sz="2000" spc="-1" strike="noStrike">
               <a:solidFill>
-                <a:schemeClr val="dk1"/>
-              </a:solidFill>
-              <a:latin typeface="Calibri"/>
+                <a:srgbClr val="000000"/>
+              </a:solidFill>
+              <a:latin typeface="Arial"/>
             </a:endParaRPr>
           </a:p>
           <a:p>
@@ -5707,17 +5602,17 @@
             <a:r>
               <a:rPr b="0" lang="en-US" sz="2000" spc="-1" strike="noStrike">
                 <a:solidFill>
-                  <a:schemeClr val="dk1"/>
-                </a:solidFill>
-                <a:latin typeface="Calibri"/>
+                  <a:srgbClr val="000000"/>
+                </a:solidFill>
+                <a:latin typeface="Arial"/>
               </a:rPr>
               <a:t>Seventh Outline Level</a:t>
             </a:r>
             <a:endParaRPr b="0" lang="en-US" sz="2000" spc="-1" strike="noStrike">
               <a:solidFill>
-                <a:schemeClr val="dk1"/>
-              </a:solidFill>
-              <a:latin typeface="Calibri"/>
+                <a:srgbClr val="000000"/>
+              </a:solidFill>
+              <a:latin typeface="Arial"/>
             </a:endParaRPr>
           </a:p>
         </p:txBody>
@@ -5757,7 +5652,7 @@
         <p:spPr>
           <a:xfrm>
             <a:off x="0" y="0"/>
-            <a:ext cx="14630040" cy="8229240"/>
+            <a:ext cx="14629680" cy="8228880"/>
           </a:xfrm>
           <a:prstGeom prst="rect">
             <a:avLst/>
@@ -5780,6 +5675,11 @@
             <a:noAutofit/>
           </a:bodyPr>
           <a:p>
+            <a:pPr>
+              <a:lnSpc>
+                <a:spcPct val="100000"/>
+              </a:lnSpc>
+            </a:pPr>
             <a:endParaRPr b="0" lang="en-US" sz="1800" spc="-1" strike="noStrike">
               <a:solidFill>
                 <a:srgbClr val="ffffff"/>
@@ -5798,7 +5698,7 @@
         <p:spPr>
           <a:xfrm>
             <a:off x="0" y="0"/>
-            <a:ext cx="14630040" cy="8229240"/>
+            <a:ext cx="14629680" cy="8228880"/>
           </a:xfrm>
           <a:prstGeom prst="rect">
             <a:avLst/>
@@ -5821,6 +5721,11 @@
             <a:noAutofit/>
           </a:bodyPr>
           <a:p>
+            <a:pPr>
+              <a:lnSpc>
+                <a:spcPct val="100000"/>
+              </a:lnSpc>
+            </a:pPr>
             <a:endParaRPr b="0" lang="en-US" sz="1800" spc="-1" strike="noStrike">
               <a:solidFill>
                 <a:srgbClr val="ffffff"/>
@@ -5864,305 +5769,17 @@
             <a:r>
               <a:rPr b="0" lang="en-US" sz="4400" spc="-1" strike="noStrike">
                 <a:solidFill>
-                  <a:schemeClr val="dk1"/>
-                </a:solidFill>
-                <a:latin typeface="Calibri Light"/>
-              </a:rPr>
-              <a:t>C</a:t>
-            </a:r>
-            <a:r>
-              <a:rPr b="0" lang="en-US" sz="4400" spc="-1" strike="noStrike">
-                <a:solidFill>
-                  <a:schemeClr val="dk1"/>
-                </a:solidFill>
-                <a:latin typeface="Calibri Light"/>
-              </a:rPr>
-              <a:t>l</a:t>
-            </a:r>
-            <a:r>
-              <a:rPr b="0" lang="en-US" sz="4400" spc="-1" strike="noStrike">
-                <a:solidFill>
-                  <a:schemeClr val="dk1"/>
-                </a:solidFill>
-                <a:latin typeface="Calibri Light"/>
-              </a:rPr>
-              <a:t>i</a:t>
-            </a:r>
-            <a:r>
-              <a:rPr b="0" lang="en-US" sz="4400" spc="-1" strike="noStrike">
-                <a:solidFill>
-                  <a:schemeClr val="dk1"/>
-                </a:solidFill>
-                <a:latin typeface="Calibri Light"/>
-              </a:rPr>
-              <a:t>c</a:t>
-            </a:r>
-            <a:r>
-              <a:rPr b="0" lang="en-US" sz="4400" spc="-1" strike="noStrike">
-                <a:solidFill>
-                  <a:schemeClr val="dk1"/>
-                </a:solidFill>
-                <a:latin typeface="Calibri Light"/>
-              </a:rPr>
-              <a:t>k</a:t>
-            </a:r>
-            <a:r>
-              <a:rPr b="0" lang="en-US" sz="4400" spc="-1" strike="noStrike">
-                <a:solidFill>
-                  <a:schemeClr val="dk1"/>
-                </a:solidFill>
-                <a:latin typeface="Calibri Light"/>
-              </a:rPr>
-              <a:t> </a:t>
-            </a:r>
-            <a:r>
-              <a:rPr b="0" lang="en-US" sz="4400" spc="-1" strike="noStrike">
-                <a:solidFill>
-                  <a:schemeClr val="dk1"/>
-                </a:solidFill>
-                <a:latin typeface="Calibri Light"/>
-              </a:rPr>
-              <a:t>t</a:t>
-            </a:r>
-            <a:r>
-              <a:rPr b="0" lang="en-US" sz="4400" spc="-1" strike="noStrike">
-                <a:solidFill>
-                  <a:schemeClr val="dk1"/>
-                </a:solidFill>
-                <a:latin typeface="Calibri Light"/>
-              </a:rPr>
-              <a:t>o</a:t>
-            </a:r>
-            <a:r>
-              <a:rPr b="0" lang="en-US" sz="4400" spc="-1" strike="noStrike">
-                <a:solidFill>
-                  <a:schemeClr val="dk1"/>
-                </a:solidFill>
-                <a:latin typeface="Calibri Light"/>
-              </a:rPr>
-              <a:t> </a:t>
-            </a:r>
-            <a:r>
-              <a:rPr b="0" lang="en-US" sz="4400" spc="-1" strike="noStrike">
-                <a:solidFill>
-                  <a:schemeClr val="dk1"/>
-                </a:solidFill>
-                <a:latin typeface="Calibri Light"/>
-              </a:rPr>
-              <a:t>e</a:t>
-            </a:r>
-            <a:r>
-              <a:rPr b="0" lang="en-US" sz="4400" spc="-1" strike="noStrike">
-                <a:solidFill>
-                  <a:schemeClr val="dk1"/>
-                </a:solidFill>
-                <a:latin typeface="Calibri Light"/>
-              </a:rPr>
-              <a:t>d</a:t>
-            </a:r>
-            <a:r>
-              <a:rPr b="0" lang="en-US" sz="4400" spc="-1" strike="noStrike">
-                <a:solidFill>
-                  <a:schemeClr val="dk1"/>
-                </a:solidFill>
-                <a:latin typeface="Calibri Light"/>
-              </a:rPr>
-              <a:t>i</a:t>
-            </a:r>
-            <a:r>
-              <a:rPr b="0" lang="en-US" sz="4400" spc="-1" strike="noStrike">
-                <a:solidFill>
-                  <a:schemeClr val="dk1"/>
-                </a:solidFill>
-                <a:latin typeface="Calibri Light"/>
-              </a:rPr>
-              <a:t>t </a:t>
-            </a:r>
-            <a:r>
-              <a:rPr b="0" lang="en-US" sz="4400" spc="-1" strike="noStrike">
-                <a:solidFill>
-                  <a:schemeClr val="dk1"/>
-                </a:solidFill>
-                <a:latin typeface="Calibri Light"/>
-              </a:rPr>
-              <a:t>t</a:t>
-            </a:r>
-            <a:r>
-              <a:rPr b="0" lang="en-US" sz="4400" spc="-1" strike="noStrike">
-                <a:solidFill>
-                  <a:schemeClr val="dk1"/>
-                </a:solidFill>
-                <a:latin typeface="Calibri Light"/>
-              </a:rPr>
-              <a:t>h</a:t>
-            </a:r>
-            <a:r>
-              <a:rPr b="0" lang="en-US" sz="4400" spc="-1" strike="noStrike">
-                <a:solidFill>
-                  <a:schemeClr val="dk1"/>
-                </a:solidFill>
-                <a:latin typeface="Calibri Light"/>
-              </a:rPr>
-              <a:t>e</a:t>
-            </a:r>
-            <a:r>
-              <a:rPr b="0" lang="en-US" sz="4400" spc="-1" strike="noStrike">
-                <a:solidFill>
-                  <a:schemeClr val="dk1"/>
-                </a:solidFill>
-                <a:latin typeface="Calibri Light"/>
-              </a:rPr>
-              <a:t> </a:t>
-            </a:r>
-            <a:r>
-              <a:rPr b="0" lang="en-US" sz="4400" spc="-1" strike="noStrike">
-                <a:solidFill>
-                  <a:schemeClr val="dk1"/>
-                </a:solidFill>
-                <a:latin typeface="Calibri Light"/>
-              </a:rPr>
-              <a:t>t</a:t>
-            </a:r>
-            <a:r>
-              <a:rPr b="0" lang="en-US" sz="4400" spc="-1" strike="noStrike">
-                <a:solidFill>
-                  <a:schemeClr val="dk1"/>
-                </a:solidFill>
-                <a:latin typeface="Calibri Light"/>
-              </a:rPr>
-              <a:t>i</a:t>
-            </a:r>
-            <a:r>
-              <a:rPr b="0" lang="en-US" sz="4400" spc="-1" strike="noStrike">
-                <a:solidFill>
-                  <a:schemeClr val="dk1"/>
-                </a:solidFill>
-                <a:latin typeface="Calibri Light"/>
-              </a:rPr>
-              <a:t>t</a:t>
-            </a:r>
-            <a:r>
-              <a:rPr b="0" lang="en-US" sz="4400" spc="-1" strike="noStrike">
-                <a:solidFill>
-                  <a:schemeClr val="dk1"/>
-                </a:solidFill>
-                <a:latin typeface="Calibri Light"/>
-              </a:rPr>
-              <a:t>l</a:t>
-            </a:r>
-            <a:r>
-              <a:rPr b="0" lang="en-US" sz="4400" spc="-1" strike="noStrike">
-                <a:solidFill>
-                  <a:schemeClr val="dk1"/>
-                </a:solidFill>
-                <a:latin typeface="Calibri Light"/>
-              </a:rPr>
-              <a:t>e</a:t>
-            </a:r>
-            <a:r>
-              <a:rPr b="0" lang="en-US" sz="4400" spc="-1" strike="noStrike">
-                <a:solidFill>
-                  <a:schemeClr val="dk1"/>
-                </a:solidFill>
-                <a:latin typeface="Calibri Light"/>
-              </a:rPr>
-              <a:t> </a:t>
-            </a:r>
-            <a:r>
-              <a:rPr b="0" lang="en-US" sz="4400" spc="-1" strike="noStrike">
-                <a:solidFill>
-                  <a:schemeClr val="dk1"/>
-                </a:solidFill>
-                <a:latin typeface="Calibri Light"/>
-              </a:rPr>
-              <a:t>t</a:t>
-            </a:r>
-            <a:r>
-              <a:rPr b="0" lang="en-US" sz="4400" spc="-1" strike="noStrike">
-                <a:solidFill>
-                  <a:schemeClr val="dk1"/>
-                </a:solidFill>
-                <a:latin typeface="Calibri Light"/>
-              </a:rPr>
-              <a:t>e</a:t>
-            </a:r>
-            <a:r>
-              <a:rPr b="0" lang="en-US" sz="4400" spc="-1" strike="noStrike">
-                <a:solidFill>
-                  <a:schemeClr val="dk1"/>
-                </a:solidFill>
-                <a:latin typeface="Calibri Light"/>
-              </a:rPr>
-              <a:t>x</a:t>
-            </a:r>
-            <a:r>
-              <a:rPr b="0" lang="en-US" sz="4400" spc="-1" strike="noStrike">
-                <a:solidFill>
-                  <a:schemeClr val="dk1"/>
-                </a:solidFill>
-                <a:latin typeface="Calibri Light"/>
-              </a:rPr>
-              <a:t>t </a:t>
-            </a:r>
-            <a:r>
-              <a:rPr b="0" lang="en-US" sz="4400" spc="-1" strike="noStrike">
-                <a:solidFill>
-                  <a:schemeClr val="dk1"/>
-                </a:solidFill>
-                <a:latin typeface="Calibri Light"/>
-              </a:rPr>
-              <a:t>f</a:t>
-            </a:r>
-            <a:r>
-              <a:rPr b="0" lang="en-US" sz="4400" spc="-1" strike="noStrike">
-                <a:solidFill>
-                  <a:schemeClr val="dk1"/>
-                </a:solidFill>
-                <a:latin typeface="Calibri Light"/>
-              </a:rPr>
-              <a:t>o</a:t>
-            </a:r>
-            <a:r>
-              <a:rPr b="0" lang="en-US" sz="4400" spc="-1" strike="noStrike">
-                <a:solidFill>
-                  <a:schemeClr val="dk1"/>
-                </a:solidFill>
-                <a:latin typeface="Calibri Light"/>
-              </a:rPr>
-              <a:t>r</a:t>
-            </a:r>
-            <a:r>
-              <a:rPr b="0" lang="en-US" sz="4400" spc="-1" strike="noStrike">
-                <a:solidFill>
-                  <a:schemeClr val="dk1"/>
-                </a:solidFill>
-                <a:latin typeface="Calibri Light"/>
-              </a:rPr>
-              <a:t>m</a:t>
-            </a:r>
-            <a:r>
-              <a:rPr b="0" lang="en-US" sz="4400" spc="-1" strike="noStrike">
-                <a:solidFill>
-                  <a:schemeClr val="dk1"/>
-                </a:solidFill>
-                <a:latin typeface="Calibri Light"/>
-              </a:rPr>
-              <a:t>a</a:t>
-            </a:r>
-            <a:r>
-              <a:rPr b="0" lang="en-US" sz="4400" spc="-1" strike="noStrike">
-                <a:solidFill>
-                  <a:schemeClr val="dk1"/>
-                </a:solidFill>
-                <a:latin typeface="Calibri Light"/>
-              </a:rPr>
-              <a:t>t</a:t>
+                  <a:srgbClr val="000000"/>
+                </a:solidFill>
+                <a:latin typeface="Arial"/>
+              </a:rPr>
+              <a:t>Click to edit the title text format</a:t>
             </a:r>
             <a:endParaRPr b="0" lang="en-US" sz="4400" spc="-1" strike="noStrike">
               <a:solidFill>
-                <a:schemeClr val="dk1"/>
-              </a:solidFill>
-              <a:latin typeface="Calibri Light"/>
+                <a:srgbClr val="000000"/>
+              </a:solidFill>
+              <a:latin typeface="Arial"/>
             </a:endParaRPr>
           </a:p>
         </p:txBody>
@@ -6209,17 +5826,17 @@
             <a:r>
               <a:rPr b="0" lang="en-US" sz="3200" spc="-1" strike="noStrike">
                 <a:solidFill>
-                  <a:schemeClr val="dk1"/>
-                </a:solidFill>
-                <a:latin typeface="Calibri"/>
+                  <a:srgbClr val="000000"/>
+                </a:solidFill>
+                <a:latin typeface="Arial"/>
               </a:rPr>
               <a:t>Click to edit the outline text format</a:t>
             </a:r>
             <a:endParaRPr b="0" lang="en-US" sz="3200" spc="-1" strike="noStrike">
               <a:solidFill>
-                <a:schemeClr val="dk1"/>
-              </a:solidFill>
-              <a:latin typeface="Calibri"/>
+                <a:srgbClr val="000000"/>
+              </a:solidFill>
+              <a:latin typeface="Arial"/>
             </a:endParaRPr>
           </a:p>
           <a:p>
@@ -6235,19 +5852,19 @@
               <a:buChar char=""/>
             </a:pPr>
             <a:r>
-              <a:rPr b="0" lang="en-US" sz="2400" spc="-1" strike="noStrike">
-                <a:solidFill>
-                  <a:schemeClr val="dk1"/>
-                </a:solidFill>
-                <a:latin typeface="Calibri"/>
+              <a:rPr b="0" lang="en-US" sz="2800" spc="-1" strike="noStrike">
+                <a:solidFill>
+                  <a:srgbClr val="000000"/>
+                </a:solidFill>
+                <a:latin typeface="Arial"/>
               </a:rPr>
               <a:t>Second Outline Level</a:t>
             </a:r>
-            <a:endParaRPr b="0" lang="en-US" sz="2400" spc="-1" strike="noStrike">
-              <a:solidFill>
-                <a:schemeClr val="dk1"/>
-              </a:solidFill>
-              <a:latin typeface="Calibri"/>
+            <a:endParaRPr b="0" lang="en-US" sz="2800" spc="-1" strike="noStrike">
+              <a:solidFill>
+                <a:srgbClr val="000000"/>
+              </a:solidFill>
+              <a:latin typeface="Arial"/>
             </a:endParaRPr>
           </a:p>
           <a:p>
@@ -6263,19 +5880,19 @@
               <a:buChar char=""/>
             </a:pPr>
             <a:r>
-              <a:rPr b="0" lang="en-US" sz="2000" spc="-1" strike="noStrike">
-                <a:solidFill>
-                  <a:schemeClr val="dk1"/>
-                </a:solidFill>
-                <a:latin typeface="Calibri"/>
+              <a:rPr b="0" lang="en-US" sz="2400" spc="-1" strike="noStrike">
+                <a:solidFill>
+                  <a:srgbClr val="000000"/>
+                </a:solidFill>
+                <a:latin typeface="Arial"/>
               </a:rPr>
               <a:t>Third Outline Level</a:t>
             </a:r>
-            <a:endParaRPr b="0" lang="en-US" sz="2000" spc="-1" strike="noStrike">
-              <a:solidFill>
-                <a:schemeClr val="dk1"/>
-              </a:solidFill>
-              <a:latin typeface="Calibri"/>
+            <a:endParaRPr b="0" lang="en-US" sz="2400" spc="-1" strike="noStrike">
+              <a:solidFill>
+                <a:srgbClr val="000000"/>
+              </a:solidFill>
+              <a:latin typeface="Arial"/>
             </a:endParaRPr>
           </a:p>
           <a:p>
@@ -6293,17 +5910,17 @@
             <a:r>
               <a:rPr b="0" lang="en-US" sz="2000" spc="-1" strike="noStrike">
                 <a:solidFill>
-                  <a:schemeClr val="dk1"/>
-                </a:solidFill>
-                <a:latin typeface="Calibri"/>
+                  <a:srgbClr val="000000"/>
+                </a:solidFill>
+                <a:latin typeface="Arial"/>
               </a:rPr>
               <a:t>Fourth Outline Level</a:t>
             </a:r>
             <a:endParaRPr b="0" lang="en-US" sz="2000" spc="-1" strike="noStrike">
               <a:solidFill>
-                <a:schemeClr val="dk1"/>
-              </a:solidFill>
-              <a:latin typeface="Calibri"/>
+                <a:srgbClr val="000000"/>
+              </a:solidFill>
+              <a:latin typeface="Arial"/>
             </a:endParaRPr>
           </a:p>
           <a:p>
@@ -6321,17 +5938,17 @@
             <a:r>
               <a:rPr b="0" lang="en-US" sz="2000" spc="-1" strike="noStrike">
                 <a:solidFill>
-                  <a:schemeClr val="dk1"/>
-                </a:solidFill>
-                <a:latin typeface="Calibri"/>
+                  <a:srgbClr val="000000"/>
+                </a:solidFill>
+                <a:latin typeface="Arial"/>
               </a:rPr>
               <a:t>Fifth Outline Level</a:t>
             </a:r>
             <a:endParaRPr b="0" lang="en-US" sz="2000" spc="-1" strike="noStrike">
               <a:solidFill>
-                <a:schemeClr val="dk1"/>
-              </a:solidFill>
-              <a:latin typeface="Calibri"/>
+                <a:srgbClr val="000000"/>
+              </a:solidFill>
+              <a:latin typeface="Arial"/>
             </a:endParaRPr>
           </a:p>
           <a:p>
@@ -6349,17 +5966,17 @@
             <a:r>
               <a:rPr b="0" lang="en-US" sz="2000" spc="-1" strike="noStrike">
                 <a:solidFill>
-                  <a:schemeClr val="dk1"/>
-                </a:solidFill>
-                <a:latin typeface="Calibri"/>
+                  <a:srgbClr val="000000"/>
+                </a:solidFill>
+                <a:latin typeface="Arial"/>
               </a:rPr>
               <a:t>Sixth Outline Level</a:t>
             </a:r>
             <a:endParaRPr b="0" lang="en-US" sz="2000" spc="-1" strike="noStrike">
               <a:solidFill>
-                <a:schemeClr val="dk1"/>
-              </a:solidFill>
-              <a:latin typeface="Calibri"/>
+                <a:srgbClr val="000000"/>
+              </a:solidFill>
+              <a:latin typeface="Arial"/>
             </a:endParaRPr>
           </a:p>
           <a:p>
@@ -6377,17 +5994,17 @@
             <a:r>
               <a:rPr b="0" lang="en-US" sz="2000" spc="-1" strike="noStrike">
                 <a:solidFill>
-                  <a:schemeClr val="dk1"/>
-                </a:solidFill>
-                <a:latin typeface="Calibri"/>
+                  <a:srgbClr val="000000"/>
+                </a:solidFill>
+                <a:latin typeface="Arial"/>
               </a:rPr>
               <a:t>Seventh Outline Level</a:t>
             </a:r>
             <a:endParaRPr b="0" lang="en-US" sz="2000" spc="-1" strike="noStrike">
               <a:solidFill>
-                <a:schemeClr val="dk1"/>
-              </a:solidFill>
-              <a:latin typeface="Calibri"/>
+                <a:srgbClr val="000000"/>
+              </a:solidFill>
+              <a:latin typeface="Arial"/>
             </a:endParaRPr>
           </a:p>
         </p:txBody>
@@ -6427,7 +6044,7 @@
         <p:spPr>
           <a:xfrm>
             <a:off x="0" y="0"/>
-            <a:ext cx="14630040" cy="8229240"/>
+            <a:ext cx="14629680" cy="8228880"/>
           </a:xfrm>
           <a:prstGeom prst="rect">
             <a:avLst/>
@@ -6450,6 +6067,11 @@
             <a:noAutofit/>
           </a:bodyPr>
           <a:p>
+            <a:pPr>
+              <a:lnSpc>
+                <a:spcPct val="100000"/>
+              </a:lnSpc>
+            </a:pPr>
             <a:endParaRPr b="0" lang="en-US" sz="1800" spc="-1" strike="noStrike">
               <a:solidFill>
                 <a:srgbClr val="ffffff"/>
@@ -6468,7 +6090,7 @@
         <p:spPr>
           <a:xfrm>
             <a:off x="0" y="0"/>
-            <a:ext cx="14630040" cy="8229240"/>
+            <a:ext cx="14629680" cy="8228880"/>
           </a:xfrm>
           <a:prstGeom prst="rect">
             <a:avLst/>
@@ -6491,6 +6113,11 @@
             <a:noAutofit/>
           </a:bodyPr>
           <a:p>
+            <a:pPr>
+              <a:lnSpc>
+                <a:spcPct val="100000"/>
+              </a:lnSpc>
+            </a:pPr>
             <a:endParaRPr b="0" lang="en-US" sz="1800" spc="-1" strike="noStrike">
               <a:solidFill>
                 <a:srgbClr val="ffffff"/>
@@ -6534,17 +6161,17 @@
             <a:r>
               <a:rPr b="0" lang="en-US" sz="4400" spc="-1" strike="noStrike">
                 <a:solidFill>
-                  <a:schemeClr val="dk1"/>
-                </a:solidFill>
-                <a:latin typeface="Calibri Light"/>
+                  <a:srgbClr val="000000"/>
+                </a:solidFill>
+                <a:latin typeface="Arial"/>
               </a:rPr>
               <a:t>Click to edit the title text format</a:t>
             </a:r>
             <a:endParaRPr b="0" lang="en-US" sz="4400" spc="-1" strike="noStrike">
               <a:solidFill>
-                <a:schemeClr val="dk1"/>
-              </a:solidFill>
-              <a:latin typeface="Calibri Light"/>
+                <a:srgbClr val="000000"/>
+              </a:solidFill>
+              <a:latin typeface="Arial"/>
             </a:endParaRPr>
           </a:p>
         </p:txBody>
@@ -6591,17 +6218,17 @@
             <a:r>
               <a:rPr b="0" lang="en-US" sz="3200" spc="-1" strike="noStrike">
                 <a:solidFill>
-                  <a:schemeClr val="dk1"/>
-                </a:solidFill>
-                <a:latin typeface="Calibri"/>
+                  <a:srgbClr val="000000"/>
+                </a:solidFill>
+                <a:latin typeface="Arial"/>
               </a:rPr>
               <a:t>Click to edit the outline text format</a:t>
             </a:r>
             <a:endParaRPr b="0" lang="en-US" sz="3200" spc="-1" strike="noStrike">
               <a:solidFill>
-                <a:schemeClr val="dk1"/>
-              </a:solidFill>
-              <a:latin typeface="Calibri"/>
+                <a:srgbClr val="000000"/>
+              </a:solidFill>
+              <a:latin typeface="Arial"/>
             </a:endParaRPr>
           </a:p>
           <a:p>
@@ -6617,19 +6244,19 @@
               <a:buChar char=""/>
             </a:pPr>
             <a:r>
-              <a:rPr b="0" lang="en-US" sz="2400" spc="-1" strike="noStrike">
-                <a:solidFill>
-                  <a:schemeClr val="dk1"/>
-                </a:solidFill>
-                <a:latin typeface="Calibri"/>
+              <a:rPr b="0" lang="en-US" sz="2800" spc="-1" strike="noStrike">
+                <a:solidFill>
+                  <a:srgbClr val="000000"/>
+                </a:solidFill>
+                <a:latin typeface="Arial"/>
               </a:rPr>
               <a:t>Second Outline Level</a:t>
             </a:r>
-            <a:endParaRPr b="0" lang="en-US" sz="2400" spc="-1" strike="noStrike">
-              <a:solidFill>
-                <a:schemeClr val="dk1"/>
-              </a:solidFill>
-              <a:latin typeface="Calibri"/>
+            <a:endParaRPr b="0" lang="en-US" sz="2800" spc="-1" strike="noStrike">
+              <a:solidFill>
+                <a:srgbClr val="000000"/>
+              </a:solidFill>
+              <a:latin typeface="Arial"/>
             </a:endParaRPr>
           </a:p>
           <a:p>
@@ -6645,19 +6272,19 @@
               <a:buChar char=""/>
             </a:pPr>
             <a:r>
-              <a:rPr b="0" lang="en-US" sz="2000" spc="-1" strike="noStrike">
-                <a:solidFill>
-                  <a:schemeClr val="dk1"/>
-                </a:solidFill>
-                <a:latin typeface="Calibri"/>
+              <a:rPr b="0" lang="en-US" sz="2400" spc="-1" strike="noStrike">
+                <a:solidFill>
+                  <a:srgbClr val="000000"/>
+                </a:solidFill>
+                <a:latin typeface="Arial"/>
               </a:rPr>
               <a:t>Third Outline Level</a:t>
             </a:r>
-            <a:endParaRPr b="0" lang="en-US" sz="2000" spc="-1" strike="noStrike">
-              <a:solidFill>
-                <a:schemeClr val="dk1"/>
-              </a:solidFill>
-              <a:latin typeface="Calibri"/>
+            <a:endParaRPr b="0" lang="en-US" sz="2400" spc="-1" strike="noStrike">
+              <a:solidFill>
+                <a:srgbClr val="000000"/>
+              </a:solidFill>
+              <a:latin typeface="Arial"/>
             </a:endParaRPr>
           </a:p>
           <a:p>
@@ -6675,17 +6302,17 @@
             <a:r>
               <a:rPr b="0" lang="en-US" sz="2000" spc="-1" strike="noStrike">
                 <a:solidFill>
-                  <a:schemeClr val="dk1"/>
-                </a:solidFill>
-                <a:latin typeface="Calibri"/>
+                  <a:srgbClr val="000000"/>
+                </a:solidFill>
+                <a:latin typeface="Arial"/>
               </a:rPr>
               <a:t>Fourth Outline Level</a:t>
             </a:r>
             <a:endParaRPr b="0" lang="en-US" sz="2000" spc="-1" strike="noStrike">
               <a:solidFill>
-                <a:schemeClr val="dk1"/>
-              </a:solidFill>
-              <a:latin typeface="Calibri"/>
+                <a:srgbClr val="000000"/>
+              </a:solidFill>
+              <a:latin typeface="Arial"/>
             </a:endParaRPr>
           </a:p>
           <a:p>
@@ -6703,17 +6330,17 @@
             <a:r>
               <a:rPr b="0" lang="en-US" sz="2000" spc="-1" strike="noStrike">
                 <a:solidFill>
-                  <a:schemeClr val="dk1"/>
-                </a:solidFill>
-                <a:latin typeface="Calibri"/>
+                  <a:srgbClr val="000000"/>
+                </a:solidFill>
+                <a:latin typeface="Arial"/>
               </a:rPr>
               <a:t>Fifth Outline Level</a:t>
             </a:r>
             <a:endParaRPr b="0" lang="en-US" sz="2000" spc="-1" strike="noStrike">
               <a:solidFill>
-                <a:schemeClr val="dk1"/>
-              </a:solidFill>
-              <a:latin typeface="Calibri"/>
+                <a:srgbClr val="000000"/>
+              </a:solidFill>
+              <a:latin typeface="Arial"/>
             </a:endParaRPr>
           </a:p>
           <a:p>
@@ -6731,17 +6358,17 @@
             <a:r>
               <a:rPr b="0" lang="en-US" sz="2000" spc="-1" strike="noStrike">
                 <a:solidFill>
-                  <a:schemeClr val="dk1"/>
-                </a:solidFill>
-                <a:latin typeface="Calibri"/>
+                  <a:srgbClr val="000000"/>
+                </a:solidFill>
+                <a:latin typeface="Arial"/>
               </a:rPr>
               <a:t>Sixth Outline Level</a:t>
             </a:r>
             <a:endParaRPr b="0" lang="en-US" sz="2000" spc="-1" strike="noStrike">
               <a:solidFill>
-                <a:schemeClr val="dk1"/>
-              </a:solidFill>
-              <a:latin typeface="Calibri"/>
+                <a:srgbClr val="000000"/>
+              </a:solidFill>
+              <a:latin typeface="Arial"/>
             </a:endParaRPr>
           </a:p>
           <a:p>
@@ -6759,17 +6386,17 @@
             <a:r>
               <a:rPr b="0" lang="en-US" sz="2000" spc="-1" strike="noStrike">
                 <a:solidFill>
-                  <a:schemeClr val="dk1"/>
-                </a:solidFill>
-                <a:latin typeface="Calibri"/>
+                  <a:srgbClr val="000000"/>
+                </a:solidFill>
+                <a:latin typeface="Arial"/>
               </a:rPr>
               <a:t>Seventh Outline Level</a:t>
             </a:r>
             <a:endParaRPr b="0" lang="en-US" sz="2000" spc="-1" strike="noStrike">
               <a:solidFill>
-                <a:schemeClr val="dk1"/>
-              </a:solidFill>
-              <a:latin typeface="Calibri"/>
+                <a:srgbClr val="000000"/>
+              </a:solidFill>
+              <a:latin typeface="Arial"/>
             </a:endParaRPr>
           </a:p>
         </p:txBody>
@@ -6809,7 +6436,7 @@
         <p:spPr>
           <a:xfrm>
             <a:off x="0" y="0"/>
-            <a:ext cx="14630040" cy="8229240"/>
+            <a:ext cx="14629680" cy="8228880"/>
           </a:xfrm>
           <a:prstGeom prst="rect">
             <a:avLst/>
@@ -6832,6 +6459,11 @@
             <a:noAutofit/>
           </a:bodyPr>
           <a:p>
+            <a:pPr>
+              <a:lnSpc>
+                <a:spcPct val="100000"/>
+              </a:lnSpc>
+            </a:pPr>
             <a:endParaRPr b="0" lang="en-US" sz="1800" spc="-1" strike="noStrike">
               <a:solidFill>
                 <a:srgbClr val="ffffff"/>
@@ -6850,7 +6482,7 @@
         <p:spPr>
           <a:xfrm>
             <a:off x="0" y="0"/>
-            <a:ext cx="14630040" cy="8229240"/>
+            <a:ext cx="14629680" cy="8228880"/>
           </a:xfrm>
           <a:prstGeom prst="rect">
             <a:avLst/>
@@ -6873,6 +6505,11 @@
             <a:noAutofit/>
           </a:bodyPr>
           <a:p>
+            <a:pPr>
+              <a:lnSpc>
+                <a:spcPct val="100000"/>
+              </a:lnSpc>
+            </a:pPr>
             <a:endParaRPr b="0" lang="en-US" sz="1800" spc="-1" strike="noStrike">
               <a:solidFill>
                 <a:srgbClr val="ffffff"/>
@@ -6916,26 +6553,26 @@
             <a:r>
               <a:rPr b="0" lang="en-US" sz="4400" spc="-1" strike="noStrike">
                 <a:solidFill>
-                  <a:schemeClr val="dk1"/>
-                </a:solidFill>
-                <a:latin typeface="Calibri Light"/>
-              </a:rPr>
-              <a:t>Click to edit the title text </a:t>
+                  <a:srgbClr val="000000"/>
+                </a:solidFill>
+                <a:latin typeface="Arial"/>
+              </a:rPr>
+              <a:t>Click to edit the </a:t>
             </a:r>
             <a:r>
               <a:rPr b="0" lang="en-US" sz="4400" spc="-1" strike="noStrike">
                 <a:solidFill>
-                  <a:schemeClr val="dk1"/>
-                </a:solidFill>
-                <a:latin typeface="Calibri Light"/>
-              </a:rPr>
-              <a:t>format</a:t>
+                  <a:srgbClr val="000000"/>
+                </a:solidFill>
+                <a:latin typeface="Arial"/>
+              </a:rPr>
+              <a:t>title text format</a:t>
             </a:r>
             <a:endParaRPr b="0" lang="en-US" sz="4400" spc="-1" strike="noStrike">
               <a:solidFill>
-                <a:schemeClr val="dk1"/>
-              </a:solidFill>
-              <a:latin typeface="Calibri Light"/>
+                <a:srgbClr val="000000"/>
+              </a:solidFill>
+              <a:latin typeface="Arial"/>
             </a:endParaRPr>
           </a:p>
         </p:txBody>
@@ -6982,17 +6619,17 @@
             <a:r>
               <a:rPr b="0" lang="en-US" sz="3200" spc="-1" strike="noStrike">
                 <a:solidFill>
-                  <a:schemeClr val="dk1"/>
-                </a:solidFill>
-                <a:latin typeface="Calibri"/>
+                  <a:srgbClr val="000000"/>
+                </a:solidFill>
+                <a:latin typeface="Arial"/>
               </a:rPr>
               <a:t>Click to edit the outline text format</a:t>
             </a:r>
             <a:endParaRPr b="0" lang="en-US" sz="3200" spc="-1" strike="noStrike">
               <a:solidFill>
-                <a:schemeClr val="dk1"/>
-              </a:solidFill>
-              <a:latin typeface="Calibri"/>
+                <a:srgbClr val="000000"/>
+              </a:solidFill>
+              <a:latin typeface="Arial"/>
             </a:endParaRPr>
           </a:p>
           <a:p>
@@ -7008,19 +6645,19 @@
               <a:buChar char=""/>
             </a:pPr>
             <a:r>
-              <a:rPr b="0" lang="en-US" sz="2400" spc="-1" strike="noStrike">
-                <a:solidFill>
-                  <a:schemeClr val="dk1"/>
-                </a:solidFill>
-                <a:latin typeface="Calibri"/>
+              <a:rPr b="0" lang="en-US" sz="2800" spc="-1" strike="noStrike">
+                <a:solidFill>
+                  <a:srgbClr val="000000"/>
+                </a:solidFill>
+                <a:latin typeface="Arial"/>
               </a:rPr>
               <a:t>Second Outline Level</a:t>
             </a:r>
-            <a:endParaRPr b="0" lang="en-US" sz="2400" spc="-1" strike="noStrike">
-              <a:solidFill>
-                <a:schemeClr val="dk1"/>
-              </a:solidFill>
-              <a:latin typeface="Calibri"/>
+            <a:endParaRPr b="0" lang="en-US" sz="2800" spc="-1" strike="noStrike">
+              <a:solidFill>
+                <a:srgbClr val="000000"/>
+              </a:solidFill>
+              <a:latin typeface="Arial"/>
             </a:endParaRPr>
           </a:p>
           <a:p>
@@ -7036,19 +6673,19 @@
               <a:buChar char=""/>
             </a:pPr>
             <a:r>
-              <a:rPr b="0" lang="en-US" sz="2000" spc="-1" strike="noStrike">
-                <a:solidFill>
-                  <a:schemeClr val="dk1"/>
-                </a:solidFill>
-                <a:latin typeface="Calibri"/>
+              <a:rPr b="0" lang="en-US" sz="2400" spc="-1" strike="noStrike">
+                <a:solidFill>
+                  <a:srgbClr val="000000"/>
+                </a:solidFill>
+                <a:latin typeface="Arial"/>
               </a:rPr>
               <a:t>Third Outline Level</a:t>
             </a:r>
-            <a:endParaRPr b="0" lang="en-US" sz="2000" spc="-1" strike="noStrike">
-              <a:solidFill>
-                <a:schemeClr val="dk1"/>
-              </a:solidFill>
-              <a:latin typeface="Calibri"/>
+            <a:endParaRPr b="0" lang="en-US" sz="2400" spc="-1" strike="noStrike">
+              <a:solidFill>
+                <a:srgbClr val="000000"/>
+              </a:solidFill>
+              <a:latin typeface="Arial"/>
             </a:endParaRPr>
           </a:p>
           <a:p>
@@ -7066,17 +6703,17 @@
             <a:r>
               <a:rPr b="0" lang="en-US" sz="2000" spc="-1" strike="noStrike">
                 <a:solidFill>
-                  <a:schemeClr val="dk1"/>
-                </a:solidFill>
-                <a:latin typeface="Calibri"/>
+                  <a:srgbClr val="000000"/>
+                </a:solidFill>
+                <a:latin typeface="Arial"/>
               </a:rPr>
               <a:t>Fourth Outline Level</a:t>
             </a:r>
             <a:endParaRPr b="0" lang="en-US" sz="2000" spc="-1" strike="noStrike">
               <a:solidFill>
-                <a:schemeClr val="dk1"/>
-              </a:solidFill>
-              <a:latin typeface="Calibri"/>
+                <a:srgbClr val="000000"/>
+              </a:solidFill>
+              <a:latin typeface="Arial"/>
             </a:endParaRPr>
           </a:p>
           <a:p>
@@ -7094,17 +6731,17 @@
             <a:r>
               <a:rPr b="0" lang="en-US" sz="2000" spc="-1" strike="noStrike">
                 <a:solidFill>
-                  <a:schemeClr val="dk1"/>
-                </a:solidFill>
-                <a:latin typeface="Calibri"/>
+                  <a:srgbClr val="000000"/>
+                </a:solidFill>
+                <a:latin typeface="Arial"/>
               </a:rPr>
               <a:t>Fifth Outline Level</a:t>
             </a:r>
             <a:endParaRPr b="0" lang="en-US" sz="2000" spc="-1" strike="noStrike">
               <a:solidFill>
-                <a:schemeClr val="dk1"/>
-              </a:solidFill>
-              <a:latin typeface="Calibri"/>
+                <a:srgbClr val="000000"/>
+              </a:solidFill>
+              <a:latin typeface="Arial"/>
             </a:endParaRPr>
           </a:p>
           <a:p>
@@ -7122,17 +6759,17 @@
             <a:r>
               <a:rPr b="0" lang="en-US" sz="2000" spc="-1" strike="noStrike">
                 <a:solidFill>
-                  <a:schemeClr val="dk1"/>
-                </a:solidFill>
-                <a:latin typeface="Calibri"/>
+                  <a:srgbClr val="000000"/>
+                </a:solidFill>
+                <a:latin typeface="Arial"/>
               </a:rPr>
               <a:t>Sixth Outline Level</a:t>
             </a:r>
             <a:endParaRPr b="0" lang="en-US" sz="2000" spc="-1" strike="noStrike">
               <a:solidFill>
-                <a:schemeClr val="dk1"/>
-              </a:solidFill>
-              <a:latin typeface="Calibri"/>
+                <a:srgbClr val="000000"/>
+              </a:solidFill>
+              <a:latin typeface="Arial"/>
             </a:endParaRPr>
           </a:p>
           <a:p>
@@ -7150,17 +6787,17 @@
             <a:r>
               <a:rPr b="0" lang="en-US" sz="2000" spc="-1" strike="noStrike">
                 <a:solidFill>
-                  <a:schemeClr val="dk1"/>
-                </a:solidFill>
-                <a:latin typeface="Calibri"/>
+                  <a:srgbClr val="000000"/>
+                </a:solidFill>
+                <a:latin typeface="Arial"/>
               </a:rPr>
               <a:t>Seventh Outline Level</a:t>
             </a:r>
             <a:endParaRPr b="0" lang="en-US" sz="2000" spc="-1" strike="noStrike">
               <a:solidFill>
-                <a:schemeClr val="dk1"/>
-              </a:solidFill>
-              <a:latin typeface="Calibri"/>
+                <a:srgbClr val="000000"/>
+              </a:solidFill>
+              <a:latin typeface="Arial"/>
             </a:endParaRPr>
           </a:p>
         </p:txBody>
@@ -7204,7 +6841,7 @@
         <p:spPr>
           <a:xfrm>
             <a:off x="0" y="0"/>
-            <a:ext cx="5486040" cy="8229240"/>
+            <a:ext cx="5485680" cy="8228880"/>
           </a:xfrm>
           <a:prstGeom prst="rect">
             <a:avLst/>
@@ -7223,7 +6860,7 @@
         <p:spPr>
           <a:xfrm>
             <a:off x="6350040" y="2223360"/>
-            <a:ext cx="7416000" cy="1840320"/>
+            <a:ext cx="7415640" cy="1839960"/>
           </a:xfrm>
           <a:prstGeom prst="rect">
             <a:avLst/>
@@ -7280,7 +6917,7 @@
         <p:spPr>
           <a:xfrm>
             <a:off x="6350040" y="4387680"/>
-            <a:ext cx="7416000" cy="971640"/>
+            <a:ext cx="7415640" cy="971280"/>
           </a:xfrm>
           <a:prstGeom prst="rect">
             <a:avLst/>
@@ -7337,7 +6974,7 @@
         <p:spPr>
           <a:xfrm>
             <a:off x="6458040" y="5602320"/>
-            <a:ext cx="1993320" cy="403560"/>
+            <a:ext cx="1992960" cy="403200"/>
           </a:xfrm>
           <a:prstGeom prst="roundRect">
             <a:avLst>
@@ -7363,6 +7000,11 @@
             <a:noAutofit/>
           </a:bodyPr>
           <a:p>
+            <a:pPr>
+              <a:lnSpc>
+                <a:spcPct val="100000"/>
+              </a:lnSpc>
+            </a:pPr>
             <a:endParaRPr b="0" lang="en-US" sz="1800" spc="-1" strike="noStrike">
               <a:solidFill>
                 <a:srgbClr val="000000"/>
@@ -7381,7 +7023,7 @@
         <p:spPr>
           <a:xfrm>
             <a:off x="6487200" y="5675040"/>
-            <a:ext cx="1719000" cy="258840"/>
+            <a:ext cx="1718640" cy="258480"/>
           </a:xfrm>
           <a:prstGeom prst="rect">
             <a:avLst/>
@@ -7472,7 +7114,7 @@
         <p:spPr>
           <a:xfrm>
             <a:off x="0" y="0"/>
-            <a:ext cx="5486040" cy="8229240"/>
+            <a:ext cx="5485680" cy="8228880"/>
           </a:xfrm>
           <a:prstGeom prst="rect">
             <a:avLst/>
@@ -7491,7 +7133,7 @@
         <p:spPr>
           <a:xfrm>
             <a:off x="6341400" y="594000"/>
-            <a:ext cx="6566760" cy="606960"/>
+            <a:ext cx="6566400" cy="606600"/>
           </a:xfrm>
           <a:prstGeom prst="rect">
             <a:avLst/>
@@ -7548,7 +7190,7 @@
         <p:spPr>
           <a:xfrm>
             <a:off x="6341400" y="1230840"/>
-            <a:ext cx="7433280" cy="956880"/>
+            <a:ext cx="7432920" cy="956520"/>
           </a:xfrm>
           <a:prstGeom prst="rect">
             <a:avLst/>
@@ -7605,7 +7247,7 @@
         <p:spPr>
           <a:xfrm>
             <a:off x="6341400" y="2714040"/>
-            <a:ext cx="3610800" cy="3144600"/>
+            <a:ext cx="3610440" cy="3144240"/>
           </a:xfrm>
           <a:prstGeom prst="roundRect">
             <a:avLst>
@@ -7633,6 +7275,11 @@
             <a:noAutofit/>
           </a:bodyPr>
           <a:p>
+            <a:pPr>
+              <a:lnSpc>
+                <a:spcPct val="100000"/>
+              </a:lnSpc>
+            </a:pPr>
             <a:endParaRPr b="0" lang="en-US" sz="1800" spc="-1" strike="noStrike">
               <a:solidFill>
                 <a:srgbClr val="ffffff"/>
@@ -7651,7 +7298,7 @@
         <p:spPr>
           <a:xfrm>
             <a:off x="6585840" y="2958480"/>
-            <a:ext cx="2675880" cy="311040"/>
+            <a:ext cx="2675520" cy="310680"/>
           </a:xfrm>
           <a:prstGeom prst="rect">
             <a:avLst/>
@@ -7728,7 +7375,7 @@
         <p:spPr>
           <a:xfrm>
             <a:off x="6585840" y="3396600"/>
-            <a:ext cx="3122280" cy="1595160"/>
+            <a:ext cx="3121920" cy="1594800"/>
           </a:xfrm>
           <a:prstGeom prst="rect">
             <a:avLst/>
@@ -7785,7 +7432,7 @@
         <p:spPr>
           <a:xfrm>
             <a:off x="10164240" y="2714040"/>
-            <a:ext cx="3610800" cy="3144600"/>
+            <a:ext cx="3610440" cy="3144240"/>
           </a:xfrm>
           <a:prstGeom prst="roundRect">
             <a:avLst>
@@ -7813,6 +7460,11 @@
             <a:noAutofit/>
           </a:bodyPr>
           <a:p>
+            <a:pPr>
+              <a:lnSpc>
+                <a:spcPct val="100000"/>
+              </a:lnSpc>
+            </a:pPr>
             <a:endParaRPr b="0" lang="en-US" sz="1800" spc="-1" strike="noStrike">
               <a:solidFill>
                 <a:srgbClr val="ffffff"/>
@@ -7831,7 +7483,7 @@
         <p:spPr>
           <a:xfrm>
             <a:off x="10408320" y="2958480"/>
-            <a:ext cx="3122280" cy="614880"/>
+            <a:ext cx="3121920" cy="614520"/>
           </a:xfrm>
           <a:prstGeom prst="rect">
             <a:avLst/>
@@ -7908,7 +7560,7 @@
         <p:spPr>
           <a:xfrm>
             <a:off x="10408320" y="3700440"/>
-            <a:ext cx="3122280" cy="1914120"/>
+            <a:ext cx="3121920" cy="1913760"/>
           </a:xfrm>
           <a:prstGeom prst="rect">
             <a:avLst/>
@@ -7965,7 +7617,7 @@
         <p:spPr>
           <a:xfrm>
             <a:off x="6341400" y="6070680"/>
-            <a:ext cx="7433280" cy="1564560"/>
+            <a:ext cx="7432920" cy="1564200"/>
           </a:xfrm>
           <a:prstGeom prst="roundRect">
             <a:avLst>
@@ -7993,6 +7645,11 @@
             <a:noAutofit/>
           </a:bodyPr>
           <a:p>
+            <a:pPr>
+              <a:lnSpc>
+                <a:spcPct val="100000"/>
+              </a:lnSpc>
+            </a:pPr>
             <a:endParaRPr b="0" lang="en-US" sz="1800" spc="-1" strike="noStrike">
               <a:solidFill>
                 <a:srgbClr val="ffffff"/>
@@ -8011,7 +7668,7 @@
         <p:spPr>
           <a:xfrm>
             <a:off x="6585840" y="6314760"/>
-            <a:ext cx="2928960" cy="311040"/>
+            <a:ext cx="2928600" cy="310680"/>
           </a:xfrm>
           <a:prstGeom prst="rect">
             <a:avLst/>
@@ -8088,7 +7745,7 @@
         <p:spPr>
           <a:xfrm>
             <a:off x="6585840" y="6753240"/>
-            <a:ext cx="6945120" cy="637920"/>
+            <a:ext cx="6944760" cy="637560"/>
           </a:xfrm>
           <a:prstGeom prst="rect">
             <a:avLst/>
@@ -8175,7 +7832,7 @@
         <p:spPr>
           <a:xfrm>
             <a:off x="820440" y="804600"/>
-            <a:ext cx="4662000" cy="582480"/>
+            <a:ext cx="4661640" cy="582120"/>
           </a:xfrm>
           <a:prstGeom prst="rect">
             <a:avLst/>
@@ -8232,7 +7889,7 @@
         <p:spPr>
           <a:xfrm>
             <a:off x="820440" y="1776960"/>
-            <a:ext cx="12988800" cy="299520"/>
+            <a:ext cx="12988440" cy="299160"/>
           </a:xfrm>
           <a:prstGeom prst="rect">
             <a:avLst/>
@@ -8289,7 +7946,7 @@
         <p:spPr>
           <a:xfrm>
             <a:off x="1128240" y="2515320"/>
-            <a:ext cx="12681360" cy="599400"/>
+            <a:ext cx="12681000" cy="599040"/>
           </a:xfrm>
           <a:prstGeom prst="rect">
             <a:avLst/>
@@ -8366,7 +8023,7 @@
         <p:spPr>
           <a:xfrm>
             <a:off x="820440" y="2296080"/>
-            <a:ext cx="22680" cy="1037880"/>
+            <a:ext cx="22320" cy="1037520"/>
           </a:xfrm>
           <a:prstGeom prst="rect">
             <a:avLst/>
@@ -8389,6 +8046,11 @@
             <a:noAutofit/>
           </a:bodyPr>
           <a:p>
+            <a:pPr>
+              <a:lnSpc>
+                <a:spcPct val="100000"/>
+              </a:lnSpc>
+            </a:pPr>
             <a:endParaRPr b="0" lang="en-US" sz="1800" spc="-1" strike="noStrike">
               <a:solidFill>
                 <a:srgbClr val="000000"/>
@@ -8411,7 +8073,7 @@
         <p:spPr>
           <a:xfrm>
             <a:off x="820440" y="3553560"/>
-            <a:ext cx="4329360" cy="820080"/>
+            <a:ext cx="4329000" cy="819720"/>
           </a:xfrm>
           <a:prstGeom prst="rect">
             <a:avLst/>
@@ -8430,7 +8092,7 @@
         <p:spPr>
           <a:xfrm>
             <a:off x="1025640" y="4568760"/>
-            <a:ext cx="2750040" cy="290880"/>
+            <a:ext cx="2749680" cy="290520"/>
           </a:xfrm>
           <a:prstGeom prst="rect">
             <a:avLst/>
@@ -8487,7 +8149,7 @@
         <p:spPr>
           <a:xfrm>
             <a:off x="1025640" y="4977000"/>
-            <a:ext cx="3918960" cy="899280"/>
+            <a:ext cx="3918600" cy="898920"/>
           </a:xfrm>
           <a:prstGeom prst="rect">
             <a:avLst/>
@@ -8548,7 +8210,7 @@
         <p:spPr>
           <a:xfrm>
             <a:off x="5150160" y="3553560"/>
-            <a:ext cx="4329360" cy="820080"/>
+            <a:ext cx="4329000" cy="819720"/>
           </a:xfrm>
           <a:prstGeom prst="rect">
             <a:avLst/>
@@ -8567,7 +8229,7 @@
         <p:spPr>
           <a:xfrm>
             <a:off x="5355360" y="4568760"/>
-            <a:ext cx="3082680" cy="290880"/>
+            <a:ext cx="3082320" cy="290520"/>
           </a:xfrm>
           <a:prstGeom prst="rect">
             <a:avLst/>
@@ -8624,7 +8286,7 @@
         <p:spPr>
           <a:xfrm>
             <a:off x="5355360" y="4977000"/>
-            <a:ext cx="3918960" cy="1199160"/>
+            <a:ext cx="3918600" cy="1198800"/>
           </a:xfrm>
           <a:prstGeom prst="rect">
             <a:avLst/>
@@ -8685,7 +8347,7 @@
         <p:spPr>
           <a:xfrm>
             <a:off x="9479880" y="3553560"/>
-            <a:ext cx="4329360" cy="820080"/>
+            <a:ext cx="4329000" cy="819720"/>
           </a:xfrm>
           <a:prstGeom prst="rect">
             <a:avLst/>
@@ -8704,7 +8366,7 @@
         <p:spPr>
           <a:xfrm>
             <a:off x="9685080" y="4568760"/>
-            <a:ext cx="3189240" cy="290880"/>
+            <a:ext cx="3188880" cy="290520"/>
           </a:xfrm>
           <a:prstGeom prst="rect">
             <a:avLst/>
@@ -8761,7 +8423,7 @@
         <p:spPr>
           <a:xfrm>
             <a:off x="9685080" y="4977000"/>
-            <a:ext cx="3918960" cy="899280"/>
+            <a:ext cx="3918600" cy="898920"/>
           </a:xfrm>
           <a:prstGeom prst="rect">
             <a:avLst/>
@@ -8818,7 +8480,7 @@
         <p:spPr>
           <a:xfrm>
             <a:off x="820440" y="6601320"/>
-            <a:ext cx="12988800" cy="823320"/>
+            <a:ext cx="12988440" cy="822960"/>
           </a:xfrm>
           <a:prstGeom prst="roundRect">
             <a:avLst>
@@ -8843,6 +8505,11 @@
             <a:noAutofit/>
           </a:bodyPr>
           <a:p>
+            <a:pPr>
+              <a:lnSpc>
+                <a:spcPct val="100000"/>
+              </a:lnSpc>
+            </a:pPr>
             <a:endParaRPr b="0" lang="en-US" sz="1800" spc="-1" strike="noStrike">
               <a:solidFill>
                 <a:srgbClr val="ffffff"/>
@@ -8865,7 +8532,7 @@
         <p:spPr>
           <a:xfrm>
             <a:off x="1025640" y="6891480"/>
-            <a:ext cx="255960" cy="204840"/>
+            <a:ext cx="255600" cy="204480"/>
           </a:xfrm>
           <a:prstGeom prst="rect">
             <a:avLst/>
@@ -8884,7 +8551,7 @@
         <p:spPr>
           <a:xfrm>
             <a:off x="1487160" y="6847200"/>
-            <a:ext cx="12117240" cy="299520"/>
+            <a:ext cx="12116880" cy="299160"/>
           </a:xfrm>
           <a:prstGeom prst="rect">
             <a:avLst/>
@@ -8952,6 +8619,102 @@
           </a:p>
         </p:txBody>
       </p:sp>
+    </p:spTree>
+  </p:cSld>
+  <mc:AlternateContent>
+    <mc:Choice Requires="p14">
+      <p:transition spd="slow" p14:dur="2000"/>
+    </mc:Choice>
+    <mc:Fallback>
+      <p:transition spd="slow"/>
+    </mc:Fallback>
+  </mc:AlternateContent>
+</p:sld>
+</file>
+
+<file path=ppt/slides/slide12.xml><?xml version="1.0" encoding="utf-8"?>
+<p:sld xmlns:a="http://schemas.openxmlformats.org/drawingml/2006/main" xmlns:p="http://schemas.openxmlformats.org/presentationml/2006/main" xmlns:r="http://schemas.openxmlformats.org/officeDocument/2006/relationships" xmlns:p14="http://schemas.microsoft.com/office/powerpoint/2010/main" xmlns:p15="http://schemas.microsoft.com/office/powerpoint/2012/main" xmlns:mc="http://schemas.openxmlformats.org/markup-compatibility/2006">
+  <p:cSld>
+    <p:spTree>
+      <p:nvGrpSpPr>
+        <p:cNvPr id="1" name=""/>
+        <p:cNvGrpSpPr/>
+        <p:nvPr/>
+      </p:nvGrpSpPr>
+      <p:grpSpPr>
+        <a:xfrm>
+          <a:off x="0" y="0"/>
+          <a:ext cx="0" cy="0"/>
+          <a:chOff x="0" y="0"/>
+          <a:chExt cx="0" cy="0"/>
+        </a:xfrm>
+      </p:grpSpPr>
+      <p:sp>
+        <p:nvSpPr>
+          <p:cNvPr id="185" name=""/>
+          <p:cNvSpPr txBox="1"/>
+          <p:nvPr/>
+        </p:nvSpPr>
+        <p:spPr>
+          <a:xfrm>
+            <a:off x="5029200" y="84600"/>
+            <a:ext cx="3151080" cy="601200"/>
+          </a:xfrm>
+          <a:prstGeom prst="rect">
+            <a:avLst/>
+          </a:prstGeom>
+          <a:noFill/>
+          <a:ln w="0">
+            <a:noFill/>
+          </a:ln>
+        </p:spPr>
+        <p:txBody>
+          <a:bodyPr lIns="90000" rIns="90000" tIns="45000" bIns="45000" anchor="t">
+            <a:noAutofit/>
+          </a:bodyPr>
+          <a:p>
+            <a:r>
+              <a:rPr b="1" lang="en-US" sz="2950" spc="-1" strike="noStrike">
+                <a:solidFill>
+                  <a:srgbClr val="ffffff"/>
+                </a:solidFill>
+                <a:latin typeface="Montserrat Bold"/>
+                <a:ea typeface="Montserrat Bold"/>
+              </a:rPr>
+              <a:t>Test Tapşırığı L6</a:t>
+            </a:r>
+            <a:endParaRPr b="0" lang="en-US" sz="2950" spc="-1" strike="noStrike">
+              <a:solidFill>
+                <a:srgbClr val="000000"/>
+              </a:solidFill>
+              <a:latin typeface="Arial"/>
+            </a:endParaRPr>
+          </a:p>
+        </p:txBody>
+      </p:sp>
+      <p:pic>
+        <p:nvPicPr>
+          <p:cNvPr id="186" name="" descr=""/>
+          <p:cNvPicPr/>
+          <p:nvPr/>
+        </p:nvPicPr>
+        <p:blipFill>
+          <a:blip r:embed="rId1"/>
+          <a:stretch/>
+        </p:blipFill>
+        <p:spPr>
+          <a:xfrm>
+            <a:off x="2971800" y="685800"/>
+            <a:ext cx="7275960" cy="7275960"/>
+          </a:xfrm>
+          <a:prstGeom prst="rect">
+            <a:avLst/>
+          </a:prstGeom>
+          <a:ln w="0">
+            <a:noFill/>
+          </a:ln>
+        </p:spPr>
+      </p:pic>
     </p:spTree>
   </p:cSld>
   <mc:AlternateContent>
@@ -8991,7 +8754,7 @@
         <p:spPr>
           <a:xfrm>
             <a:off x="863640" y="1287360"/>
-            <a:ext cx="6846120" cy="613080"/>
+            <a:ext cx="6845760" cy="612720"/>
           </a:xfrm>
           <a:prstGeom prst="rect">
             <a:avLst/>
@@ -9048,7 +8811,7 @@
         <p:spPr>
           <a:xfrm>
             <a:off x="863640" y="2332800"/>
-            <a:ext cx="12902400" cy="647640"/>
+            <a:ext cx="12902040" cy="647280"/>
           </a:xfrm>
           <a:prstGeom prst="rect">
             <a:avLst/>
@@ -9125,7 +8888,7 @@
         <p:spPr>
           <a:xfrm>
             <a:off x="863640" y="3223440"/>
-            <a:ext cx="215640" cy="269640"/>
+            <a:ext cx="215280" cy="269280"/>
           </a:xfrm>
           <a:prstGeom prst="rect">
             <a:avLst/>
@@ -9182,7 +8945,7 @@
         <p:spPr>
           <a:xfrm>
             <a:off x="863640" y="3560040"/>
-            <a:ext cx="6343200" cy="30240"/>
+            <a:ext cx="6342840" cy="29880"/>
           </a:xfrm>
           <a:prstGeom prst="rect">
             <a:avLst/>
@@ -9205,6 +8968,11 @@
             <a:noAutofit/>
           </a:bodyPr>
           <a:p>
+            <a:pPr>
+              <a:lnSpc>
+                <a:spcPct val="100000"/>
+              </a:lnSpc>
+            </a:pPr>
             <a:endParaRPr b="0" lang="en-US" sz="1800" spc="-1" strike="noStrike">
               <a:solidFill>
                 <a:srgbClr val="000000"/>
@@ -9223,7 +8991,7 @@
         <p:spPr>
           <a:xfrm>
             <a:off x="863640" y="3728880"/>
-            <a:ext cx="2453760" cy="306360"/>
+            <a:ext cx="2453400" cy="306000"/>
           </a:xfrm>
           <a:prstGeom prst="rect">
             <a:avLst/>
@@ -9280,7 +9048,7 @@
         <p:spPr>
           <a:xfrm>
             <a:off x="863640" y="4165200"/>
-            <a:ext cx="6343200" cy="647640"/>
+            <a:ext cx="6342840" cy="647280"/>
           </a:xfrm>
           <a:prstGeom prst="rect">
             <a:avLst/>
@@ -9337,7 +9105,7 @@
         <p:spPr>
           <a:xfrm>
             <a:off x="7423200" y="3223440"/>
-            <a:ext cx="215640" cy="269640"/>
+            <a:ext cx="215280" cy="269280"/>
           </a:xfrm>
           <a:prstGeom prst="rect">
             <a:avLst/>
@@ -9394,7 +9162,7 @@
         <p:spPr>
           <a:xfrm>
             <a:off x="7423200" y="3560040"/>
-            <a:ext cx="6343200" cy="30240"/>
+            <a:ext cx="6342840" cy="29880"/>
           </a:xfrm>
           <a:prstGeom prst="rect">
             <a:avLst/>
@@ -9417,6 +9185,11 @@
             <a:noAutofit/>
           </a:bodyPr>
           <a:p>
+            <a:pPr>
+              <a:lnSpc>
+                <a:spcPct val="100000"/>
+              </a:lnSpc>
+            </a:pPr>
             <a:endParaRPr b="0" lang="en-US" sz="1800" spc="-1" strike="noStrike">
               <a:solidFill>
                 <a:srgbClr val="000000"/>
@@ -9435,7 +9208,7 @@
         <p:spPr>
           <a:xfrm>
             <a:off x="7423200" y="3728880"/>
-            <a:ext cx="4633200" cy="306360"/>
+            <a:ext cx="4632840" cy="306000"/>
           </a:xfrm>
           <a:prstGeom prst="rect">
             <a:avLst/>
@@ -9492,7 +9265,7 @@
         <p:spPr>
           <a:xfrm>
             <a:off x="7423200" y="4165200"/>
-            <a:ext cx="6343200" cy="647640"/>
+            <a:ext cx="6342840" cy="647280"/>
           </a:xfrm>
           <a:prstGeom prst="rect">
             <a:avLst/>
@@ -9549,7 +9322,7 @@
         <p:spPr>
           <a:xfrm>
             <a:off x="863640" y="5190840"/>
-            <a:ext cx="215640" cy="269640"/>
+            <a:ext cx="215280" cy="269280"/>
           </a:xfrm>
           <a:prstGeom prst="rect">
             <a:avLst/>
@@ -9606,7 +9379,7 @@
         <p:spPr>
           <a:xfrm>
             <a:off x="863640" y="5527080"/>
-            <a:ext cx="6343200" cy="30240"/>
+            <a:ext cx="6342840" cy="29880"/>
           </a:xfrm>
           <a:prstGeom prst="rect">
             <a:avLst/>
@@ -9629,6 +9402,11 @@
             <a:noAutofit/>
           </a:bodyPr>
           <a:p>
+            <a:pPr>
+              <a:lnSpc>
+                <a:spcPct val="100000"/>
+              </a:lnSpc>
+            </a:pPr>
             <a:endParaRPr b="0" lang="en-US" sz="1800" spc="-1" strike="noStrike">
               <a:solidFill>
                 <a:srgbClr val="000000"/>
@@ -9647,7 +9425,7 @@
         <p:spPr>
           <a:xfrm>
             <a:off x="863640" y="5695920"/>
-            <a:ext cx="2453760" cy="306360"/>
+            <a:ext cx="2453400" cy="306000"/>
           </a:xfrm>
           <a:prstGeom prst="rect">
             <a:avLst/>
@@ -9704,7 +9482,7 @@
         <p:spPr>
           <a:xfrm>
             <a:off x="863640" y="6132240"/>
-            <a:ext cx="6343200" cy="647640"/>
+            <a:ext cx="6342840" cy="647280"/>
           </a:xfrm>
           <a:prstGeom prst="rect">
             <a:avLst/>
@@ -9761,7 +9539,7 @@
         <p:spPr>
           <a:xfrm>
             <a:off x="7423200" y="5190840"/>
-            <a:ext cx="215640" cy="269640"/>
+            <a:ext cx="215280" cy="269280"/>
           </a:xfrm>
           <a:prstGeom prst="rect">
             <a:avLst/>
@@ -9818,7 +9596,7 @@
         <p:spPr>
           <a:xfrm>
             <a:off x="7423200" y="5527080"/>
-            <a:ext cx="6343200" cy="30240"/>
+            <a:ext cx="6342840" cy="29880"/>
           </a:xfrm>
           <a:prstGeom prst="rect">
             <a:avLst/>
@@ -9841,6 +9619,11 @@
             <a:noAutofit/>
           </a:bodyPr>
           <a:p>
+            <a:pPr>
+              <a:lnSpc>
+                <a:spcPct val="100000"/>
+              </a:lnSpc>
+            </a:pPr>
             <a:endParaRPr b="0" lang="en-US" sz="1800" spc="-1" strike="noStrike">
               <a:solidFill>
                 <a:srgbClr val="000000"/>
@@ -9859,7 +9642,7 @@
         <p:spPr>
           <a:xfrm>
             <a:off x="7423200" y="5695920"/>
-            <a:ext cx="2453760" cy="306360"/>
+            <a:ext cx="2453400" cy="306000"/>
           </a:xfrm>
           <a:prstGeom prst="rect">
             <a:avLst/>
@@ -9916,7 +9699,7 @@
         <p:spPr>
           <a:xfrm>
             <a:off x="7423200" y="6132240"/>
-            <a:ext cx="6343200" cy="647640"/>
+            <a:ext cx="6342840" cy="647280"/>
           </a:xfrm>
           <a:prstGeom prst="rect">
             <a:avLst/>
@@ -10007,7 +9790,7 @@
         <p:spPr>
           <a:xfrm>
             <a:off x="9144000" y="0"/>
-            <a:ext cx="5486040" cy="8229240"/>
+            <a:ext cx="5485680" cy="8228880"/>
           </a:xfrm>
           <a:prstGeom prst="rect">
             <a:avLst/>
@@ -10026,7 +9809,7 @@
         <p:spPr>
           <a:xfrm>
             <a:off x="863640" y="775440"/>
-            <a:ext cx="4908240" cy="613080"/>
+            <a:ext cx="4907880" cy="612720"/>
           </a:xfrm>
           <a:prstGeom prst="rect">
             <a:avLst/>
@@ -10083,7 +9866,7 @@
         <p:spPr>
           <a:xfrm>
             <a:off x="863640" y="1424880"/>
-            <a:ext cx="7416000" cy="1295640"/>
+            <a:ext cx="7415640" cy="1295280"/>
           </a:xfrm>
           <a:prstGeom prst="rect">
             <a:avLst/>
@@ -10150,7 +9933,7 @@
         <p:spPr>
           <a:xfrm>
             <a:off x="863640" y="3251880"/>
-            <a:ext cx="3600000" cy="2470320"/>
+            <a:ext cx="3599640" cy="2469960"/>
           </a:xfrm>
           <a:prstGeom prst="roundRect">
             <a:avLst>
@@ -10175,6 +9958,11 @@
             <a:noAutofit/>
           </a:bodyPr>
           <a:p>
+            <a:pPr>
+              <a:lnSpc>
+                <a:spcPct val="100000"/>
+              </a:lnSpc>
+            </a:pPr>
             <a:endParaRPr b="0" lang="en-US" sz="1800" spc="-1" strike="noStrike">
               <a:solidFill>
                 <a:srgbClr val="ffffff"/>
@@ -10193,7 +9981,7 @@
         <p:spPr>
           <a:xfrm>
             <a:off x="1079640" y="3467520"/>
-            <a:ext cx="2453760" cy="306360"/>
+            <a:ext cx="2453400" cy="306000"/>
           </a:xfrm>
           <a:prstGeom prst="rect">
             <a:avLst/>
@@ -10270,7 +10058,7 @@
         <p:spPr>
           <a:xfrm>
             <a:off x="1079640" y="3903840"/>
-            <a:ext cx="3168000" cy="1295640"/>
+            <a:ext cx="3167640" cy="1295280"/>
           </a:xfrm>
           <a:prstGeom prst="rect">
             <a:avLst/>
@@ -10327,7 +10115,7 @@
         <p:spPr>
           <a:xfrm>
             <a:off x="4680000" y="3251880"/>
-            <a:ext cx="3600000" cy="2470320"/>
+            <a:ext cx="3599640" cy="2469960"/>
           </a:xfrm>
           <a:prstGeom prst="roundRect">
             <a:avLst>
@@ -10352,6 +10140,11 @@
             <a:noAutofit/>
           </a:bodyPr>
           <a:p>
+            <a:pPr>
+              <a:lnSpc>
+                <a:spcPct val="100000"/>
+              </a:lnSpc>
+            </a:pPr>
             <a:endParaRPr b="0" lang="en-US" sz="1800" spc="-1" strike="noStrike">
               <a:solidFill>
                 <a:srgbClr val="ffffff"/>
@@ -10370,7 +10163,7 @@
         <p:spPr>
           <a:xfrm>
             <a:off x="4895640" y="3467520"/>
-            <a:ext cx="3168360" cy="613080"/>
+            <a:ext cx="3168000" cy="612720"/>
           </a:xfrm>
           <a:prstGeom prst="rect">
             <a:avLst/>
@@ -10447,7 +10240,7 @@
         <p:spPr>
           <a:xfrm>
             <a:off x="4895640" y="4210560"/>
-            <a:ext cx="3168360" cy="1295640"/>
+            <a:ext cx="3168000" cy="1295280"/>
           </a:xfrm>
           <a:prstGeom prst="rect">
             <a:avLst/>
@@ -10504,7 +10297,7 @@
         <p:spPr>
           <a:xfrm>
             <a:off x="863640" y="5938200"/>
-            <a:ext cx="7416000" cy="1515600"/>
+            <a:ext cx="7415640" cy="1515240"/>
           </a:xfrm>
           <a:prstGeom prst="roundRect">
             <a:avLst>
@@ -10529,6 +10322,11 @@
             <a:noAutofit/>
           </a:bodyPr>
           <a:p>
+            <a:pPr>
+              <a:lnSpc>
+                <a:spcPct val="100000"/>
+              </a:lnSpc>
+            </a:pPr>
             <a:endParaRPr b="0" lang="en-US" sz="1800" spc="-1" strike="noStrike">
               <a:solidFill>
                 <a:srgbClr val="ffffff"/>
@@ -10547,7 +10345,7 @@
         <p:spPr>
           <a:xfrm>
             <a:off x="1079640" y="6153840"/>
-            <a:ext cx="2453760" cy="306360"/>
+            <a:ext cx="2453400" cy="306000"/>
           </a:xfrm>
           <a:prstGeom prst="rect">
             <a:avLst/>
@@ -10624,7 +10422,7 @@
         <p:spPr>
           <a:xfrm>
             <a:off x="1079640" y="6590160"/>
-            <a:ext cx="6984360" cy="647640"/>
+            <a:ext cx="6984000" cy="647280"/>
           </a:xfrm>
           <a:prstGeom prst="rect">
             <a:avLst/>
@@ -10711,7 +10509,7 @@
         <p:spPr>
           <a:xfrm>
             <a:off x="863640" y="1557000"/>
-            <a:ext cx="8353800" cy="613080"/>
+            <a:ext cx="8353440" cy="612720"/>
           </a:xfrm>
           <a:prstGeom prst="rect">
             <a:avLst/>
@@ -10768,7 +10566,7 @@
         <p:spPr>
           <a:xfrm>
             <a:off x="863640" y="2602440"/>
-            <a:ext cx="12902400" cy="647640"/>
+            <a:ext cx="12902040" cy="647280"/>
           </a:xfrm>
           <a:prstGeom prst="rect">
             <a:avLst/>
@@ -10825,7 +10623,7 @@
         <p:spPr>
           <a:xfrm>
             <a:off x="863640" y="3493080"/>
-            <a:ext cx="4156560" cy="3179160"/>
+            <a:ext cx="4156200" cy="3178800"/>
           </a:xfrm>
           <a:prstGeom prst="roundRect">
             <a:avLst>
@@ -10853,6 +10651,11 @@
             <a:noAutofit/>
           </a:bodyPr>
           <a:p>
+            <a:pPr>
+              <a:lnSpc>
+                <a:spcPct val="100000"/>
+              </a:lnSpc>
+            </a:pPr>
             <a:endParaRPr b="0" lang="en-US" sz="1800" spc="-1" strike="noStrike">
               <a:solidFill>
                 <a:srgbClr val="ffffff"/>
@@ -10871,7 +10674,7 @@
         <p:spPr>
           <a:xfrm>
             <a:off x="833400" y="3493080"/>
-            <a:ext cx="121680" cy="3179160"/>
+            <a:ext cx="121320" cy="3178800"/>
           </a:xfrm>
           <a:prstGeom prst="roundRect">
             <a:avLst>
@@ -10896,6 +10699,11 @@
             <a:noAutofit/>
           </a:bodyPr>
           <a:p>
+            <a:pPr>
+              <a:lnSpc>
+                <a:spcPct val="100000"/>
+              </a:lnSpc>
+            </a:pPr>
             <a:endParaRPr b="0" lang="en-US" sz="1800" spc="-1" strike="noStrike">
               <a:solidFill>
                 <a:srgbClr val="000000"/>
@@ -10914,7 +10722,7 @@
         <p:spPr>
           <a:xfrm>
             <a:off x="1201680" y="3703680"/>
-            <a:ext cx="3572640" cy="613080"/>
+            <a:ext cx="3572280" cy="612720"/>
           </a:xfrm>
           <a:prstGeom prst="rect">
             <a:avLst/>
@@ -10991,7 +10799,7 @@
         <p:spPr>
           <a:xfrm>
             <a:off x="1201680" y="4338360"/>
-            <a:ext cx="3572640" cy="1943280"/>
+            <a:ext cx="3572280" cy="1942920"/>
           </a:xfrm>
           <a:prstGeom prst="rect">
             <a:avLst/>
@@ -11048,7 +10856,7 @@
         <p:spPr>
           <a:xfrm>
             <a:off x="5236560" y="3493080"/>
-            <a:ext cx="4156560" cy="3179160"/>
+            <a:ext cx="4156200" cy="3178800"/>
           </a:xfrm>
           <a:prstGeom prst="roundRect">
             <a:avLst>
@@ -11076,6 +10884,11 @@
             <a:noAutofit/>
           </a:bodyPr>
           <a:p>
+            <a:pPr>
+              <a:lnSpc>
+                <a:spcPct val="100000"/>
+              </a:lnSpc>
+            </a:pPr>
             <a:endParaRPr b="0" lang="en-US" sz="1800" spc="-1" strike="noStrike">
               <a:solidFill>
                 <a:srgbClr val="ffffff"/>
@@ -11094,7 +10907,7 @@
         <p:spPr>
           <a:xfrm>
             <a:off x="5205960" y="3493080"/>
-            <a:ext cx="121680" cy="3179160"/>
+            <a:ext cx="121320" cy="3178800"/>
           </a:xfrm>
           <a:prstGeom prst="roundRect">
             <a:avLst>
@@ -11119,6 +10932,11 @@
             <a:noAutofit/>
           </a:bodyPr>
           <a:p>
+            <a:pPr>
+              <a:lnSpc>
+                <a:spcPct val="100000"/>
+              </a:lnSpc>
+            </a:pPr>
             <a:endParaRPr b="0" lang="en-US" sz="1800" spc="-1" strike="noStrike">
               <a:solidFill>
                 <a:srgbClr val="000000"/>
@@ -11137,7 +10955,7 @@
         <p:spPr>
           <a:xfrm>
             <a:off x="5574240" y="3739680"/>
-            <a:ext cx="3572640" cy="613080"/>
+            <a:ext cx="3572280" cy="612720"/>
           </a:xfrm>
           <a:prstGeom prst="rect">
             <a:avLst/>
@@ -11214,7 +11032,7 @@
         <p:spPr>
           <a:xfrm>
             <a:off x="5574240" y="4482360"/>
-            <a:ext cx="3572640" cy="1619640"/>
+            <a:ext cx="3572280" cy="1619280"/>
           </a:xfrm>
           <a:prstGeom prst="rect">
             <a:avLst/>
@@ -11271,7 +11089,7 @@
         <p:spPr>
           <a:xfrm>
             <a:off x="9609480" y="3493080"/>
-            <a:ext cx="4156560" cy="3179160"/>
+            <a:ext cx="4156200" cy="3178800"/>
           </a:xfrm>
           <a:prstGeom prst="roundRect">
             <a:avLst>
@@ -11299,6 +11117,11 @@
             <a:noAutofit/>
           </a:bodyPr>
           <a:p>
+            <a:pPr>
+              <a:lnSpc>
+                <a:spcPct val="100000"/>
+              </a:lnSpc>
+            </a:pPr>
             <a:endParaRPr b="0" lang="en-US" sz="1800" spc="-1" strike="noStrike">
               <a:solidFill>
                 <a:srgbClr val="ffffff"/>
@@ -11317,7 +11140,7 @@
         <p:spPr>
           <a:xfrm>
             <a:off x="9578880" y="3493080"/>
-            <a:ext cx="121680" cy="3179160"/>
+            <a:ext cx="121320" cy="3178800"/>
           </a:xfrm>
           <a:prstGeom prst="roundRect">
             <a:avLst>
@@ -11342,6 +11165,11 @@
             <a:noAutofit/>
           </a:bodyPr>
           <a:p>
+            <a:pPr>
+              <a:lnSpc>
+                <a:spcPct val="100000"/>
+              </a:lnSpc>
+            </a:pPr>
             <a:endParaRPr b="0" lang="en-US" sz="1800" spc="-1" strike="noStrike">
               <a:solidFill>
                 <a:srgbClr val="000000"/>
@@ -11360,7 +11188,7 @@
         <p:spPr>
           <a:xfrm>
             <a:off x="9947160" y="3739680"/>
-            <a:ext cx="3572640" cy="613080"/>
+            <a:ext cx="3572280" cy="612720"/>
           </a:xfrm>
           <a:prstGeom prst="rect">
             <a:avLst/>
@@ -11437,7 +11265,7 @@
         <p:spPr>
           <a:xfrm>
             <a:off x="9947160" y="4482360"/>
-            <a:ext cx="3572640" cy="1295640"/>
+            <a:ext cx="3572280" cy="1295280"/>
           </a:xfrm>
           <a:prstGeom prst="rect">
             <a:avLst/>
@@ -11528,7 +11356,7 @@
         <p:spPr>
           <a:xfrm>
             <a:off x="0" y="0"/>
-            <a:ext cx="5486040" cy="8229240"/>
+            <a:ext cx="5485680" cy="8228880"/>
           </a:xfrm>
           <a:prstGeom prst="rect">
             <a:avLst/>
@@ -11547,7 +11375,7 @@
         <p:spPr>
           <a:xfrm>
             <a:off x="6309720" y="783720"/>
-            <a:ext cx="7496640" cy="1169280"/>
+            <a:ext cx="7496280" cy="1168920"/>
           </a:xfrm>
           <a:prstGeom prst="rect">
             <a:avLst/>
@@ -11604,7 +11432,7 @@
         <p:spPr>
           <a:xfrm>
             <a:off x="6309720" y="2247480"/>
-            <a:ext cx="7496640" cy="1613520"/>
+            <a:ext cx="7496280" cy="1613160"/>
           </a:xfrm>
           <a:prstGeom prst="rect">
             <a:avLst/>
@@ -11661,7 +11489,7 @@
         <p:spPr>
           <a:xfrm>
             <a:off x="6309720" y="4155840"/>
-            <a:ext cx="7496640" cy="903960"/>
+            <a:ext cx="7496280" cy="903600"/>
           </a:xfrm>
           <a:prstGeom prst="rect">
             <a:avLst/>
@@ -11738,7 +11566,7 @@
         <p:spPr>
           <a:xfrm>
             <a:off x="6161760" y="5280840"/>
-            <a:ext cx="3793680" cy="2262960"/>
+            <a:ext cx="3793320" cy="2262600"/>
           </a:xfrm>
           <a:prstGeom prst="roundRect">
             <a:avLst>
@@ -11763,6 +11591,11 @@
             <a:noAutofit/>
           </a:bodyPr>
           <a:p>
+            <a:pPr>
+              <a:lnSpc>
+                <a:spcPct val="100000"/>
+              </a:lnSpc>
+            </a:pPr>
             <a:endParaRPr b="0" lang="en-US" sz="1800" spc="-1" strike="noStrike">
               <a:solidFill>
                 <a:srgbClr val="ffffff"/>
@@ -11781,7 +11614,7 @@
         <p:spPr>
           <a:xfrm>
             <a:off x="6367320" y="5477400"/>
-            <a:ext cx="2338920" cy="291960"/>
+            <a:ext cx="2338560" cy="291600"/>
           </a:xfrm>
           <a:prstGeom prst="rect">
             <a:avLst/>
@@ -11838,7 +11671,7 @@
         <p:spPr>
           <a:xfrm>
             <a:off x="6367320" y="5965920"/>
-            <a:ext cx="3381840" cy="1411200"/>
+            <a:ext cx="3381480" cy="1410840"/>
           </a:xfrm>
           <a:prstGeom prst="rect">
             <a:avLst/>
@@ -11981,7 +11814,7 @@
         <p:spPr>
           <a:xfrm>
             <a:off x="10317240" y="5477400"/>
-            <a:ext cx="2338920" cy="291960"/>
+            <a:ext cx="2338560" cy="291600"/>
           </a:xfrm>
           <a:prstGeom prst="rect">
             <a:avLst/>
@@ -12038,7 +11871,7 @@
         <p:spPr>
           <a:xfrm>
             <a:off x="10317240" y="5965920"/>
-            <a:ext cx="3497040" cy="1411200"/>
+            <a:ext cx="3496680" cy="1410840"/>
           </a:xfrm>
           <a:prstGeom prst="rect">
             <a:avLst/>
@@ -12211,7 +12044,7 @@
         <p:spPr>
           <a:xfrm>
             <a:off x="863640" y="1641240"/>
-            <a:ext cx="6263280" cy="613080"/>
+            <a:ext cx="6262920" cy="612720"/>
           </a:xfrm>
           <a:prstGeom prst="rect">
             <a:avLst/>
@@ -12268,7 +12101,7 @@
         <p:spPr>
           <a:xfrm>
             <a:off x="863640" y="2686680"/>
-            <a:ext cx="12902400" cy="647640"/>
+            <a:ext cx="12902040" cy="647280"/>
           </a:xfrm>
           <a:prstGeom prst="rect">
             <a:avLst/>
@@ -12329,7 +12162,7 @@
         <p:spPr>
           <a:xfrm>
             <a:off x="863640" y="3577320"/>
-            <a:ext cx="906120" cy="906120"/>
+            <a:ext cx="905760" cy="905760"/>
           </a:xfrm>
           <a:prstGeom prst="rect">
             <a:avLst/>
@@ -12348,7 +12181,7 @@
         <p:spPr>
           <a:xfrm>
             <a:off x="2040120" y="3577320"/>
-            <a:ext cx="2944080" cy="613080"/>
+            <a:ext cx="2943720" cy="612720"/>
           </a:xfrm>
           <a:prstGeom prst="rect">
             <a:avLst/>
@@ -12405,7 +12238,7 @@
         <p:spPr>
           <a:xfrm>
             <a:off x="2040120" y="4320360"/>
-            <a:ext cx="2944080" cy="2267280"/>
+            <a:ext cx="2943720" cy="2266920"/>
           </a:xfrm>
           <a:prstGeom prst="rect">
             <a:avLst/>
@@ -12496,7 +12329,7 @@
         <p:spPr>
           <a:xfrm>
             <a:off x="5254560" y="3577320"/>
-            <a:ext cx="906120" cy="906120"/>
+            <a:ext cx="905760" cy="905760"/>
           </a:xfrm>
           <a:prstGeom prst="rect">
             <a:avLst/>
@@ -12515,7 +12348,7 @@
         <p:spPr>
           <a:xfrm>
             <a:off x="6431040" y="3577320"/>
-            <a:ext cx="2944080" cy="613080"/>
+            <a:ext cx="2943720" cy="612720"/>
           </a:xfrm>
           <a:prstGeom prst="rect">
             <a:avLst/>
@@ -12572,7 +12405,7 @@
         <p:spPr>
           <a:xfrm>
             <a:off x="6431040" y="4320360"/>
-            <a:ext cx="2944080" cy="1943280"/>
+            <a:ext cx="2943720" cy="1942920"/>
           </a:xfrm>
           <a:prstGeom prst="rect">
             <a:avLst/>
@@ -12633,7 +12466,7 @@
         <p:spPr>
           <a:xfrm>
             <a:off x="9645480" y="3577320"/>
-            <a:ext cx="906120" cy="906120"/>
+            <a:ext cx="905760" cy="905760"/>
           </a:xfrm>
           <a:prstGeom prst="rect">
             <a:avLst/>
@@ -12652,7 +12485,7 @@
         <p:spPr>
           <a:xfrm>
             <a:off x="10821960" y="3577320"/>
-            <a:ext cx="2944080" cy="613080"/>
+            <a:ext cx="2943720" cy="612720"/>
           </a:xfrm>
           <a:prstGeom prst="rect">
             <a:avLst/>
@@ -12709,7 +12542,7 @@
         <p:spPr>
           <a:xfrm>
             <a:off x="10821960" y="4320360"/>
-            <a:ext cx="2944080" cy="1943280"/>
+            <a:ext cx="2943720" cy="1942920"/>
           </a:xfrm>
           <a:prstGeom prst="rect">
             <a:avLst/>
@@ -12796,7 +12629,7 @@
         <p:spPr>
           <a:xfrm>
             <a:off x="863640" y="1684440"/>
-            <a:ext cx="6903360" cy="613080"/>
+            <a:ext cx="6903000" cy="612720"/>
           </a:xfrm>
           <a:prstGeom prst="rect">
             <a:avLst/>
@@ -12853,7 +12686,7 @@
         <p:spPr>
           <a:xfrm>
             <a:off x="431640" y="2621880"/>
-            <a:ext cx="12902400" cy="323640"/>
+            <a:ext cx="12902040" cy="323280"/>
           </a:xfrm>
           <a:prstGeom prst="rect">
             <a:avLst/>
@@ -12920,7 +12753,7 @@
         <p:spPr>
           <a:xfrm>
             <a:off x="863640" y="3296880"/>
-            <a:ext cx="539640" cy="539640"/>
+            <a:ext cx="539280" cy="539280"/>
           </a:xfrm>
           <a:prstGeom prst="rect">
             <a:avLst/>
@@ -12939,7 +12772,7 @@
         <p:spPr>
           <a:xfrm>
             <a:off x="1673640" y="3296880"/>
-            <a:ext cx="3909960" cy="306360"/>
+            <a:ext cx="3909600" cy="306000"/>
           </a:xfrm>
           <a:prstGeom prst="rect">
             <a:avLst/>
@@ -12996,7 +12829,7 @@
         <p:spPr>
           <a:xfrm>
             <a:off x="1673640" y="3733200"/>
-            <a:ext cx="5506200" cy="971640"/>
+            <a:ext cx="5505840" cy="971280"/>
           </a:xfrm>
           <a:prstGeom prst="rect">
             <a:avLst/>
@@ -13063,7 +12896,7 @@
         <p:spPr>
           <a:xfrm>
             <a:off x="7450200" y="3296880"/>
-            <a:ext cx="539640" cy="539640"/>
+            <a:ext cx="539280" cy="539280"/>
           </a:xfrm>
           <a:prstGeom prst="rect">
             <a:avLst/>
@@ -13082,7 +12915,7 @@
         <p:spPr>
           <a:xfrm>
             <a:off x="8259840" y="3296880"/>
-            <a:ext cx="3069360" cy="306360"/>
+            <a:ext cx="3069000" cy="306000"/>
           </a:xfrm>
           <a:prstGeom prst="rect">
             <a:avLst/>
@@ -13139,7 +12972,7 @@
         <p:spPr>
           <a:xfrm>
             <a:off x="8259840" y="3733200"/>
-            <a:ext cx="5506560" cy="971640"/>
+            <a:ext cx="5506200" cy="971280"/>
           </a:xfrm>
           <a:prstGeom prst="rect">
             <a:avLst/>
@@ -13206,7 +13039,7 @@
         <p:spPr>
           <a:xfrm>
             <a:off x="863640" y="5136840"/>
-            <a:ext cx="539640" cy="539640"/>
+            <a:ext cx="539280" cy="539280"/>
           </a:xfrm>
           <a:prstGeom prst="rect">
             <a:avLst/>
@@ -13225,7 +13058,7 @@
         <p:spPr>
           <a:xfrm>
             <a:off x="1673640" y="5136840"/>
-            <a:ext cx="3442320" cy="306360"/>
+            <a:ext cx="3441960" cy="306000"/>
           </a:xfrm>
           <a:prstGeom prst="rect">
             <a:avLst/>
@@ -13282,7 +13115,7 @@
         <p:spPr>
           <a:xfrm>
             <a:off x="1673640" y="5573160"/>
-            <a:ext cx="5506200" cy="971640"/>
+            <a:ext cx="5505840" cy="971280"/>
           </a:xfrm>
           <a:prstGeom prst="rect">
             <a:avLst/>
@@ -13349,7 +13182,7 @@
         <p:spPr>
           <a:xfrm>
             <a:off x="7450200" y="5136840"/>
-            <a:ext cx="539640" cy="539640"/>
+            <a:ext cx="539280" cy="539280"/>
           </a:xfrm>
           <a:prstGeom prst="rect">
             <a:avLst/>
@@ -13368,7 +13201,7 @@
         <p:spPr>
           <a:xfrm>
             <a:off x="8259840" y="5136840"/>
-            <a:ext cx="3049200" cy="306360"/>
+            <a:ext cx="3048840" cy="306000"/>
           </a:xfrm>
           <a:prstGeom prst="rect">
             <a:avLst/>
@@ -13425,7 +13258,7 @@
         <p:spPr>
           <a:xfrm>
             <a:off x="8259840" y="5573160"/>
-            <a:ext cx="5506560" cy="971640"/>
+            <a:ext cx="5506200" cy="971280"/>
           </a:xfrm>
           <a:prstGeom prst="rect">
             <a:avLst/>
@@ -13512,7 +13345,7 @@
         <p:spPr>
           <a:xfrm>
             <a:off x="783360" y="538560"/>
-            <a:ext cx="5400000" cy="555840"/>
+            <a:ext cx="5399640" cy="555480"/>
           </a:xfrm>
           <a:prstGeom prst="rect">
             <a:avLst/>
@@ -13569,7 +13402,7 @@
         <p:spPr>
           <a:xfrm>
             <a:off x="783360" y="1449720"/>
-            <a:ext cx="13063680" cy="559800"/>
+            <a:ext cx="13063320" cy="559440"/>
           </a:xfrm>
           <a:prstGeom prst="rect">
             <a:avLst/>
@@ -13630,7 +13463,7 @@
         <p:spPr>
           <a:xfrm>
             <a:off x="992520" y="2209320"/>
-            <a:ext cx="12645000" cy="4744800"/>
+            <a:ext cx="12644640" cy="4744440"/>
           </a:xfrm>
           <a:prstGeom prst="rect">
             <a:avLst/>
@@ -13659,7 +13492,7 @@
         <p:spPr>
           <a:xfrm>
             <a:off x="11791800" y="3418200"/>
-            <a:ext cx="652680" cy="652680"/>
+            <a:ext cx="652320" cy="652320"/>
           </a:xfrm>
           <a:prstGeom prst="rect">
             <a:avLst/>
@@ -13678,7 +13511,7 @@
         <p:spPr>
           <a:xfrm>
             <a:off x="11209680" y="5652360"/>
-            <a:ext cx="1906920" cy="667440"/>
+            <a:ext cx="1906560" cy="667080"/>
           </a:xfrm>
           <a:prstGeom prst="rect">
             <a:avLst/>
@@ -13745,7 +13578,7 @@
         <p:spPr>
           <a:xfrm>
             <a:off x="9400320" y="3419280"/>
-            <a:ext cx="652680" cy="652680"/>
+            <a:ext cx="652320" cy="652320"/>
           </a:xfrm>
           <a:prstGeom prst="rect">
             <a:avLst/>
@@ -13764,7 +13597,7 @@
         <p:spPr>
           <a:xfrm>
             <a:off x="8805960" y="5652360"/>
-            <a:ext cx="1906920" cy="667440"/>
+            <a:ext cx="1906560" cy="667080"/>
           </a:xfrm>
           <a:prstGeom prst="rect">
             <a:avLst/>
@@ -13831,7 +13664,7 @@
         <p:spPr>
           <a:xfrm>
             <a:off x="7009920" y="3419280"/>
-            <a:ext cx="652680" cy="652680"/>
+            <a:ext cx="652320" cy="652320"/>
           </a:xfrm>
           <a:prstGeom prst="rect">
             <a:avLst/>
@@ -13850,7 +13683,7 @@
         <p:spPr>
           <a:xfrm>
             <a:off x="6415560" y="5652360"/>
-            <a:ext cx="1906920" cy="667440"/>
+            <a:ext cx="1906560" cy="667080"/>
           </a:xfrm>
           <a:prstGeom prst="rect">
             <a:avLst/>
@@ -13917,7 +13750,7 @@
         <p:spPr>
           <a:xfrm>
             <a:off x="4619160" y="3419280"/>
-            <a:ext cx="652680" cy="652680"/>
+            <a:ext cx="652320" cy="652320"/>
           </a:xfrm>
           <a:prstGeom prst="rect">
             <a:avLst/>
@@ -13936,7 +13769,7 @@
         <p:spPr>
           <a:xfrm>
             <a:off x="4024800" y="5652360"/>
-            <a:ext cx="1906920" cy="667440"/>
+            <a:ext cx="1906560" cy="667080"/>
           </a:xfrm>
           <a:prstGeom prst="rect">
             <a:avLst/>
@@ -14003,7 +13836,7 @@
         <p:spPr>
           <a:xfrm>
             <a:off x="2215440" y="3419280"/>
-            <a:ext cx="652680" cy="652680"/>
+            <a:ext cx="652320" cy="652320"/>
           </a:xfrm>
           <a:prstGeom prst="rect">
             <a:avLst/>
@@ -14022,7 +13855,7 @@
         <p:spPr>
           <a:xfrm>
             <a:off x="1581840" y="5652360"/>
-            <a:ext cx="1906920" cy="667440"/>
+            <a:ext cx="1906560" cy="667080"/>
           </a:xfrm>
           <a:prstGeom prst="rect">
             <a:avLst/>
@@ -14079,7 +13912,7 @@
         <p:spPr>
           <a:xfrm>
             <a:off x="783360" y="7154280"/>
-            <a:ext cx="13063680" cy="559800"/>
+            <a:ext cx="13063320" cy="559440"/>
           </a:xfrm>
           <a:prstGeom prst="rect">
             <a:avLst/>
@@ -14206,7 +14039,7 @@
         <p:spPr>
           <a:xfrm>
             <a:off x="863640" y="923040"/>
-            <a:ext cx="5699880" cy="613080"/>
+            <a:ext cx="5699520" cy="612720"/>
           </a:xfrm>
           <a:prstGeom prst="rect">
             <a:avLst/>
@@ -14263,7 +14096,7 @@
         <p:spPr>
           <a:xfrm>
             <a:off x="863640" y="1968480"/>
-            <a:ext cx="12902400" cy="647640"/>
+            <a:ext cx="12902040" cy="647280"/>
           </a:xfrm>
           <a:prstGeom prst="rect">
             <a:avLst/>
@@ -14320,7 +14153,7 @@
         <p:spPr>
           <a:xfrm>
             <a:off x="708120" y="2859480"/>
-            <a:ext cx="6498720" cy="2983680"/>
+            <a:ext cx="6498360" cy="2983320"/>
           </a:xfrm>
           <a:prstGeom prst="roundRect">
             <a:avLst>
@@ -14345,6 +14178,11 @@
             <a:noAutofit/>
           </a:bodyPr>
           <a:p>
+            <a:pPr>
+              <a:lnSpc>
+                <a:spcPct val="100000"/>
+              </a:lnSpc>
+            </a:pPr>
             <a:endParaRPr b="0" lang="en-US" sz="1800" spc="-1" strike="noStrike">
               <a:solidFill>
                 <a:srgbClr val="ffffff"/>
@@ -14363,7 +14201,7 @@
         <p:spPr>
           <a:xfrm>
             <a:off x="924120" y="3075120"/>
-            <a:ext cx="2966040" cy="306360"/>
+            <a:ext cx="2965680" cy="306000"/>
           </a:xfrm>
           <a:prstGeom prst="rect">
             <a:avLst/>
@@ -14440,7 +14278,7 @@
         <p:spPr>
           <a:xfrm>
             <a:off x="924120" y="3597840"/>
-            <a:ext cx="6067080" cy="2170080"/>
+            <a:ext cx="6066720" cy="2169720"/>
           </a:xfrm>
           <a:prstGeom prst="rect">
             <a:avLst/>
@@ -14615,7 +14453,7 @@
         <p:spPr>
           <a:xfrm>
             <a:off x="7586280" y="3075120"/>
-            <a:ext cx="3312720" cy="306360"/>
+            <a:ext cx="3312360" cy="306000"/>
           </a:xfrm>
           <a:prstGeom prst="rect">
             <a:avLst/>
@@ -14692,7 +14530,7 @@
         <p:spPr>
           <a:xfrm>
             <a:off x="7586280" y="3597840"/>
-            <a:ext cx="6187680" cy="2170080"/>
+            <a:ext cx="6187320" cy="2169720"/>
           </a:xfrm>
           <a:prstGeom prst="rect">
             <a:avLst/>
@@ -14867,7 +14705,7 @@
         <p:spPr>
           <a:xfrm>
             <a:off x="863640" y="6086520"/>
-            <a:ext cx="12902400" cy="1219680"/>
+            <a:ext cx="12902040" cy="1219320"/>
           </a:xfrm>
           <a:prstGeom prst="roundRect">
             <a:avLst>
@@ -14892,6 +14730,11 @@
             <a:noAutofit/>
           </a:bodyPr>
           <a:p>
+            <a:pPr>
+              <a:lnSpc>
+                <a:spcPct val="100000"/>
+              </a:lnSpc>
+            </a:pPr>
             <a:endParaRPr b="0" lang="en-US" sz="1800" spc="-1" strike="noStrike">
               <a:solidFill>
                 <a:srgbClr val="ffffff"/>
@@ -14914,7 +14757,7 @@
         <p:spPr>
           <a:xfrm>
             <a:off x="1079640" y="6395760"/>
-            <a:ext cx="269640" cy="215640"/>
+            <a:ext cx="269280" cy="215280"/>
           </a:xfrm>
           <a:prstGeom prst="rect">
             <a:avLst/>
@@ -14933,7 +14776,7 @@
         <p:spPr>
           <a:xfrm>
             <a:off x="1565280" y="6356160"/>
-            <a:ext cx="11985120" cy="647640"/>
+            <a:ext cx="11984760" cy="647280"/>
           </a:xfrm>
           <a:prstGeom prst="rect">
             <a:avLst/>

--- a/Seperated/Presentations/L6-Detail-Suni-intellektle-proseslerin-avtomatlasdirilmasi-RPA-AI.pptx
+++ b/Seperated/Presentations/L6-Detail-Suni-intellektle-proseslerin-avtomatlasdirilmasi-RPA-AI.pptx
@@ -361,7 +361,7 @@
             <a:pPr indent="0" algn="r">
               <a:buNone/>
             </a:pPr>
-            <a:fld id="{7EFA4AD5-FE00-49D2-9877-58999C9C9DEE}" type="slidenum">
+            <a:fld id="{774D9624-6B0A-469E-AE23-C9294C2717AF}" type="slidenum">
               <a:rPr b="0" lang="en-US" sz="1400" spc="-1" strike="noStrike">
                 <a:solidFill>
                   <a:srgbClr val="000000"/>
@@ -415,7 +415,7 @@
         <p:spPr>
           <a:xfrm>
             <a:off x="685800" y="1143000"/>
-            <a:ext cx="5485680" cy="3085560"/>
+            <a:ext cx="5485320" cy="3085200"/>
           </a:xfrm>
           <a:prstGeom prst="rect">
             <a:avLst/>
@@ -438,7 +438,7 @@
         <p:spPr>
           <a:xfrm>
             <a:off x="685800" y="4400640"/>
-            <a:ext cx="5485680" cy="3599640"/>
+            <a:ext cx="5485320" cy="3599280"/>
           </a:xfrm>
           <a:prstGeom prst="rect">
             <a:avLst/>
@@ -478,7 +478,7 @@
         <p:spPr>
           <a:xfrm>
             <a:off x="3884760" y="8685360"/>
-            <a:ext cx="2971080" cy="457920"/>
+            <a:ext cx="2970720" cy="457560"/>
           </a:xfrm>
           <a:prstGeom prst="rect">
             <a:avLst/>
@@ -519,7 +519,7 @@
                 <a:tab algn="l" pos="0"/>
               </a:tabLst>
             </a:pPr>
-            <a:fld id="{ADB147B4-1BEA-425E-8EEA-C18772F82B09}" type="slidenum">
+            <a:fld id="{B73DAB3D-0FC1-418F-A9E5-CF6A135199AC}" type="slidenum">
               <a:rPr b="0" lang="en-US" sz="1200" spc="-1" strike="noStrike">
                 <a:solidFill>
                   <a:srgbClr val="000000"/>
@@ -572,7 +572,7 @@
         <p:spPr>
           <a:xfrm>
             <a:off x="685800" y="1143000"/>
-            <a:ext cx="5485680" cy="3085560"/>
+            <a:ext cx="5485320" cy="3085200"/>
           </a:xfrm>
           <a:prstGeom prst="rect">
             <a:avLst/>
@@ -595,7 +595,7 @@
         <p:spPr>
           <a:xfrm>
             <a:off x="685800" y="4400640"/>
-            <a:ext cx="5485680" cy="3599640"/>
+            <a:ext cx="5485320" cy="3599280"/>
           </a:xfrm>
           <a:prstGeom prst="rect">
             <a:avLst/>
@@ -635,7 +635,7 @@
         <p:spPr>
           <a:xfrm>
             <a:off x="3884760" y="8685360"/>
-            <a:ext cx="2971080" cy="457920"/>
+            <a:ext cx="2970720" cy="457560"/>
           </a:xfrm>
           <a:prstGeom prst="rect">
             <a:avLst/>
@@ -676,7 +676,7 @@
                 <a:tab algn="l" pos="0"/>
               </a:tabLst>
             </a:pPr>
-            <a:fld id="{4CD146D2-76A3-4AD9-934B-5D81F82A30E0}" type="slidenum">
+            <a:fld id="{80BF482A-F407-4790-99F2-CD64D0218C0B}" type="slidenum">
               <a:rPr b="0" lang="en-US" sz="1200" spc="-1" strike="noStrike">
                 <a:solidFill>
                   <a:srgbClr val="000000"/>
@@ -729,7 +729,7 @@
         <p:spPr>
           <a:xfrm>
             <a:off x="685800" y="1143000"/>
-            <a:ext cx="5485680" cy="3085560"/>
+            <a:ext cx="5485320" cy="3085200"/>
           </a:xfrm>
           <a:prstGeom prst="rect">
             <a:avLst/>
@@ -752,7 +752,7 @@
         <p:spPr>
           <a:xfrm>
             <a:off x="685800" y="4400640"/>
-            <a:ext cx="5485680" cy="3599640"/>
+            <a:ext cx="5485320" cy="3599280"/>
           </a:xfrm>
           <a:prstGeom prst="rect">
             <a:avLst/>
@@ -792,7 +792,7 @@
         <p:spPr>
           <a:xfrm>
             <a:off x="3884760" y="8685360"/>
-            <a:ext cx="2971080" cy="457920"/>
+            <a:ext cx="2970720" cy="457560"/>
           </a:xfrm>
           <a:prstGeom prst="rect">
             <a:avLst/>
@@ -833,7 +833,7 @@
                 <a:tab algn="l" pos="0"/>
               </a:tabLst>
             </a:pPr>
-            <a:fld id="{C34C7B50-DDB1-4C11-9537-DE72BFC2B3ED}" type="slidenum">
+            <a:fld id="{9923325A-E904-4295-A9FB-133AC4DEABBE}" type="slidenum">
               <a:rPr b="0" lang="en-US" sz="1200" spc="-1" strike="noStrike">
                 <a:solidFill>
                   <a:srgbClr val="000000"/>
@@ -886,7 +886,7 @@
         <p:spPr>
           <a:xfrm>
             <a:off x="685800" y="1143000"/>
-            <a:ext cx="5485680" cy="3085560"/>
+            <a:ext cx="5485320" cy="3085200"/>
           </a:xfrm>
           <a:prstGeom prst="rect">
             <a:avLst/>
@@ -909,7 +909,7 @@
         <p:spPr>
           <a:xfrm>
             <a:off x="685800" y="4400640"/>
-            <a:ext cx="5485680" cy="3599640"/>
+            <a:ext cx="5485320" cy="3599280"/>
           </a:xfrm>
           <a:prstGeom prst="rect">
             <a:avLst/>
@@ -949,7 +949,7 @@
         <p:spPr>
           <a:xfrm>
             <a:off x="3884760" y="8685360"/>
-            <a:ext cx="2971080" cy="457920"/>
+            <a:ext cx="2970720" cy="457560"/>
           </a:xfrm>
           <a:prstGeom prst="rect">
             <a:avLst/>
@@ -990,7 +990,7 @@
                 <a:tab algn="l" pos="0"/>
               </a:tabLst>
             </a:pPr>
-            <a:fld id="{6A3A89CB-024E-43DE-95E4-C3992F9814D8}" type="slidenum">
+            <a:fld id="{A73FA3CD-2577-4872-90A4-74265662DEDF}" type="slidenum">
               <a:rPr b="0" lang="en-US" sz="1200" spc="-1" strike="noStrike">
                 <a:solidFill>
                   <a:srgbClr val="000000"/>
@@ -1043,7 +1043,7 @@
         <p:spPr>
           <a:xfrm>
             <a:off x="685800" y="1143000"/>
-            <a:ext cx="5485680" cy="3085560"/>
+            <a:ext cx="5485320" cy="3085200"/>
           </a:xfrm>
           <a:prstGeom prst="rect">
             <a:avLst/>
@@ -1066,7 +1066,7 @@
         <p:spPr>
           <a:xfrm>
             <a:off x="685800" y="4400640"/>
-            <a:ext cx="5485680" cy="3599640"/>
+            <a:ext cx="5485320" cy="3599280"/>
           </a:xfrm>
           <a:prstGeom prst="rect">
             <a:avLst/>
@@ -1106,7 +1106,7 @@
         <p:spPr>
           <a:xfrm>
             <a:off x="3884760" y="8685360"/>
-            <a:ext cx="2971080" cy="457920"/>
+            <a:ext cx="2970720" cy="457560"/>
           </a:xfrm>
           <a:prstGeom prst="rect">
             <a:avLst/>
@@ -1147,7 +1147,7 @@
                 <a:tab algn="l" pos="0"/>
               </a:tabLst>
             </a:pPr>
-            <a:fld id="{36471B94-E6B1-4682-A704-2AD0826C67ED}" type="slidenum">
+            <a:fld id="{724920DE-3603-4EC2-9D7C-BE4F3D3073B8}" type="slidenum">
               <a:rPr b="0" lang="en-US" sz="1200" spc="-1" strike="noStrike">
                 <a:solidFill>
                   <a:srgbClr val="000000"/>
@@ -1200,7 +1200,7 @@
         <p:spPr>
           <a:xfrm>
             <a:off x="685800" y="1143000"/>
-            <a:ext cx="5485680" cy="3085560"/>
+            <a:ext cx="5485320" cy="3085200"/>
           </a:xfrm>
           <a:prstGeom prst="rect">
             <a:avLst/>
@@ -1223,7 +1223,7 @@
         <p:spPr>
           <a:xfrm>
             <a:off x="685800" y="4400640"/>
-            <a:ext cx="5485680" cy="3599640"/>
+            <a:ext cx="5485320" cy="3599280"/>
           </a:xfrm>
           <a:prstGeom prst="rect">
             <a:avLst/>
@@ -1263,7 +1263,7 @@
         <p:spPr>
           <a:xfrm>
             <a:off x="3884760" y="8685360"/>
-            <a:ext cx="2971080" cy="457920"/>
+            <a:ext cx="2970720" cy="457560"/>
           </a:xfrm>
           <a:prstGeom prst="rect">
             <a:avLst/>
@@ -1304,7 +1304,7 @@
                 <a:tab algn="l" pos="0"/>
               </a:tabLst>
             </a:pPr>
-            <a:fld id="{8B50B0DD-BA6D-498B-830D-FDEB75F2EAE2}" type="slidenum">
+            <a:fld id="{FF36C6E8-ADE2-48DF-9E32-27A7EF3C765F}" type="slidenum">
               <a:rPr b="0" lang="en-US" sz="1200" spc="-1" strike="noStrike">
                 <a:solidFill>
                   <a:srgbClr val="000000"/>
@@ -1357,7 +1357,7 @@
         <p:spPr>
           <a:xfrm>
             <a:off x="685800" y="1143000"/>
-            <a:ext cx="5485680" cy="3085560"/>
+            <a:ext cx="5485320" cy="3085200"/>
           </a:xfrm>
           <a:prstGeom prst="rect">
             <a:avLst/>
@@ -1380,7 +1380,7 @@
         <p:spPr>
           <a:xfrm>
             <a:off x="685800" y="4400640"/>
-            <a:ext cx="5485680" cy="3599640"/>
+            <a:ext cx="5485320" cy="3599280"/>
           </a:xfrm>
           <a:prstGeom prst="rect">
             <a:avLst/>
@@ -1420,7 +1420,7 @@
         <p:spPr>
           <a:xfrm>
             <a:off x="3884760" y="8685360"/>
-            <a:ext cx="2971080" cy="457920"/>
+            <a:ext cx="2970720" cy="457560"/>
           </a:xfrm>
           <a:prstGeom prst="rect">
             <a:avLst/>
@@ -1461,7 +1461,7 @@
                 <a:tab algn="l" pos="0"/>
               </a:tabLst>
             </a:pPr>
-            <a:fld id="{D481B310-2083-4BF7-9412-AF39E0E97B3F}" type="slidenum">
+            <a:fld id="{C140C5B6-902A-4DDF-B032-02339ADFF5E5}" type="slidenum">
               <a:rPr b="0" lang="en-US" sz="1200" spc="-1" strike="noStrike">
                 <a:solidFill>
                   <a:srgbClr val="000000"/>
@@ -1514,7 +1514,7 @@
         <p:spPr>
           <a:xfrm>
             <a:off x="685800" y="1143000"/>
-            <a:ext cx="5485680" cy="3085560"/>
+            <a:ext cx="5485320" cy="3085200"/>
           </a:xfrm>
           <a:prstGeom prst="rect">
             <a:avLst/>
@@ -1537,7 +1537,7 @@
         <p:spPr>
           <a:xfrm>
             <a:off x="685800" y="4400640"/>
-            <a:ext cx="5485680" cy="3599640"/>
+            <a:ext cx="5485320" cy="3599280"/>
           </a:xfrm>
           <a:prstGeom prst="rect">
             <a:avLst/>
@@ -1577,7 +1577,7 @@
         <p:spPr>
           <a:xfrm>
             <a:off x="3884760" y="8685360"/>
-            <a:ext cx="2971080" cy="457920"/>
+            <a:ext cx="2970720" cy="457560"/>
           </a:xfrm>
           <a:prstGeom prst="rect">
             <a:avLst/>
@@ -1618,7 +1618,7 @@
                 <a:tab algn="l" pos="0"/>
               </a:tabLst>
             </a:pPr>
-            <a:fld id="{5E180952-B40C-4D74-BF9A-56534FAF2335}" type="slidenum">
+            <a:fld id="{CC700C32-6A8D-451A-8999-95AF19E4C74A}" type="slidenum">
               <a:rPr b="0" lang="en-US" sz="1200" spc="-1" strike="noStrike">
                 <a:solidFill>
                   <a:srgbClr val="000000"/>
@@ -1671,7 +1671,7 @@
         <p:spPr>
           <a:xfrm>
             <a:off x="685800" y="1143000"/>
-            <a:ext cx="5485680" cy="3085560"/>
+            <a:ext cx="5485320" cy="3085200"/>
           </a:xfrm>
           <a:prstGeom prst="rect">
             <a:avLst/>
@@ -1694,7 +1694,7 @@
         <p:spPr>
           <a:xfrm>
             <a:off x="685800" y="4400640"/>
-            <a:ext cx="5485680" cy="3599640"/>
+            <a:ext cx="5485320" cy="3599280"/>
           </a:xfrm>
           <a:prstGeom prst="rect">
             <a:avLst/>
@@ -1734,7 +1734,7 @@
         <p:spPr>
           <a:xfrm>
             <a:off x="3884760" y="8685360"/>
-            <a:ext cx="2971080" cy="457920"/>
+            <a:ext cx="2970720" cy="457560"/>
           </a:xfrm>
           <a:prstGeom prst="rect">
             <a:avLst/>
@@ -1775,7 +1775,7 @@
                 <a:tab algn="l" pos="0"/>
               </a:tabLst>
             </a:pPr>
-            <a:fld id="{7B476EED-2F15-49E4-8499-EFE46402D588}" type="slidenum">
+            <a:fld id="{1F0439BA-F834-4593-89EE-630B537D0D38}" type="slidenum">
               <a:rPr b="0" lang="en-US" sz="1200" spc="-1" strike="noStrike">
                 <a:solidFill>
                   <a:srgbClr val="000000"/>
@@ -1828,7 +1828,7 @@
         <p:spPr>
           <a:xfrm>
             <a:off x="685800" y="1143000"/>
-            <a:ext cx="5485680" cy="3085560"/>
+            <a:ext cx="5485320" cy="3085200"/>
           </a:xfrm>
           <a:prstGeom prst="rect">
             <a:avLst/>
@@ -1851,7 +1851,7 @@
         <p:spPr>
           <a:xfrm>
             <a:off x="685800" y="4400640"/>
-            <a:ext cx="5485680" cy="3599640"/>
+            <a:ext cx="5485320" cy="3599280"/>
           </a:xfrm>
           <a:prstGeom prst="rect">
             <a:avLst/>
@@ -1891,7 +1891,7 @@
         <p:spPr>
           <a:xfrm>
             <a:off x="3884760" y="8685360"/>
-            <a:ext cx="2971080" cy="457920"/>
+            <a:ext cx="2970720" cy="457560"/>
           </a:xfrm>
           <a:prstGeom prst="rect">
             <a:avLst/>
@@ -1932,7 +1932,7 @@
                 <a:tab algn="l" pos="0"/>
               </a:tabLst>
             </a:pPr>
-            <a:fld id="{E9D82FE9-00E1-4703-A6D1-E76E04D46C52}" type="slidenum">
+            <a:fld id="{1B86351B-F007-4B25-B6AC-2653676E03CC}" type="slidenum">
               <a:rPr b="0" lang="en-US" sz="1200" spc="-1" strike="noStrike">
                 <a:solidFill>
                   <a:srgbClr val="000000"/>
@@ -1985,7 +1985,7 @@
         <p:spPr>
           <a:xfrm>
             <a:off x="685800" y="1143000"/>
-            <a:ext cx="5485680" cy="3085560"/>
+            <a:ext cx="5485320" cy="3085200"/>
           </a:xfrm>
           <a:prstGeom prst="rect">
             <a:avLst/>
@@ -2008,7 +2008,7 @@
         <p:spPr>
           <a:xfrm>
             <a:off x="685800" y="4400640"/>
-            <a:ext cx="5485680" cy="3599640"/>
+            <a:ext cx="5485320" cy="3599280"/>
           </a:xfrm>
           <a:prstGeom prst="rect">
             <a:avLst/>
@@ -2048,7 +2048,7 @@
         <p:spPr>
           <a:xfrm>
             <a:off x="3884760" y="8685360"/>
-            <a:ext cx="2971080" cy="457920"/>
+            <a:ext cx="2970720" cy="457560"/>
           </a:xfrm>
           <a:prstGeom prst="rect">
             <a:avLst/>
@@ -2089,7 +2089,7 @@
                 <a:tab algn="l" pos="0"/>
               </a:tabLst>
             </a:pPr>
-            <a:fld id="{3C799DE9-2051-4CF4-BCFF-A160DAFD3DB7}" type="slidenum">
+            <a:fld id="{92F3F217-7B5C-468E-B1CE-C47D667F0235}" type="slidenum">
               <a:rPr b="0" lang="en-US" sz="1200" spc="-1" strike="noStrike">
                 <a:solidFill>
                   <a:srgbClr val="000000"/>
@@ -2435,7 +2435,7 @@
         <p:spPr>
           <a:xfrm>
             <a:off x="0" y="0"/>
-            <a:ext cx="14629680" cy="8228880"/>
+            <a:ext cx="14629320" cy="8228520"/>
           </a:xfrm>
           <a:prstGeom prst="rect">
             <a:avLst/>
@@ -2481,7 +2481,7 @@
         <p:spPr>
           <a:xfrm>
             <a:off x="0" y="0"/>
-            <a:ext cx="14629680" cy="8228880"/>
+            <a:ext cx="14629320" cy="8228520"/>
           </a:xfrm>
           <a:prstGeom prst="rect">
             <a:avLst/>
@@ -2827,7 +2827,7 @@
         <p:spPr>
           <a:xfrm>
             <a:off x="0" y="0"/>
-            <a:ext cx="14629680" cy="8228880"/>
+            <a:ext cx="14629320" cy="8228520"/>
           </a:xfrm>
           <a:prstGeom prst="rect">
             <a:avLst/>
@@ -2873,7 +2873,7 @@
         <p:spPr>
           <a:xfrm>
             <a:off x="0" y="0"/>
-            <a:ext cx="14629680" cy="8228880"/>
+            <a:ext cx="14629320" cy="8228520"/>
           </a:xfrm>
           <a:prstGeom prst="rect">
             <a:avLst/>
@@ -3219,7 +3219,7 @@
         <p:spPr>
           <a:xfrm>
             <a:off x="0" y="0"/>
-            <a:ext cx="14629680" cy="8228880"/>
+            <a:ext cx="14629320" cy="8228520"/>
           </a:xfrm>
           <a:prstGeom prst="rect">
             <a:avLst/>
@@ -3265,7 +3265,7 @@
         <p:spPr>
           <a:xfrm>
             <a:off x="0" y="0"/>
-            <a:ext cx="14629680" cy="8228880"/>
+            <a:ext cx="14629320" cy="8228520"/>
           </a:xfrm>
           <a:prstGeom prst="rect">
             <a:avLst/>
@@ -3611,7 +3611,7 @@
         <p:spPr>
           <a:xfrm>
             <a:off x="0" y="0"/>
-            <a:ext cx="14629680" cy="8228880"/>
+            <a:ext cx="14629320" cy="8228520"/>
           </a:xfrm>
           <a:prstGeom prst="rect">
             <a:avLst/>
@@ -3657,7 +3657,7 @@
         <p:spPr>
           <a:xfrm>
             <a:off x="0" y="0"/>
-            <a:ext cx="14629680" cy="8228880"/>
+            <a:ext cx="14629320" cy="8228520"/>
           </a:xfrm>
           <a:prstGeom prst="rect">
             <a:avLst/>
@@ -3732,25 +3732,7 @@
                 </a:solidFill>
                 <a:latin typeface="Arial"/>
               </a:rPr>
-              <a:t>Click to edit </a:t>
-            </a:r>
-            <a:r>
-              <a:rPr b="0" lang="en-US" sz="4400" spc="-1" strike="noStrike">
-                <a:solidFill>
-                  <a:srgbClr val="000000"/>
-                </a:solidFill>
-                <a:latin typeface="Arial"/>
-              </a:rPr>
-              <a:t>the title text </a:t>
-            </a:r>
-            <a:r>
-              <a:rPr b="0" lang="en-US" sz="4400" spc="-1" strike="noStrike">
-                <a:solidFill>
-                  <a:srgbClr val="000000"/>
-                </a:solidFill>
-                <a:latin typeface="Arial"/>
-              </a:rPr>
-              <a:t>format</a:t>
+              <a:t>Click to edit the title text format</a:t>
             </a:r>
             <a:endParaRPr b="0" lang="en-US" sz="4400" spc="-1" strike="noStrike">
               <a:solidFill>
@@ -4021,7 +4003,7 @@
         <p:spPr>
           <a:xfrm>
             <a:off x="0" y="0"/>
-            <a:ext cx="14629680" cy="8228880"/>
+            <a:ext cx="14629320" cy="8228520"/>
           </a:xfrm>
           <a:prstGeom prst="rect">
             <a:avLst/>
@@ -4067,7 +4049,7 @@
         <p:spPr>
           <a:xfrm>
             <a:off x="0" y="0"/>
-            <a:ext cx="14629680" cy="8228880"/>
+            <a:ext cx="14629320" cy="8228520"/>
           </a:xfrm>
           <a:prstGeom prst="rect">
             <a:avLst/>
@@ -4142,16 +4124,7 @@
                 </a:solidFill>
                 <a:latin typeface="Arial"/>
               </a:rPr>
-              <a:t>Click to edit the </a:t>
-            </a:r>
-            <a:r>
-              <a:rPr b="0" lang="en-US" sz="4400" spc="-1" strike="noStrike">
-                <a:solidFill>
-                  <a:srgbClr val="000000"/>
-                </a:solidFill>
-                <a:latin typeface="Arial"/>
-              </a:rPr>
-              <a:t>title text format</a:t>
+              <a:t>Click to edit the title text format</a:t>
             </a:r>
             <a:endParaRPr b="0" lang="en-US" sz="4400" spc="-1" strike="noStrike">
               <a:solidFill>
@@ -4422,7 +4395,7 @@
         <p:spPr>
           <a:xfrm>
             <a:off x="0" y="0"/>
-            <a:ext cx="14629680" cy="8228880"/>
+            <a:ext cx="14629320" cy="8228520"/>
           </a:xfrm>
           <a:prstGeom prst="rect">
             <a:avLst/>
@@ -4468,7 +4441,7 @@
         <p:spPr>
           <a:xfrm>
             <a:off x="0" y="0"/>
-            <a:ext cx="14629680" cy="8228880"/>
+            <a:ext cx="14629320" cy="8228520"/>
           </a:xfrm>
           <a:prstGeom prst="rect">
             <a:avLst/>
@@ -4543,25 +4516,7 @@
                 </a:solidFill>
                 <a:latin typeface="Arial"/>
               </a:rPr>
-              <a:t>Click to edit </a:t>
-            </a:r>
-            <a:r>
-              <a:rPr b="0" lang="en-US" sz="4400" spc="-1" strike="noStrike">
-                <a:solidFill>
-                  <a:srgbClr val="000000"/>
-                </a:solidFill>
-                <a:latin typeface="Arial"/>
-              </a:rPr>
-              <a:t>the title text </a:t>
-            </a:r>
-            <a:r>
-              <a:rPr b="0" lang="en-US" sz="4400" spc="-1" strike="noStrike">
-                <a:solidFill>
-                  <a:srgbClr val="000000"/>
-                </a:solidFill>
-                <a:latin typeface="Arial"/>
-              </a:rPr>
-              <a:t>format</a:t>
+              <a:t>Click to edit the title text format</a:t>
             </a:r>
             <a:endParaRPr b="0" lang="en-US" sz="4400" spc="-1" strike="noStrike">
               <a:solidFill>
@@ -4832,7 +4787,7 @@
         <p:spPr>
           <a:xfrm>
             <a:off x="0" y="0"/>
-            <a:ext cx="14629680" cy="8228880"/>
+            <a:ext cx="14629320" cy="8228520"/>
           </a:xfrm>
           <a:prstGeom prst="rect">
             <a:avLst/>
@@ -4878,7 +4833,7 @@
         <p:spPr>
           <a:xfrm>
             <a:off x="0" y="0"/>
-            <a:ext cx="14629680" cy="8228880"/>
+            <a:ext cx="14629320" cy="8228520"/>
           </a:xfrm>
           <a:prstGeom prst="rect">
             <a:avLst/>
@@ -4953,16 +4908,7 @@
                 </a:solidFill>
                 <a:latin typeface="Arial"/>
               </a:rPr>
-              <a:t>Click to edit the </a:t>
-            </a:r>
-            <a:r>
-              <a:rPr b="0" lang="en-US" sz="4400" spc="-1" strike="noStrike">
-                <a:solidFill>
-                  <a:srgbClr val="000000"/>
-                </a:solidFill>
-                <a:latin typeface="Arial"/>
-              </a:rPr>
-              <a:t>title text format</a:t>
+              <a:t>Click to edit the title text format</a:t>
             </a:r>
             <a:endParaRPr b="0" lang="en-US" sz="4400" spc="-1" strike="noStrike">
               <a:solidFill>
@@ -5233,7 +5179,7 @@
         <p:spPr>
           <a:xfrm>
             <a:off x="0" y="0"/>
-            <a:ext cx="14629680" cy="8228880"/>
+            <a:ext cx="14629320" cy="8228520"/>
           </a:xfrm>
           <a:prstGeom prst="rect">
             <a:avLst/>
@@ -5279,7 +5225,7 @@
         <p:spPr>
           <a:xfrm>
             <a:off x="0" y="0"/>
-            <a:ext cx="14629680" cy="8228880"/>
+            <a:ext cx="14629320" cy="8228520"/>
           </a:xfrm>
           <a:prstGeom prst="rect">
             <a:avLst/>
@@ -5354,34 +5300,7 @@
                 </a:solidFill>
                 <a:latin typeface="Arial"/>
               </a:rPr>
-              <a:t>Click to </a:t>
-            </a:r>
-            <a:r>
-              <a:rPr b="0" lang="en-US" sz="4400" spc="-1" strike="noStrike">
-                <a:solidFill>
-                  <a:srgbClr val="000000"/>
-                </a:solidFill>
-                <a:latin typeface="Arial"/>
-              </a:rPr>
-              <a:t>edit the </a:t>
-            </a:r>
-            <a:r>
-              <a:rPr b="0" lang="en-US" sz="4400" spc="-1" strike="noStrike">
-                <a:solidFill>
-                  <a:srgbClr val="000000"/>
-                </a:solidFill>
-                <a:latin typeface="Arial"/>
-              </a:rPr>
-              <a:t>title text </a:t>
-            </a:r>
-            <a:r>
-              <a:rPr b="0" lang="en-US" sz="4400" spc="-1" strike="noStrike">
-                <a:solidFill>
-                  <a:srgbClr val="000000"/>
-                </a:solidFill>
-                <a:latin typeface="Arial"/>
-              </a:rPr>
-              <a:t>format</a:t>
+              <a:t>Click to edit the title text format</a:t>
             </a:r>
             <a:endParaRPr b="0" lang="en-US" sz="4400" spc="-1" strike="noStrike">
               <a:solidFill>
@@ -5652,7 +5571,7 @@
         <p:spPr>
           <a:xfrm>
             <a:off x="0" y="0"/>
-            <a:ext cx="14629680" cy="8228880"/>
+            <a:ext cx="14629320" cy="8228520"/>
           </a:xfrm>
           <a:prstGeom prst="rect">
             <a:avLst/>
@@ -5698,7 +5617,7 @@
         <p:spPr>
           <a:xfrm>
             <a:off x="0" y="0"/>
-            <a:ext cx="14629680" cy="8228880"/>
+            <a:ext cx="14629320" cy="8228520"/>
           </a:xfrm>
           <a:prstGeom prst="rect">
             <a:avLst/>
@@ -6044,7 +5963,7 @@
         <p:spPr>
           <a:xfrm>
             <a:off x="0" y="0"/>
-            <a:ext cx="14629680" cy="8228880"/>
+            <a:ext cx="14629320" cy="8228520"/>
           </a:xfrm>
           <a:prstGeom prst="rect">
             <a:avLst/>
@@ -6090,7 +6009,7 @@
         <p:spPr>
           <a:xfrm>
             <a:off x="0" y="0"/>
-            <a:ext cx="14629680" cy="8228880"/>
+            <a:ext cx="14629320" cy="8228520"/>
           </a:xfrm>
           <a:prstGeom prst="rect">
             <a:avLst/>
@@ -6436,7 +6355,7 @@
         <p:spPr>
           <a:xfrm>
             <a:off x="0" y="0"/>
-            <a:ext cx="14629680" cy="8228880"/>
+            <a:ext cx="14629320" cy="8228520"/>
           </a:xfrm>
           <a:prstGeom prst="rect">
             <a:avLst/>
@@ -6482,7 +6401,7 @@
         <p:spPr>
           <a:xfrm>
             <a:off x="0" y="0"/>
-            <a:ext cx="14629680" cy="8228880"/>
+            <a:ext cx="14629320" cy="8228520"/>
           </a:xfrm>
           <a:prstGeom prst="rect">
             <a:avLst/>
@@ -6557,16 +6476,7 @@
                 </a:solidFill>
                 <a:latin typeface="Arial"/>
               </a:rPr>
-              <a:t>Click to edit the </a:t>
-            </a:r>
-            <a:r>
-              <a:rPr b="0" lang="en-US" sz="4400" spc="-1" strike="noStrike">
-                <a:solidFill>
-                  <a:srgbClr val="000000"/>
-                </a:solidFill>
-                <a:latin typeface="Arial"/>
-              </a:rPr>
-              <a:t>title text format</a:t>
+              <a:t>Click to edit the title text format</a:t>
             </a:r>
             <a:endParaRPr b="0" lang="en-US" sz="4400" spc="-1" strike="noStrike">
               <a:solidFill>
@@ -6841,7 +6751,7 @@
         <p:spPr>
           <a:xfrm>
             <a:off x="0" y="0"/>
-            <a:ext cx="5485680" cy="8228880"/>
+            <a:ext cx="5485320" cy="8228520"/>
           </a:xfrm>
           <a:prstGeom prst="rect">
             <a:avLst/>
@@ -6860,7 +6770,7 @@
         <p:spPr>
           <a:xfrm>
             <a:off x="6350040" y="2223360"/>
-            <a:ext cx="7415640" cy="1839960"/>
+            <a:ext cx="7415280" cy="1839600"/>
           </a:xfrm>
           <a:prstGeom prst="rect">
             <a:avLst/>
@@ -6917,7 +6827,7 @@
         <p:spPr>
           <a:xfrm>
             <a:off x="6350040" y="4387680"/>
-            <a:ext cx="7415640" cy="971280"/>
+            <a:ext cx="7415280" cy="970920"/>
           </a:xfrm>
           <a:prstGeom prst="rect">
             <a:avLst/>
@@ -6974,7 +6884,7 @@
         <p:spPr>
           <a:xfrm>
             <a:off x="6458040" y="5602320"/>
-            <a:ext cx="1992960" cy="403200"/>
+            <a:ext cx="1992600" cy="402840"/>
           </a:xfrm>
           <a:prstGeom prst="roundRect">
             <a:avLst>
@@ -7023,7 +6933,7 @@
         <p:spPr>
           <a:xfrm>
             <a:off x="6487200" y="5675040"/>
-            <a:ext cx="1718640" cy="258480"/>
+            <a:ext cx="1718280" cy="258120"/>
           </a:xfrm>
           <a:prstGeom prst="rect">
             <a:avLst/>
@@ -7114,7 +7024,7 @@
         <p:spPr>
           <a:xfrm>
             <a:off x="0" y="0"/>
-            <a:ext cx="5485680" cy="8228880"/>
+            <a:ext cx="5485320" cy="8228520"/>
           </a:xfrm>
           <a:prstGeom prst="rect">
             <a:avLst/>
@@ -7133,7 +7043,7 @@
         <p:spPr>
           <a:xfrm>
             <a:off x="6341400" y="594000"/>
-            <a:ext cx="6566400" cy="606600"/>
+            <a:ext cx="6566040" cy="606240"/>
           </a:xfrm>
           <a:prstGeom prst="rect">
             <a:avLst/>
@@ -7190,7 +7100,7 @@
         <p:spPr>
           <a:xfrm>
             <a:off x="6341400" y="1230840"/>
-            <a:ext cx="7432920" cy="956520"/>
+            <a:ext cx="7432560" cy="956160"/>
           </a:xfrm>
           <a:prstGeom prst="rect">
             <a:avLst/>
@@ -7247,7 +7157,7 @@
         <p:spPr>
           <a:xfrm>
             <a:off x="6341400" y="2714040"/>
-            <a:ext cx="3610440" cy="3144240"/>
+            <a:ext cx="3610080" cy="3143880"/>
           </a:xfrm>
           <a:prstGeom prst="roundRect">
             <a:avLst>
@@ -7298,7 +7208,7 @@
         <p:spPr>
           <a:xfrm>
             <a:off x="6585840" y="2958480"/>
-            <a:ext cx="2675520" cy="310680"/>
+            <a:ext cx="2675160" cy="310320"/>
           </a:xfrm>
           <a:prstGeom prst="rect">
             <a:avLst/>
@@ -7375,7 +7285,7 @@
         <p:spPr>
           <a:xfrm>
             <a:off x="6585840" y="3396600"/>
-            <a:ext cx="3121920" cy="1594800"/>
+            <a:ext cx="3121560" cy="1594440"/>
           </a:xfrm>
           <a:prstGeom prst="rect">
             <a:avLst/>
@@ -7412,7 +7322,7 @@
                 <a:latin typeface="Source Sans 3"/>
                 <a:ea typeface="Source Sans 3"/>
               </a:rPr>
-              <a:t>Əməkdaşların ən böyük narahatlığı budur. Açıq ünsiyyət, şəffaflıq və "botlar işlərimi əlimdən alır" deyil, "botlar məni azad edir" mesajı vacibdir.</a:t>
+              <a:t>Əməkdaşların ən böyük narahatlığı budur. Açıq ünsiyyət, şəffaflıq və "botlar işimi ələ keçirir" əvəzinə "botlar məni azad edir" anlayışı ən vacib məsələlərdir.</a:t>
             </a:r>
             <a:endParaRPr b="0" lang="en-US" sz="1650" spc="-1" strike="noStrike">
               <a:solidFill>
@@ -7432,7 +7342,7 @@
         <p:spPr>
           <a:xfrm>
             <a:off x="10164240" y="2714040"/>
-            <a:ext cx="3610440" cy="3144240"/>
+            <a:ext cx="3610080" cy="3143880"/>
           </a:xfrm>
           <a:prstGeom prst="roundRect">
             <a:avLst>
@@ -7482,8 +7392,8 @@
         </p:nvSpPr>
         <p:spPr>
           <a:xfrm>
-            <a:off x="10408320" y="2958480"/>
-            <a:ext cx="3121920" cy="614520"/>
+            <a:off x="10408320" y="2814480"/>
+            <a:ext cx="3121560" cy="614160"/>
           </a:xfrm>
           <a:prstGeom prst="rect">
             <a:avLst/>
@@ -7559,8 +7469,8 @@
         </p:nvSpPr>
         <p:spPr>
           <a:xfrm>
-            <a:off x="10408320" y="3700440"/>
-            <a:ext cx="3121920" cy="1913760"/>
+            <a:off x="10408320" y="3448440"/>
+            <a:ext cx="3121560" cy="1913400"/>
           </a:xfrm>
           <a:prstGeom prst="rect">
             <a:avLst/>
@@ -7617,7 +7527,7 @@
         <p:spPr>
           <a:xfrm>
             <a:off x="6341400" y="6070680"/>
-            <a:ext cx="7432920" cy="1564200"/>
+            <a:ext cx="7432560" cy="1563840"/>
           </a:xfrm>
           <a:prstGeom prst="roundRect">
             <a:avLst>
@@ -7668,7 +7578,7 @@
         <p:spPr>
           <a:xfrm>
             <a:off x="6585840" y="6314760"/>
-            <a:ext cx="2928600" cy="310680"/>
+            <a:ext cx="2928240" cy="310320"/>
           </a:xfrm>
           <a:prstGeom prst="rect">
             <a:avLst/>
@@ -7745,7 +7655,7 @@
         <p:spPr>
           <a:xfrm>
             <a:off x="6585840" y="6753240"/>
-            <a:ext cx="6944760" cy="637560"/>
+            <a:ext cx="6944400" cy="637200"/>
           </a:xfrm>
           <a:prstGeom prst="rect">
             <a:avLst/>
@@ -7832,7 +7742,7 @@
         <p:spPr>
           <a:xfrm>
             <a:off x="820440" y="804600"/>
-            <a:ext cx="4661640" cy="582120"/>
+            <a:ext cx="4661280" cy="581760"/>
           </a:xfrm>
           <a:prstGeom prst="rect">
             <a:avLst/>
@@ -7889,7 +7799,7 @@
         <p:spPr>
           <a:xfrm>
             <a:off x="820440" y="1776960"/>
-            <a:ext cx="12988440" cy="299160"/>
+            <a:ext cx="12988080" cy="298800"/>
           </a:xfrm>
           <a:prstGeom prst="rect">
             <a:avLst/>
@@ -7946,7 +7856,7 @@
         <p:spPr>
           <a:xfrm>
             <a:off x="1128240" y="2515320"/>
-            <a:ext cx="12681000" cy="599040"/>
+            <a:ext cx="12680640" cy="598680"/>
           </a:xfrm>
           <a:prstGeom prst="rect">
             <a:avLst/>
@@ -8023,7 +7933,7 @@
         <p:spPr>
           <a:xfrm>
             <a:off x="820440" y="2296080"/>
-            <a:ext cx="22320" cy="1037520"/>
+            <a:ext cx="21960" cy="1037160"/>
           </a:xfrm>
           <a:prstGeom prst="rect">
             <a:avLst/>
@@ -8073,7 +7983,7 @@
         <p:spPr>
           <a:xfrm>
             <a:off x="820440" y="3553560"/>
-            <a:ext cx="4329000" cy="819720"/>
+            <a:ext cx="4328640" cy="819360"/>
           </a:xfrm>
           <a:prstGeom prst="rect">
             <a:avLst/>
@@ -8092,7 +8002,7 @@
         <p:spPr>
           <a:xfrm>
             <a:off x="1025640" y="4568760"/>
-            <a:ext cx="2749680" cy="290520"/>
+            <a:ext cx="2749320" cy="290160"/>
           </a:xfrm>
           <a:prstGeom prst="rect">
             <a:avLst/>
@@ -8149,7 +8059,7 @@
         <p:spPr>
           <a:xfrm>
             <a:off x="1025640" y="4977000"/>
-            <a:ext cx="3918600" cy="898920"/>
+            <a:ext cx="3918240" cy="898560"/>
           </a:xfrm>
           <a:prstGeom prst="rect">
             <a:avLst/>
@@ -8210,7 +8120,7 @@
         <p:spPr>
           <a:xfrm>
             <a:off x="5150160" y="3553560"/>
-            <a:ext cx="4329000" cy="819720"/>
+            <a:ext cx="4328640" cy="819360"/>
           </a:xfrm>
           <a:prstGeom prst="rect">
             <a:avLst/>
@@ -8229,7 +8139,7 @@
         <p:spPr>
           <a:xfrm>
             <a:off x="5355360" y="4568760"/>
-            <a:ext cx="3082320" cy="290520"/>
+            <a:ext cx="3081960" cy="290160"/>
           </a:xfrm>
           <a:prstGeom prst="rect">
             <a:avLst/>
@@ -8286,7 +8196,7 @@
         <p:spPr>
           <a:xfrm>
             <a:off x="5355360" y="4977000"/>
-            <a:ext cx="3918600" cy="1198800"/>
+            <a:ext cx="3918240" cy="1198440"/>
           </a:xfrm>
           <a:prstGeom prst="rect">
             <a:avLst/>
@@ -8347,7 +8257,7 @@
         <p:spPr>
           <a:xfrm>
             <a:off x="9479880" y="3553560"/>
-            <a:ext cx="4329000" cy="819720"/>
+            <a:ext cx="4328640" cy="819360"/>
           </a:xfrm>
           <a:prstGeom prst="rect">
             <a:avLst/>
@@ -8366,7 +8276,7 @@
         <p:spPr>
           <a:xfrm>
             <a:off x="9685080" y="4568760"/>
-            <a:ext cx="3188880" cy="290520"/>
+            <a:ext cx="3188520" cy="290160"/>
           </a:xfrm>
           <a:prstGeom prst="rect">
             <a:avLst/>
@@ -8423,7 +8333,7 @@
         <p:spPr>
           <a:xfrm>
             <a:off x="9685080" y="4977000"/>
-            <a:ext cx="3918600" cy="898920"/>
+            <a:ext cx="3918240" cy="898560"/>
           </a:xfrm>
           <a:prstGeom prst="rect">
             <a:avLst/>
@@ -8480,7 +8390,7 @@
         <p:spPr>
           <a:xfrm>
             <a:off x="820440" y="6601320"/>
-            <a:ext cx="12988440" cy="822960"/>
+            <a:ext cx="12988080" cy="822600"/>
           </a:xfrm>
           <a:prstGeom prst="roundRect">
             <a:avLst>
@@ -8532,7 +8442,7 @@
         <p:spPr>
           <a:xfrm>
             <a:off x="1025640" y="6891480"/>
-            <a:ext cx="255600" cy="204480"/>
+            <a:ext cx="255240" cy="204120"/>
           </a:xfrm>
           <a:prstGeom prst="rect">
             <a:avLst/>
@@ -8551,7 +8461,7 @@
         <p:spPr>
           <a:xfrm>
             <a:off x="1487160" y="6847200"/>
-            <a:ext cx="12116880" cy="299160"/>
+            <a:ext cx="12116520" cy="298800"/>
           </a:xfrm>
           <a:prstGeom prst="rect">
             <a:avLst/>
@@ -8652,13 +8562,13 @@
       <p:sp>
         <p:nvSpPr>
           <p:cNvPr id="185" name=""/>
-          <p:cNvSpPr txBox="1"/>
+          <p:cNvSpPr/>
           <p:nvPr/>
         </p:nvSpPr>
         <p:spPr>
           <a:xfrm>
             <a:off x="5029200" y="84600"/>
-            <a:ext cx="3151080" cy="601200"/>
+            <a:ext cx="3150720" cy="600840"/>
           </a:xfrm>
           <a:prstGeom prst="rect">
             <a:avLst/>
@@ -8668,11 +8578,22 @@
             <a:noFill/>
           </a:ln>
         </p:spPr>
+        <p:style>
+          <a:lnRef idx="0"/>
+          <a:fillRef idx="0"/>
+          <a:effectRef idx="0"/>
+          <a:fontRef idx="minor"/>
+        </p:style>
         <p:txBody>
           <a:bodyPr lIns="90000" rIns="90000" tIns="45000" bIns="45000" anchor="t">
             <a:noAutofit/>
           </a:bodyPr>
           <a:p>
+            <a:pPr>
+              <a:lnSpc>
+                <a:spcPct val="100000"/>
+              </a:lnSpc>
+            </a:pPr>
             <a:r>
               <a:rPr b="1" lang="en-US" sz="2950" spc="-1" strike="noStrike">
                 <a:solidFill>
@@ -8705,7 +8626,7 @@
         <p:spPr>
           <a:xfrm>
             <a:off x="2971800" y="685800"/>
-            <a:ext cx="7275960" cy="7275960"/>
+            <a:ext cx="7275600" cy="7275600"/>
           </a:xfrm>
           <a:prstGeom prst="rect">
             <a:avLst/>
@@ -8754,7 +8675,7 @@
         <p:spPr>
           <a:xfrm>
             <a:off x="863640" y="1287360"/>
-            <a:ext cx="6845760" cy="612720"/>
+            <a:ext cx="6845400" cy="612360"/>
           </a:xfrm>
           <a:prstGeom prst="rect">
             <a:avLst/>
@@ -8811,7 +8732,7 @@
         <p:spPr>
           <a:xfrm>
             <a:off x="863640" y="2332800"/>
-            <a:ext cx="12902040" cy="647280"/>
+            <a:ext cx="12901680" cy="646920"/>
           </a:xfrm>
           <a:prstGeom prst="rect">
             <a:avLst/>
@@ -8888,7 +8809,7 @@
         <p:spPr>
           <a:xfrm>
             <a:off x="863640" y="3223440"/>
-            <a:ext cx="215280" cy="269280"/>
+            <a:ext cx="214920" cy="268920"/>
           </a:xfrm>
           <a:prstGeom prst="rect">
             <a:avLst/>
@@ -8945,7 +8866,7 @@
         <p:spPr>
           <a:xfrm>
             <a:off x="863640" y="3560040"/>
-            <a:ext cx="6342840" cy="29880"/>
+            <a:ext cx="6342480" cy="29520"/>
           </a:xfrm>
           <a:prstGeom prst="rect">
             <a:avLst/>
@@ -8991,7 +8912,7 @@
         <p:spPr>
           <a:xfrm>
             <a:off x="863640" y="3728880"/>
-            <a:ext cx="2453400" cy="306000"/>
+            <a:ext cx="2453040" cy="305640"/>
           </a:xfrm>
           <a:prstGeom prst="rect">
             <a:avLst/>
@@ -9048,7 +8969,7 @@
         <p:spPr>
           <a:xfrm>
             <a:off x="863640" y="4165200"/>
-            <a:ext cx="6342840" cy="647280"/>
+            <a:ext cx="6342480" cy="646920"/>
           </a:xfrm>
           <a:prstGeom prst="rect">
             <a:avLst/>
@@ -9105,7 +9026,7 @@
         <p:spPr>
           <a:xfrm>
             <a:off x="7423200" y="3223440"/>
-            <a:ext cx="215280" cy="269280"/>
+            <a:ext cx="214920" cy="268920"/>
           </a:xfrm>
           <a:prstGeom prst="rect">
             <a:avLst/>
@@ -9162,7 +9083,7 @@
         <p:spPr>
           <a:xfrm>
             <a:off x="7423200" y="3560040"/>
-            <a:ext cx="6342840" cy="29880"/>
+            <a:ext cx="6342480" cy="29520"/>
           </a:xfrm>
           <a:prstGeom prst="rect">
             <a:avLst/>
@@ -9208,7 +9129,7 @@
         <p:spPr>
           <a:xfrm>
             <a:off x="7423200" y="3728880"/>
-            <a:ext cx="4632840" cy="306000"/>
+            <a:ext cx="4632480" cy="305640"/>
           </a:xfrm>
           <a:prstGeom prst="rect">
             <a:avLst/>
@@ -9265,7 +9186,7 @@
         <p:spPr>
           <a:xfrm>
             <a:off x="7423200" y="4165200"/>
-            <a:ext cx="6342840" cy="647280"/>
+            <a:ext cx="6342480" cy="646920"/>
           </a:xfrm>
           <a:prstGeom prst="rect">
             <a:avLst/>
@@ -9322,7 +9243,7 @@
         <p:spPr>
           <a:xfrm>
             <a:off x="863640" y="5190840"/>
-            <a:ext cx="215280" cy="269280"/>
+            <a:ext cx="214920" cy="268920"/>
           </a:xfrm>
           <a:prstGeom prst="rect">
             <a:avLst/>
@@ -9379,7 +9300,7 @@
         <p:spPr>
           <a:xfrm>
             <a:off x="863640" y="5527080"/>
-            <a:ext cx="6342840" cy="29880"/>
+            <a:ext cx="6342480" cy="29520"/>
           </a:xfrm>
           <a:prstGeom prst="rect">
             <a:avLst/>
@@ -9425,7 +9346,7 @@
         <p:spPr>
           <a:xfrm>
             <a:off x="863640" y="5695920"/>
-            <a:ext cx="2453400" cy="306000"/>
+            <a:ext cx="2453040" cy="305640"/>
           </a:xfrm>
           <a:prstGeom prst="rect">
             <a:avLst/>
@@ -9482,7 +9403,7 @@
         <p:spPr>
           <a:xfrm>
             <a:off x="863640" y="6132240"/>
-            <a:ext cx="6342840" cy="647280"/>
+            <a:ext cx="6342480" cy="646920"/>
           </a:xfrm>
           <a:prstGeom prst="rect">
             <a:avLst/>
@@ -9539,7 +9460,7 @@
         <p:spPr>
           <a:xfrm>
             <a:off x="7423200" y="5190840"/>
-            <a:ext cx="215280" cy="269280"/>
+            <a:ext cx="214920" cy="268920"/>
           </a:xfrm>
           <a:prstGeom prst="rect">
             <a:avLst/>
@@ -9596,7 +9517,7 @@
         <p:spPr>
           <a:xfrm>
             <a:off x="7423200" y="5527080"/>
-            <a:ext cx="6342840" cy="29880"/>
+            <a:ext cx="6342480" cy="29520"/>
           </a:xfrm>
           <a:prstGeom prst="rect">
             <a:avLst/>
@@ -9642,7 +9563,7 @@
         <p:spPr>
           <a:xfrm>
             <a:off x="7423200" y="5695920"/>
-            <a:ext cx="2453400" cy="306000"/>
+            <a:ext cx="2453040" cy="305640"/>
           </a:xfrm>
           <a:prstGeom prst="rect">
             <a:avLst/>
@@ -9699,7 +9620,7 @@
         <p:spPr>
           <a:xfrm>
             <a:off x="7423200" y="6132240"/>
-            <a:ext cx="6342840" cy="647280"/>
+            <a:ext cx="6342480" cy="646920"/>
           </a:xfrm>
           <a:prstGeom prst="rect">
             <a:avLst/>
@@ -9790,7 +9711,7 @@
         <p:spPr>
           <a:xfrm>
             <a:off x="9144000" y="0"/>
-            <a:ext cx="5485680" cy="8228880"/>
+            <a:ext cx="5485320" cy="8228520"/>
           </a:xfrm>
           <a:prstGeom prst="rect">
             <a:avLst/>
@@ -9809,7 +9730,7 @@
         <p:spPr>
           <a:xfrm>
             <a:off x="863640" y="775440"/>
-            <a:ext cx="4907880" cy="612720"/>
+            <a:ext cx="4907520" cy="612360"/>
           </a:xfrm>
           <a:prstGeom prst="rect">
             <a:avLst/>
@@ -9866,7 +9787,7 @@
         <p:spPr>
           <a:xfrm>
             <a:off x="863640" y="1424880"/>
-            <a:ext cx="7415640" cy="1295280"/>
+            <a:ext cx="7415280" cy="1294920"/>
           </a:xfrm>
           <a:prstGeom prst="rect">
             <a:avLst/>
@@ -9933,7 +9854,7 @@
         <p:spPr>
           <a:xfrm>
             <a:off x="863640" y="3251880"/>
-            <a:ext cx="3599640" cy="2469960"/>
+            <a:ext cx="3599280" cy="2469600"/>
           </a:xfrm>
           <a:prstGeom prst="roundRect">
             <a:avLst>
@@ -9981,7 +9902,7 @@
         <p:spPr>
           <a:xfrm>
             <a:off x="1079640" y="3467520"/>
-            <a:ext cx="2453400" cy="306000"/>
+            <a:ext cx="2453040" cy="305640"/>
           </a:xfrm>
           <a:prstGeom prst="rect">
             <a:avLst/>
@@ -10058,7 +9979,7 @@
         <p:spPr>
           <a:xfrm>
             <a:off x="1079640" y="3903840"/>
-            <a:ext cx="3167640" cy="1295280"/>
+            <a:ext cx="3167280" cy="1294920"/>
           </a:xfrm>
           <a:prstGeom prst="rect">
             <a:avLst/>
@@ -10115,7 +10036,7 @@
         <p:spPr>
           <a:xfrm>
             <a:off x="4680000" y="3251880"/>
-            <a:ext cx="3599640" cy="2469960"/>
+            <a:ext cx="3599280" cy="2469600"/>
           </a:xfrm>
           <a:prstGeom prst="roundRect">
             <a:avLst>
@@ -10163,7 +10084,7 @@
         <p:spPr>
           <a:xfrm>
             <a:off x="4895640" y="3467520"/>
-            <a:ext cx="3168000" cy="612720"/>
+            <a:ext cx="3167640" cy="612360"/>
           </a:xfrm>
           <a:prstGeom prst="rect">
             <a:avLst/>
@@ -10240,7 +10161,7 @@
         <p:spPr>
           <a:xfrm>
             <a:off x="4895640" y="4210560"/>
-            <a:ext cx="3168000" cy="1295280"/>
+            <a:ext cx="3167640" cy="1294920"/>
           </a:xfrm>
           <a:prstGeom prst="rect">
             <a:avLst/>
@@ -10297,7 +10218,7 @@
         <p:spPr>
           <a:xfrm>
             <a:off x="863640" y="5938200"/>
-            <a:ext cx="7415640" cy="1515240"/>
+            <a:ext cx="7415280" cy="1514880"/>
           </a:xfrm>
           <a:prstGeom prst="roundRect">
             <a:avLst>
@@ -10345,7 +10266,7 @@
         <p:spPr>
           <a:xfrm>
             <a:off x="1079640" y="6153840"/>
-            <a:ext cx="2453400" cy="306000"/>
+            <a:ext cx="2453040" cy="305640"/>
           </a:xfrm>
           <a:prstGeom prst="rect">
             <a:avLst/>
@@ -10422,7 +10343,7 @@
         <p:spPr>
           <a:xfrm>
             <a:off x="1079640" y="6590160"/>
-            <a:ext cx="6984000" cy="647280"/>
+            <a:ext cx="6983640" cy="646920"/>
           </a:xfrm>
           <a:prstGeom prst="rect">
             <a:avLst/>
@@ -10509,7 +10430,7 @@
         <p:spPr>
           <a:xfrm>
             <a:off x="863640" y="1557000"/>
-            <a:ext cx="8353440" cy="612720"/>
+            <a:ext cx="8353080" cy="612360"/>
           </a:xfrm>
           <a:prstGeom prst="rect">
             <a:avLst/>
@@ -10566,7 +10487,7 @@
         <p:spPr>
           <a:xfrm>
             <a:off x="863640" y="2602440"/>
-            <a:ext cx="12902040" cy="647280"/>
+            <a:ext cx="12901680" cy="646920"/>
           </a:xfrm>
           <a:prstGeom prst="rect">
             <a:avLst/>
@@ -10623,7 +10544,7 @@
         <p:spPr>
           <a:xfrm>
             <a:off x="863640" y="3493080"/>
-            <a:ext cx="4156200" cy="3178800"/>
+            <a:ext cx="4155840" cy="3178440"/>
           </a:xfrm>
           <a:prstGeom prst="roundRect">
             <a:avLst>
@@ -10674,7 +10595,7 @@
         <p:spPr>
           <a:xfrm>
             <a:off x="833400" y="3493080"/>
-            <a:ext cx="121320" cy="3178800"/>
+            <a:ext cx="120960" cy="3178440"/>
           </a:xfrm>
           <a:prstGeom prst="roundRect">
             <a:avLst>
@@ -10722,7 +10643,7 @@
         <p:spPr>
           <a:xfrm>
             <a:off x="1201680" y="3703680"/>
-            <a:ext cx="3572280" cy="612720"/>
+            <a:ext cx="3571920" cy="612360"/>
           </a:xfrm>
           <a:prstGeom prst="rect">
             <a:avLst/>
@@ -10799,7 +10720,7 @@
         <p:spPr>
           <a:xfrm>
             <a:off x="1201680" y="4338360"/>
-            <a:ext cx="3572280" cy="1942920"/>
+            <a:ext cx="3571920" cy="1942560"/>
           </a:xfrm>
           <a:prstGeom prst="rect">
             <a:avLst/>
@@ -10856,7 +10777,7 @@
         <p:spPr>
           <a:xfrm>
             <a:off x="5236560" y="3493080"/>
-            <a:ext cx="4156200" cy="3178800"/>
+            <a:ext cx="4155840" cy="3178440"/>
           </a:xfrm>
           <a:prstGeom prst="roundRect">
             <a:avLst>
@@ -10907,7 +10828,7 @@
         <p:spPr>
           <a:xfrm>
             <a:off x="5205960" y="3493080"/>
-            <a:ext cx="121320" cy="3178800"/>
+            <a:ext cx="120960" cy="3178440"/>
           </a:xfrm>
           <a:prstGeom prst="roundRect">
             <a:avLst>
@@ -10955,7 +10876,7 @@
         <p:spPr>
           <a:xfrm>
             <a:off x="5574240" y="3739680"/>
-            <a:ext cx="3572280" cy="612720"/>
+            <a:ext cx="3571920" cy="612360"/>
           </a:xfrm>
           <a:prstGeom prst="rect">
             <a:avLst/>
@@ -11032,7 +10953,7 @@
         <p:spPr>
           <a:xfrm>
             <a:off x="5574240" y="4482360"/>
-            <a:ext cx="3572280" cy="1619280"/>
+            <a:ext cx="3571920" cy="1618920"/>
           </a:xfrm>
           <a:prstGeom prst="rect">
             <a:avLst/>
@@ -11089,7 +11010,7 @@
         <p:spPr>
           <a:xfrm>
             <a:off x="9609480" y="3493080"/>
-            <a:ext cx="4156200" cy="3178800"/>
+            <a:ext cx="4155840" cy="3178440"/>
           </a:xfrm>
           <a:prstGeom prst="roundRect">
             <a:avLst>
@@ -11140,7 +11061,7 @@
         <p:spPr>
           <a:xfrm>
             <a:off x="9578880" y="3493080"/>
-            <a:ext cx="121320" cy="3178800"/>
+            <a:ext cx="120960" cy="3178440"/>
           </a:xfrm>
           <a:prstGeom prst="roundRect">
             <a:avLst>
@@ -11188,7 +11109,7 @@
         <p:spPr>
           <a:xfrm>
             <a:off x="9947160" y="3739680"/>
-            <a:ext cx="3572280" cy="612720"/>
+            <a:ext cx="3571920" cy="612360"/>
           </a:xfrm>
           <a:prstGeom prst="rect">
             <a:avLst/>
@@ -11265,7 +11186,7 @@
         <p:spPr>
           <a:xfrm>
             <a:off x="9947160" y="4482360"/>
-            <a:ext cx="3572280" cy="1295280"/>
+            <a:ext cx="3571920" cy="1294920"/>
           </a:xfrm>
           <a:prstGeom prst="rect">
             <a:avLst/>
@@ -11356,7 +11277,7 @@
         <p:spPr>
           <a:xfrm>
             <a:off x="0" y="0"/>
-            <a:ext cx="5485680" cy="8228880"/>
+            <a:ext cx="5485320" cy="8228520"/>
           </a:xfrm>
           <a:prstGeom prst="rect">
             <a:avLst/>
@@ -11375,7 +11296,7 @@
         <p:spPr>
           <a:xfrm>
             <a:off x="6309720" y="783720"/>
-            <a:ext cx="7496280" cy="1168920"/>
+            <a:ext cx="7495920" cy="1168560"/>
           </a:xfrm>
           <a:prstGeom prst="rect">
             <a:avLst/>
@@ -11432,7 +11353,7 @@
         <p:spPr>
           <a:xfrm>
             <a:off x="6309720" y="2247480"/>
-            <a:ext cx="7496280" cy="1613160"/>
+            <a:ext cx="7495920" cy="1612800"/>
           </a:xfrm>
           <a:prstGeom prst="rect">
             <a:avLst/>
@@ -11489,7 +11410,7 @@
         <p:spPr>
           <a:xfrm>
             <a:off x="6309720" y="4155840"/>
-            <a:ext cx="7496280" cy="903600"/>
+            <a:ext cx="7495920" cy="903240"/>
           </a:xfrm>
           <a:prstGeom prst="rect">
             <a:avLst/>
@@ -11565,8 +11486,8 @@
         </p:nvSpPr>
         <p:spPr>
           <a:xfrm>
-            <a:off x="6161760" y="5280840"/>
-            <a:ext cx="3793320" cy="2262600"/>
+            <a:off x="6233760" y="5280840"/>
+            <a:ext cx="3792960" cy="2262240"/>
           </a:xfrm>
           <a:prstGeom prst="roundRect">
             <a:avLst>
@@ -11614,7 +11535,7 @@
         <p:spPr>
           <a:xfrm>
             <a:off x="6367320" y="5477400"/>
-            <a:ext cx="2338560" cy="291600"/>
+            <a:ext cx="2338200" cy="291240"/>
           </a:xfrm>
           <a:prstGeom prst="rect">
             <a:avLst/>
@@ -11671,7 +11592,7 @@
         <p:spPr>
           <a:xfrm>
             <a:off x="6367320" y="5965920"/>
-            <a:ext cx="3381480" cy="1410840"/>
+            <a:ext cx="3587400" cy="1410480"/>
           </a:xfrm>
           <a:prstGeom prst="rect">
             <a:avLst/>
@@ -11814,7 +11735,7 @@
         <p:spPr>
           <a:xfrm>
             <a:off x="10317240" y="5477400"/>
-            <a:ext cx="2338560" cy="291600"/>
+            <a:ext cx="2338200" cy="291240"/>
           </a:xfrm>
           <a:prstGeom prst="rect">
             <a:avLst/>
@@ -11871,7 +11792,7 @@
         <p:spPr>
           <a:xfrm>
             <a:off x="10317240" y="5965920"/>
-            <a:ext cx="3496680" cy="1410840"/>
+            <a:ext cx="3855960" cy="1410480"/>
           </a:xfrm>
           <a:prstGeom prst="rect">
             <a:avLst/>
@@ -12044,7 +11965,7 @@
         <p:spPr>
           <a:xfrm>
             <a:off x="863640" y="1641240"/>
-            <a:ext cx="6262920" cy="612720"/>
+            <a:ext cx="6262560" cy="612360"/>
           </a:xfrm>
           <a:prstGeom prst="rect">
             <a:avLst/>
@@ -12101,7 +12022,7 @@
         <p:spPr>
           <a:xfrm>
             <a:off x="863640" y="2686680"/>
-            <a:ext cx="12902040" cy="647280"/>
+            <a:ext cx="12901680" cy="646920"/>
           </a:xfrm>
           <a:prstGeom prst="rect">
             <a:avLst/>
@@ -12162,7 +12083,7 @@
         <p:spPr>
           <a:xfrm>
             <a:off x="863640" y="3577320"/>
-            <a:ext cx="905760" cy="905760"/>
+            <a:ext cx="905400" cy="905400"/>
           </a:xfrm>
           <a:prstGeom prst="rect">
             <a:avLst/>
@@ -12181,7 +12102,7 @@
         <p:spPr>
           <a:xfrm>
             <a:off x="2040120" y="3577320"/>
-            <a:ext cx="2943720" cy="612720"/>
+            <a:ext cx="2943360" cy="612360"/>
           </a:xfrm>
           <a:prstGeom prst="rect">
             <a:avLst/>
@@ -12238,7 +12159,7 @@
         <p:spPr>
           <a:xfrm>
             <a:off x="2040120" y="4320360"/>
-            <a:ext cx="2943720" cy="2266920"/>
+            <a:ext cx="2943360" cy="2266560"/>
           </a:xfrm>
           <a:prstGeom prst="rect">
             <a:avLst/>
@@ -12329,7 +12250,7 @@
         <p:spPr>
           <a:xfrm>
             <a:off x="5254560" y="3577320"/>
-            <a:ext cx="905760" cy="905760"/>
+            <a:ext cx="905400" cy="905400"/>
           </a:xfrm>
           <a:prstGeom prst="rect">
             <a:avLst/>
@@ -12348,7 +12269,7 @@
         <p:spPr>
           <a:xfrm>
             <a:off x="6431040" y="3577320"/>
-            <a:ext cx="2943720" cy="612720"/>
+            <a:ext cx="2943360" cy="612360"/>
           </a:xfrm>
           <a:prstGeom prst="rect">
             <a:avLst/>
@@ -12405,7 +12326,7 @@
         <p:spPr>
           <a:xfrm>
             <a:off x="6431040" y="4320360"/>
-            <a:ext cx="2943720" cy="1942920"/>
+            <a:ext cx="2943360" cy="1942560"/>
           </a:xfrm>
           <a:prstGeom prst="rect">
             <a:avLst/>
@@ -12466,7 +12387,7 @@
         <p:spPr>
           <a:xfrm>
             <a:off x="9645480" y="3577320"/>
-            <a:ext cx="905760" cy="905760"/>
+            <a:ext cx="905400" cy="905400"/>
           </a:xfrm>
           <a:prstGeom prst="rect">
             <a:avLst/>
@@ -12485,7 +12406,7 @@
         <p:spPr>
           <a:xfrm>
             <a:off x="10821960" y="3577320"/>
-            <a:ext cx="2943720" cy="612720"/>
+            <a:ext cx="2943360" cy="612360"/>
           </a:xfrm>
           <a:prstGeom prst="rect">
             <a:avLst/>
@@ -12542,7 +12463,7 @@
         <p:spPr>
           <a:xfrm>
             <a:off x="10821960" y="4320360"/>
-            <a:ext cx="2943720" cy="1942920"/>
+            <a:ext cx="2943360" cy="1942560"/>
           </a:xfrm>
           <a:prstGeom prst="rect">
             <a:avLst/>
@@ -12629,7 +12550,7 @@
         <p:spPr>
           <a:xfrm>
             <a:off x="863640" y="1684440"/>
-            <a:ext cx="6903000" cy="612720"/>
+            <a:ext cx="6902640" cy="612360"/>
           </a:xfrm>
           <a:prstGeom prst="rect">
             <a:avLst/>
@@ -12686,7 +12607,7 @@
         <p:spPr>
           <a:xfrm>
             <a:off x="431640" y="2621880"/>
-            <a:ext cx="12902040" cy="323280"/>
+            <a:ext cx="12901680" cy="322920"/>
           </a:xfrm>
           <a:prstGeom prst="rect">
             <a:avLst/>
@@ -12753,7 +12674,7 @@
         <p:spPr>
           <a:xfrm>
             <a:off x="863640" y="3296880"/>
-            <a:ext cx="539280" cy="539280"/>
+            <a:ext cx="538920" cy="538920"/>
           </a:xfrm>
           <a:prstGeom prst="rect">
             <a:avLst/>
@@ -12772,7 +12693,7 @@
         <p:spPr>
           <a:xfrm>
             <a:off x="1673640" y="3296880"/>
-            <a:ext cx="3909600" cy="306000"/>
+            <a:ext cx="3909240" cy="305640"/>
           </a:xfrm>
           <a:prstGeom prst="rect">
             <a:avLst/>
@@ -12829,7 +12750,7 @@
         <p:spPr>
           <a:xfrm>
             <a:off x="1673640" y="3733200"/>
-            <a:ext cx="5505840" cy="971280"/>
+            <a:ext cx="5505480" cy="970920"/>
           </a:xfrm>
           <a:prstGeom prst="rect">
             <a:avLst/>
@@ -12896,7 +12817,7 @@
         <p:spPr>
           <a:xfrm>
             <a:off x="7450200" y="3296880"/>
-            <a:ext cx="539280" cy="539280"/>
+            <a:ext cx="538920" cy="538920"/>
           </a:xfrm>
           <a:prstGeom prst="rect">
             <a:avLst/>
@@ -12915,7 +12836,7 @@
         <p:spPr>
           <a:xfrm>
             <a:off x="8259840" y="3296880"/>
-            <a:ext cx="3069000" cy="306000"/>
+            <a:ext cx="3068640" cy="305640"/>
           </a:xfrm>
           <a:prstGeom prst="rect">
             <a:avLst/>
@@ -12972,7 +12893,7 @@
         <p:spPr>
           <a:xfrm>
             <a:off x="8259840" y="3733200"/>
-            <a:ext cx="5506200" cy="971280"/>
+            <a:ext cx="5505840" cy="970920"/>
           </a:xfrm>
           <a:prstGeom prst="rect">
             <a:avLst/>
@@ -13039,7 +12960,7 @@
         <p:spPr>
           <a:xfrm>
             <a:off x="863640" y="5136840"/>
-            <a:ext cx="539280" cy="539280"/>
+            <a:ext cx="538920" cy="538920"/>
           </a:xfrm>
           <a:prstGeom prst="rect">
             <a:avLst/>
@@ -13058,7 +12979,7 @@
         <p:spPr>
           <a:xfrm>
             <a:off x="1673640" y="5136840"/>
-            <a:ext cx="3441960" cy="306000"/>
+            <a:ext cx="3441600" cy="305640"/>
           </a:xfrm>
           <a:prstGeom prst="rect">
             <a:avLst/>
@@ -13115,7 +13036,7 @@
         <p:spPr>
           <a:xfrm>
             <a:off x="1673640" y="5573160"/>
-            <a:ext cx="5505840" cy="971280"/>
+            <a:ext cx="5505480" cy="970920"/>
           </a:xfrm>
           <a:prstGeom prst="rect">
             <a:avLst/>
@@ -13182,7 +13103,7 @@
         <p:spPr>
           <a:xfrm>
             <a:off x="7450200" y="5136840"/>
-            <a:ext cx="539280" cy="539280"/>
+            <a:ext cx="538920" cy="538920"/>
           </a:xfrm>
           <a:prstGeom prst="rect">
             <a:avLst/>
@@ -13201,7 +13122,7 @@
         <p:spPr>
           <a:xfrm>
             <a:off x="8259840" y="5136840"/>
-            <a:ext cx="3048840" cy="306000"/>
+            <a:ext cx="3048480" cy="305640"/>
           </a:xfrm>
           <a:prstGeom prst="rect">
             <a:avLst/>
@@ -13258,7 +13179,7 @@
         <p:spPr>
           <a:xfrm>
             <a:off x="8259840" y="5573160"/>
-            <a:ext cx="5506200" cy="971280"/>
+            <a:ext cx="5505840" cy="970920"/>
           </a:xfrm>
           <a:prstGeom prst="rect">
             <a:avLst/>
@@ -13345,7 +13266,7 @@
         <p:spPr>
           <a:xfrm>
             <a:off x="783360" y="538560"/>
-            <a:ext cx="5399640" cy="555480"/>
+            <a:ext cx="5399280" cy="555120"/>
           </a:xfrm>
           <a:prstGeom prst="rect">
             <a:avLst/>
@@ -13402,7 +13323,7 @@
         <p:spPr>
           <a:xfrm>
             <a:off x="783360" y="1449720"/>
-            <a:ext cx="13063320" cy="559440"/>
+            <a:ext cx="13062960" cy="559080"/>
           </a:xfrm>
           <a:prstGeom prst="rect">
             <a:avLst/>
@@ -13463,7 +13384,7 @@
         <p:spPr>
           <a:xfrm>
             <a:off x="992520" y="2209320"/>
-            <a:ext cx="12644640" cy="4744440"/>
+            <a:ext cx="12644280" cy="4744080"/>
           </a:xfrm>
           <a:prstGeom prst="rect">
             <a:avLst/>
@@ -13492,7 +13413,7 @@
         <p:spPr>
           <a:xfrm>
             <a:off x="11791800" y="3418200"/>
-            <a:ext cx="652320" cy="652320"/>
+            <a:ext cx="651960" cy="651960"/>
           </a:xfrm>
           <a:prstGeom prst="rect">
             <a:avLst/>
@@ -13511,7 +13432,7 @@
         <p:spPr>
           <a:xfrm>
             <a:off x="11209680" y="5652360"/>
-            <a:ext cx="1906560" cy="667080"/>
+            <a:ext cx="1906200" cy="666720"/>
           </a:xfrm>
           <a:prstGeom prst="rect">
             <a:avLst/>
@@ -13548,7 +13469,7 @@
                 <a:latin typeface="Montserrat Bold"/>
                 <a:ea typeface="Montserrat Bold"/>
               </a:rPr>
-              <a:t>%90 Altı: İncele</a:t>
+              <a:t>90%-dən aşağı: İcmal</a:t>
             </a:r>
             <a:endParaRPr b="0" lang="en-US" sz="2100" spc="-1" strike="noStrike">
               <a:solidFill>
@@ -13578,7 +13499,7 @@
         <p:spPr>
           <a:xfrm>
             <a:off x="9400320" y="3419280"/>
-            <a:ext cx="652320" cy="652320"/>
+            <a:ext cx="651960" cy="651960"/>
           </a:xfrm>
           <a:prstGeom prst="rect">
             <a:avLst/>
@@ -13597,7 +13518,7 @@
         <p:spPr>
           <a:xfrm>
             <a:off x="8805960" y="5652360"/>
-            <a:ext cx="1906560" cy="667080"/>
+            <a:ext cx="1906200" cy="666720"/>
           </a:xfrm>
           <a:prstGeom prst="rect">
             <a:avLst/>
@@ -13634,7 +13555,7 @@
                 <a:latin typeface="Montserrat Bold"/>
                 <a:ea typeface="Montserrat Bold"/>
               </a:rPr>
-              <a:t>%90 Üzeri: Otomatik</a:t>
+              <a:t>90%-dən çox: Avtomatik</a:t>
             </a:r>
             <a:endParaRPr b="0" lang="en-US" sz="2100" spc="-1" strike="noStrike">
               <a:solidFill>
@@ -13664,7 +13585,7 @@
         <p:spPr>
           <a:xfrm>
             <a:off x="7009920" y="3419280"/>
-            <a:ext cx="652320" cy="652320"/>
+            <a:ext cx="651960" cy="651960"/>
           </a:xfrm>
           <a:prstGeom prst="rect">
             <a:avLst/>
@@ -13683,7 +13604,7 @@
         <p:spPr>
           <a:xfrm>
             <a:off x="6415560" y="5652360"/>
-            <a:ext cx="1906560" cy="667080"/>
+            <a:ext cx="1906200" cy="666720"/>
           </a:xfrm>
           <a:prstGeom prst="rect">
             <a:avLst/>
@@ -13720,7 +13641,7 @@
                 <a:latin typeface="Montserrat Bold"/>
                 <a:ea typeface="Montserrat Bold"/>
               </a:rPr>
-              <a:t>Model Güven Skoru</a:t>
+              <a:t>Modelin Etibarlılıq İndikatoru</a:t>
             </a:r>
             <a:endParaRPr b="0" lang="en-US" sz="2100" spc="-1" strike="noStrike">
               <a:solidFill>
@@ -13750,7 +13671,7 @@
         <p:spPr>
           <a:xfrm>
             <a:off x="4619160" y="3419280"/>
-            <a:ext cx="652320" cy="652320"/>
+            <a:ext cx="651960" cy="651960"/>
           </a:xfrm>
           <a:prstGeom prst="rect">
             <a:avLst/>
@@ -13769,7 +13690,7 @@
         <p:spPr>
           <a:xfrm>
             <a:off x="4024800" y="5652360"/>
-            <a:ext cx="1906560" cy="667080"/>
+            <a:ext cx="1906200" cy="666720"/>
           </a:xfrm>
           <a:prstGeom prst="rect">
             <a:avLst/>
@@ -13806,7 +13727,7 @@
                 <a:latin typeface="Montserrat Bold"/>
                 <a:ea typeface="Montserrat Bold"/>
               </a:rPr>
-              <a:t>NLP Sınıflama</a:t>
+              <a:t>NLP Təsnifatı</a:t>
             </a:r>
             <a:endParaRPr b="0" lang="en-US" sz="2100" spc="-1" strike="noStrike">
               <a:solidFill>
@@ -13836,7 +13757,7 @@
         <p:spPr>
           <a:xfrm>
             <a:off x="2215440" y="3419280"/>
-            <a:ext cx="652320" cy="652320"/>
+            <a:ext cx="651960" cy="651960"/>
           </a:xfrm>
           <a:prstGeom prst="rect">
             <a:avLst/>
@@ -13855,7 +13776,7 @@
         <p:spPr>
           <a:xfrm>
             <a:off x="1581840" y="5652360"/>
-            <a:ext cx="1906560" cy="667080"/>
+            <a:ext cx="1906200" cy="666720"/>
           </a:xfrm>
           <a:prstGeom prst="rect">
             <a:avLst/>
@@ -13892,7 +13813,7 @@
                 <a:latin typeface="Montserrat Bold"/>
                 <a:ea typeface="Montserrat Bold"/>
               </a:rPr>
-              <a:t>E‑posta Okuma</a:t>
+              <a:t>E‑poçtanı Oxumaq</a:t>
             </a:r>
             <a:endParaRPr b="0" lang="en-US" sz="2100" spc="-1" strike="noStrike">
               <a:solidFill>
@@ -13912,7 +13833,7 @@
         <p:spPr>
           <a:xfrm>
             <a:off x="783360" y="7154280"/>
-            <a:ext cx="13063320" cy="559440"/>
+            <a:ext cx="13062960" cy="559080"/>
           </a:xfrm>
           <a:prstGeom prst="rect">
             <a:avLst/>
@@ -14038,8 +13959,8 @@
         </p:nvSpPr>
         <p:spPr>
           <a:xfrm>
-            <a:off x="863640" y="923040"/>
-            <a:ext cx="5699520" cy="612720"/>
+            <a:off x="701640" y="1143000"/>
+            <a:ext cx="5699160" cy="612360"/>
           </a:xfrm>
           <a:prstGeom prst="rect">
             <a:avLst/>
@@ -14064,6 +13985,12 @@
               <a:lnSpc>
                 <a:spcPts val="4799"/>
               </a:lnSpc>
+              <a:spcBef>
+                <a:spcPts val="1191"/>
+              </a:spcBef>
+              <a:spcAft>
+                <a:spcPts val="992"/>
+              </a:spcAft>
               <a:tabLst>
                 <a:tab algn="l" pos="0"/>
               </a:tabLst>
@@ -14076,7 +14003,28 @@
                 <a:latin typeface="Montserrat Bold"/>
                 <a:ea typeface="Montserrat Bold"/>
               </a:rPr>
-              <a:t>ROI Qiymətləndirməsi</a:t>
+              <a:t>ROI (</a:t>
+            </a:r>
+            <a:r>
+              <a:rPr b="1" lang="en-US" sz="3850" spc="-1" strike="noStrike">
+                <a:solidFill>
+                  <a:srgbClr val="ffffff"/>
+                </a:solidFill>
+                <a:latin typeface="Montserrat Bold"/>
+                <a:ea typeface="Montserrat Bold"/>
+                <a:hlinkClick r:id="rId1"/>
+              </a:rPr>
+              <a:t>Return on Investment</a:t>
+            </a:r>
+            <a:r>
+              <a:rPr b="1" lang="en-US" sz="3850" spc="-1" strike="noStrike">
+                <a:solidFill>
+                  <a:srgbClr val="ffffff"/>
+                </a:solidFill>
+                <a:latin typeface="Montserrat Bold"/>
+                <a:ea typeface="Montserrat Bold"/>
+              </a:rPr>
+              <a:t>) Qiymətləndirməsi</a:t>
             </a:r>
             <a:endParaRPr b="0" lang="en-US" sz="3850" spc="-1" strike="noStrike">
               <a:solidFill>
@@ -14096,7 +14044,7 @@
         <p:spPr>
           <a:xfrm>
             <a:off x="863640" y="1968480"/>
-            <a:ext cx="12902040" cy="647280"/>
+            <a:ext cx="12901680" cy="646920"/>
           </a:xfrm>
           <a:prstGeom prst="rect">
             <a:avLst/>
@@ -14153,7 +14101,7 @@
         <p:spPr>
           <a:xfrm>
             <a:off x="708120" y="2859480"/>
-            <a:ext cx="6498360" cy="2983320"/>
+            <a:ext cx="6498000" cy="2982960"/>
           </a:xfrm>
           <a:prstGeom prst="roundRect">
             <a:avLst>
@@ -14201,7 +14149,7 @@
         <p:spPr>
           <a:xfrm>
             <a:off x="924120" y="3075120"/>
-            <a:ext cx="2965680" cy="306000"/>
+            <a:ext cx="2965320" cy="305640"/>
           </a:xfrm>
           <a:prstGeom prst="rect">
             <a:avLst/>
@@ -14278,7 +14226,7 @@
         <p:spPr>
           <a:xfrm>
             <a:off x="924120" y="3597840"/>
-            <a:ext cx="6066720" cy="2169720"/>
+            <a:ext cx="6066360" cy="2169360"/>
           </a:xfrm>
           <a:prstGeom prst="rect">
             <a:avLst/>
@@ -14453,7 +14401,7 @@
         <p:spPr>
           <a:xfrm>
             <a:off x="7586280" y="3075120"/>
-            <a:ext cx="3312360" cy="306000"/>
+            <a:ext cx="3312000" cy="305640"/>
           </a:xfrm>
           <a:prstGeom prst="rect">
             <a:avLst/>
@@ -14530,7 +14478,7 @@
         <p:spPr>
           <a:xfrm>
             <a:off x="7586280" y="3597840"/>
-            <a:ext cx="6187320" cy="2169720"/>
+            <a:ext cx="6186960" cy="2169360"/>
           </a:xfrm>
           <a:prstGeom prst="rect">
             <a:avLst/>
@@ -14705,7 +14653,7 @@
         <p:spPr>
           <a:xfrm>
             <a:off x="863640" y="6086520"/>
-            <a:ext cx="12902040" cy="1219320"/>
+            <a:ext cx="12901680" cy="1218960"/>
           </a:xfrm>
           <a:prstGeom prst="roundRect">
             <a:avLst>
@@ -14751,13 +14699,13 @@
           <p:nvPr/>
         </p:nvPicPr>
         <p:blipFill>
-          <a:blip r:embed="rId1"/>
+          <a:blip r:embed="rId2"/>
           <a:stretch/>
         </p:blipFill>
         <p:spPr>
           <a:xfrm>
             <a:off x="1079640" y="6395760"/>
-            <a:ext cx="269280" cy="215280"/>
+            <a:ext cx="268920" cy="214920"/>
           </a:xfrm>
           <a:prstGeom prst="rect">
             <a:avLst/>
@@ -14776,7 +14724,7 @@
         <p:spPr>
           <a:xfrm>
             <a:off x="1565280" y="6356160"/>
-            <a:ext cx="11984760" cy="647280"/>
+            <a:ext cx="11984400" cy="646920"/>
           </a:xfrm>
           <a:prstGeom prst="rect">
             <a:avLst/>
